--- a/Documents/Study.pptx
+++ b/Documents/Study.pptx
@@ -1107,6 +1107,13 @@
             <a:prstDash val="solid"/>
           </a:ln>
         </p:spPr>
+        <p:txBody>
+          <a:bodyPr/>
+          <a:lstStyle/>
+          <a:p>
+            <a:endParaRPr lang="de-DE" dirty="0"/>
+          </a:p>
+        </p:txBody>
       </p:sp>
       <p:sp>
         <p:nvSpPr>
@@ -1250,17 +1257,9 @@
               <a:buNone/>
             </a:pPr>
             <a:r>
-              <a:rPr lang="en-US" sz="1000" dirty="0">
-                <a:solidFill>
-                  <a:srgbClr val="1A1A1A"/>
-                </a:solidFill>
-                <a:latin typeface="Calibri" pitchFamily="34" charset="0"/>
-                <a:ea typeface="Calibri" pitchFamily="34" charset="-122"/>
-                <a:cs typeface="Calibri" pitchFamily="34" charset="-120"/>
-              </a:rPr>
-              <a:t>Project pitch  ·  14 May 2026</a:t>
-            </a:r>
-            <a:endParaRPr lang="en-US" sz="1000" dirty="0"/>
+              <a:rPr lang="en-US" sz="1000" dirty="0"/>
+              <a:t>Mai 2026</a:t>
+            </a:r>
           </a:p>
         </p:txBody>
       </p:sp>
@@ -1616,7 +1615,7 @@
                 <a:ea typeface="Calibri" pitchFamily="34" charset="-122"/>
                 <a:cs typeface="Calibri" pitchFamily="34" charset="-120"/>
               </a:rPr>
-              <a:t>Universität zu Lübeck  ·  Project pitch  ·  14 May 2026</a:t>
+              <a:t>Universität zu Lübeck  ·  May 2026</a:t>
             </a:r>
             <a:endParaRPr lang="en-US" sz="1200" dirty="0"/>
           </a:p>
@@ -1970,7 +1969,7 @@
                 <a:ea typeface="Calibri" pitchFamily="34" charset="-122"/>
                 <a:cs typeface="Calibri" pitchFamily="34" charset="-120"/>
               </a:rPr>
-              <a:t>Problem &amp; relevance</a:t>
+              <a:t>Problem &amp; Relevance</a:t>
             </a:r>
             <a:endParaRPr lang="en-US" sz="2600" dirty="0"/>
           </a:p>
@@ -2071,7 +2070,7 @@
                 <a:ea typeface="Calibri" pitchFamily="34" charset="-122"/>
                 <a:cs typeface="Calibri" pitchFamily="34" charset="-120"/>
               </a:rPr>
-              <a:t>Problem / research gap</a:t>
+              <a:t>Problem</a:t>
             </a:r>
             <a:endParaRPr lang="en-US" sz="1400" dirty="0"/>
           </a:p>
@@ -2085,8 +2084,8 @@
         </p:nvSpPr>
         <p:spPr>
           <a:xfrm>
-            <a:off x="411480" y="2240280"/>
-            <a:ext cx="5486400" cy="3657600"/>
+            <a:off x="411480" y="2240279"/>
+            <a:ext cx="5486400" cy="2067951"/>
           </a:xfrm>
           <a:prstGeom prst="rect">
             <a:avLst/>
@@ -2109,181 +2108,150 @@
                 <a:solidFill>
                   <a:srgbClr val="1A1A1A"/>
                 </a:solidFill>
-                <a:latin typeface="Calibri" pitchFamily="34" charset="0"/>
-                <a:ea typeface="Calibri" pitchFamily="34" charset="-122"/>
-                <a:cs typeface="Calibri" pitchFamily="34" charset="-120"/>
-              </a:rPr>
-              <a:t>When an AI system explains itself, two things happen separately: the system produces an explanation (</a:t>
-            </a:r>
-            <a:r>
-              <a:rPr lang="en-US" sz="1300" i="1" dirty="0">
-                <a:solidFill>
-                  <a:srgbClr val="1A1A1A"/>
-                </a:solidFill>
-                <a:latin typeface="Calibri" pitchFamily="34" charset="0"/>
-                <a:ea typeface="Calibri" pitchFamily="34" charset="-122"/>
-                <a:cs typeface="Calibri" pitchFamily="34" charset="-120"/>
-              </a:rPr>
-              <a:t>explainability</a:t>
-            </a:r>
-            <a:r>
-              <a:rPr lang="en-US" sz="1300" dirty="0">
-                <a:solidFill>
-                  <a:srgbClr val="1A1A1A"/>
-                </a:solidFill>
-                <a:latin typeface="Calibri" pitchFamily="34" charset="0"/>
-                <a:ea typeface="Calibri" pitchFamily="34" charset="-122"/>
-                <a:cs typeface="Calibri" pitchFamily="34" charset="-120"/>
-              </a:rPr>
-              <a:t>), and the operator's mental model updates (</a:t>
-            </a:r>
-            <a:r>
-              <a:rPr lang="en-US" sz="1300" i="1" dirty="0">
-                <a:solidFill>
-                  <a:srgbClr val="1A1A1A"/>
-                </a:solidFill>
-                <a:latin typeface="Calibri" pitchFamily="34" charset="0"/>
-                <a:ea typeface="Calibri" pitchFamily="34" charset="-122"/>
-                <a:cs typeface="Calibri" pitchFamily="34" charset="-120"/>
-              </a:rPr>
-              <a:t>explicability</a:t>
-            </a:r>
-            <a:r>
-              <a:rPr lang="en-US" sz="1300" dirty="0">
-                <a:solidFill>
-                  <a:srgbClr val="1A1A1A"/>
-                </a:solidFill>
-                <a:latin typeface="Calibri" pitchFamily="34" charset="0"/>
-                <a:ea typeface="Calibri" pitchFamily="34" charset="-122"/>
-                <a:cs typeface="Calibri" pitchFamily="34" charset="-120"/>
-              </a:rPr>
-              <a:t>).</a:t>
-            </a:r>
-            <a:endParaRPr lang="en-US" sz="1300" dirty="0"/>
-          </a:p>
-          <a:p>
-            <a:pPr marL="0" indent="0">
+                <a:ea typeface="Calibri" pitchFamily="34" charset="-122"/>
+                <a:cs typeface="Calibri" pitchFamily="34" charset="-120"/>
+              </a:rPr>
+              <a:t>When an AI system explains itself, three things come together: </a:t>
+            </a:r>
+          </a:p>
+          <a:p>
+            <a:pPr marL="285750" indent="-285750">
               <a:spcAft>
                 <a:spcPts val="400"/>
               </a:spcAft>
-              <a:buNone/>
-            </a:pPr>
-            <a:r>
-              <a:rPr lang="en-US" sz="600" dirty="0">
+              <a:buFont typeface="Arial" panose="020B0604020202020204" pitchFamily="34" charset="0"/>
+              <a:buChar char="•"/>
+            </a:pPr>
+            <a:r>
+              <a:rPr lang="en-US" sz="1300" b="1" dirty="0">
+                <a:solidFill>
+                  <a:srgbClr val="143847"/>
+                </a:solidFill>
+                <a:ea typeface="Calibri" pitchFamily="34" charset="-122"/>
+                <a:cs typeface="Calibri" pitchFamily="34" charset="-120"/>
+              </a:rPr>
+              <a:t>Transparency</a:t>
+            </a:r>
+            <a:r>
+              <a:rPr lang="en-US" sz="1300" dirty="0">
                 <a:solidFill>
                   <a:srgbClr val="1A1A1A"/>
                 </a:solidFill>
-                <a:latin typeface="Calibri" pitchFamily="34" charset="0"/>
-                <a:ea typeface="Calibri" pitchFamily="34" charset="-122"/>
-                <a:cs typeface="Calibri" pitchFamily="34" charset="-120"/>
-              </a:rPr>
-              <a:t> </a:t>
-            </a:r>
-            <a:endParaRPr lang="en-US" sz="1300" dirty="0"/>
-          </a:p>
-          <a:p>
-            <a:pPr marL="0" indent="0">
+                <a:ea typeface="Calibri" pitchFamily="34" charset="-122"/>
+                <a:cs typeface="Calibri" pitchFamily="34" charset="-120"/>
+              </a:rPr>
+              <a:t> gives the operator insight into the systems inner workings</a:t>
+            </a:r>
+          </a:p>
+          <a:p>
+            <a:pPr marL="285750" indent="-285750">
               <a:spcAft>
                 <a:spcPts val="400"/>
               </a:spcAft>
-              <a:buNone/>
-            </a:pPr>
+              <a:buFont typeface="Arial" panose="020B0604020202020204" pitchFamily="34" charset="0"/>
+              <a:buChar char="•"/>
+            </a:pPr>
+            <a:r>
+              <a:rPr lang="en-US" sz="1300" b="1" dirty="0">
+                <a:solidFill>
+                  <a:srgbClr val="143847"/>
+                </a:solidFill>
+                <a:ea typeface="Calibri" pitchFamily="34" charset="-122"/>
+                <a:cs typeface="Calibri" pitchFamily="34" charset="-120"/>
+              </a:rPr>
+              <a:t>Explainability</a:t>
+            </a:r>
+            <a:r>
+              <a:rPr lang="en-US" sz="1300" b="1" dirty="0">
+                <a:solidFill>
+                  <a:srgbClr val="1A1A1A"/>
+                </a:solidFill>
+                <a:ea typeface="Calibri" pitchFamily="34" charset="-122"/>
+                <a:cs typeface="Calibri" pitchFamily="34" charset="-120"/>
+              </a:rPr>
+              <a:t> </a:t>
+            </a:r>
             <a:r>
               <a:rPr lang="en-US" sz="1300" dirty="0">
                 <a:solidFill>
                   <a:srgbClr val="1A1A1A"/>
                 </a:solidFill>
-                <a:latin typeface="Calibri" pitchFamily="34" charset="0"/>
-                <a:ea typeface="Calibri" pitchFamily="34" charset="-122"/>
-                <a:cs typeface="Calibri" pitchFamily="34" charset="-120"/>
-              </a:rPr>
-              <a:t>The transparency literature has focused on </a:t>
-            </a:r>
-            <a:r>
-              <a:rPr lang="en-US" sz="1300" i="1" dirty="0">
-                <a:solidFill>
-                  <a:srgbClr val="1A1A1A"/>
-                </a:solidFill>
-                <a:latin typeface="Calibri" pitchFamily="34" charset="0"/>
-                <a:ea typeface="Calibri" pitchFamily="34" charset="-122"/>
-                <a:cs typeface="Calibri" pitchFamily="34" charset="-120"/>
-              </a:rPr>
-              <a:t>how much</a:t>
-            </a:r>
-            <a:r>
-              <a:rPr lang="en-US" sz="1300" dirty="0">
-                <a:solidFill>
-                  <a:srgbClr val="1A1A1A"/>
-                </a:solidFill>
-                <a:latin typeface="Calibri" pitchFamily="34" charset="0"/>
-                <a:ea typeface="Calibri" pitchFamily="34" charset="-122"/>
-                <a:cs typeface="Calibri" pitchFamily="34" charset="-120"/>
-              </a:rPr>
-              <a:t> information an aid provides — not on </a:t>
-            </a:r>
-            <a:r>
-              <a:rPr lang="en-US" sz="1300" i="1" dirty="0">
-                <a:solidFill>
-                  <a:srgbClr val="1A1A1A"/>
-                </a:solidFill>
-                <a:latin typeface="Calibri" pitchFamily="34" charset="0"/>
-                <a:ea typeface="Calibri" pitchFamily="34" charset="-122"/>
-                <a:cs typeface="Calibri" pitchFamily="34" charset="-120"/>
-              </a:rPr>
-              <a:t>how</a:t>
-            </a:r>
-            <a:r>
-              <a:rPr lang="en-US" sz="1300" dirty="0">
-                <a:solidFill>
-                  <a:srgbClr val="1A1A1A"/>
-                </a:solidFill>
-                <a:latin typeface="Calibri" pitchFamily="34" charset="0"/>
-                <a:ea typeface="Calibri" pitchFamily="34" charset="-122"/>
-                <a:cs typeface="Calibri" pitchFamily="34" charset="-120"/>
-              </a:rPr>
-              <a:t> it is delivered.</a:t>
-            </a:r>
-            <a:endParaRPr lang="en-US" sz="1300" dirty="0"/>
-          </a:p>
-          <a:p>
-            <a:pPr marL="0" indent="0">
+                <a:ea typeface="Calibri" pitchFamily="34" charset="-122"/>
+                <a:cs typeface="Calibri" pitchFamily="34" charset="-120"/>
+              </a:rPr>
+              <a:t>is the system's act of producing an explanation of what it did and how</a:t>
+            </a:r>
+          </a:p>
+          <a:p>
+            <a:pPr marL="285750" indent="-285750">
               <a:spcAft>
                 <a:spcPts val="400"/>
               </a:spcAft>
-              <a:buNone/>
-            </a:pPr>
-            <a:r>
-              <a:rPr lang="en-US" sz="600" dirty="0">
+              <a:buFont typeface="Arial" panose="020B0604020202020204" pitchFamily="34" charset="0"/>
+              <a:buChar char="•"/>
+            </a:pPr>
+            <a:r>
+              <a:rPr lang="en-US" sz="1300" b="1" dirty="0">
+                <a:solidFill>
+                  <a:srgbClr val="143847"/>
+                </a:solidFill>
+                <a:ea typeface="Calibri" pitchFamily="34" charset="-122"/>
+                <a:cs typeface="Calibri" pitchFamily="34" charset="-120"/>
+              </a:rPr>
+              <a:t>Explicability</a:t>
+            </a:r>
+            <a:r>
+              <a:rPr lang="en-US" sz="1300" dirty="0">
                 <a:solidFill>
                   <a:srgbClr val="1A1A1A"/>
                 </a:solidFill>
-                <a:latin typeface="Calibri" pitchFamily="34" charset="0"/>
-                <a:ea typeface="Calibri" pitchFamily="34" charset="-122"/>
-                <a:cs typeface="Calibri" pitchFamily="34" charset="-120"/>
-              </a:rPr>
-              <a:t> </a:t>
-            </a:r>
-            <a:endParaRPr lang="en-US" sz="1300" dirty="0"/>
-          </a:p>
-          <a:p>
-            <a:pPr marL="0" indent="0">
+                <a:ea typeface="Calibri" pitchFamily="34" charset="-122"/>
+                <a:cs typeface="Calibri" pitchFamily="34" charset="-120"/>
+              </a:rPr>
+              <a:t> is whether that explanation is actually understood and processed by the operator.</a:t>
+            </a:r>
+          </a:p>
+          <a:p>
+            <a:pPr>
               <a:spcAft>
                 <a:spcPts val="400"/>
               </a:spcAft>
-              <a:buNone/>
-            </a:pPr>
+            </a:pPr>
+            <a:r>
+              <a:rPr lang="en-US" sz="1400" b="0" i="0" dirty="0">
+                <a:solidFill>
+                  <a:srgbClr val="3B3B3B"/>
+                </a:solidFill>
+                <a:effectLst/>
+              </a:rPr>
+              <a:t>We want to focus on the effects of different </a:t>
+            </a:r>
             <a:r>
               <a:rPr lang="en-US" sz="1300" b="1" dirty="0">
                 <a:solidFill>
                   <a:srgbClr val="143847"/>
                 </a:solidFill>
-                <a:latin typeface="Calibri" pitchFamily="34" charset="0"/>
-                <a:ea typeface="Calibri" pitchFamily="34" charset="-122"/>
-                <a:cs typeface="Calibri" pitchFamily="34" charset="-120"/>
-              </a:rPr>
-              <a:t>We isolate the form effect by holding information content constant.</a:t>
-            </a:r>
-            <a:endParaRPr lang="en-US" sz="1300" dirty="0"/>
+                <a:ea typeface="Calibri" pitchFamily="34" charset="-122"/>
+                <a:cs typeface="Calibri" pitchFamily="34" charset="-120"/>
+              </a:rPr>
+              <a:t>forms of an explanation </a:t>
+            </a:r>
+            <a:r>
+              <a:rPr lang="en-US" sz="1400" b="0" i="0" dirty="0">
+                <a:solidFill>
+                  <a:srgbClr val="3B3B3B"/>
+                </a:solidFill>
+                <a:effectLst/>
+              </a:rPr>
+              <a:t>while holding the information content constant. </a:t>
+            </a:r>
+            <a:endParaRPr lang="en-US" sz="1300" dirty="0">
+              <a:solidFill>
+                <a:srgbClr val="1A1A1A"/>
+              </a:solidFill>
+              <a:ea typeface="Calibri" pitchFamily="34" charset="-122"/>
+              <a:cs typeface="Calibri" pitchFamily="34" charset="-120"/>
+            </a:endParaRPr>
           </a:p>
         </p:txBody>
       </p:sp>
@@ -2295,8 +2263,8 @@
         </p:nvSpPr>
         <p:spPr>
           <a:xfrm>
-            <a:off x="6080760" y="1874520"/>
-            <a:ext cx="0" cy="4023360"/>
+            <a:off x="6080760" y="1874519"/>
+            <a:ext cx="15240" cy="4315251"/>
           </a:xfrm>
           <a:prstGeom prst="line">
             <a:avLst/>
@@ -2318,7 +2286,7 @@
         </p:nvSpPr>
         <p:spPr>
           <a:xfrm>
-            <a:off x="6263640" y="1874520"/>
+            <a:off x="6278880" y="1929383"/>
             <a:ext cx="5486400" cy="310896"/>
           </a:xfrm>
           <a:prstGeom prst="rect">
@@ -2357,8 +2325,227 @@
         </p:nvSpPr>
         <p:spPr>
           <a:xfrm>
-            <a:off x="6263640" y="2240280"/>
-            <a:ext cx="5486400" cy="3657600"/>
+            <a:off x="6309360" y="4428269"/>
+            <a:ext cx="5486400" cy="1831854"/>
+          </a:xfrm>
+          <a:prstGeom prst="rect">
+            <a:avLst/>
+          </a:prstGeom>
+          <a:noFill/>
+          <a:ln/>
+        </p:spPr>
+        <p:txBody>
+          <a:bodyPr wrap="square" lIns="0" tIns="0" rIns="0" bIns="0" rtlCol="0" anchor="t"/>
+          <a:lstStyle/>
+          <a:p>
+            <a:pPr algn="l"/>
+            <a:r>
+              <a:rPr lang="en-US" sz="1400" b="0" i="0" dirty="0">
+                <a:solidFill>
+                  <a:srgbClr val="3B3B3B"/>
+                </a:solidFill>
+                <a:effectLst/>
+              </a:rPr>
+              <a:t>Transparency studies (Mercado 2016, Stowers 2017) vary the </a:t>
+            </a:r>
+            <a:r>
+              <a:rPr lang="en-US" sz="1400" b="0" i="1" dirty="0">
+                <a:solidFill>
+                  <a:srgbClr val="3B3B3B"/>
+                </a:solidFill>
+                <a:effectLst/>
+              </a:rPr>
+              <a:t>level</a:t>
+            </a:r>
+            <a:r>
+              <a:rPr lang="en-US" sz="1400" b="0" i="0" dirty="0">
+                <a:solidFill>
+                  <a:srgbClr val="3B3B3B"/>
+                </a:solidFill>
+                <a:effectLst/>
+              </a:rPr>
+              <a:t> of information but do not distinguish information </a:t>
+            </a:r>
+            <a:r>
+              <a:rPr lang="en-US" sz="1400" b="1" dirty="0">
+                <a:solidFill>
+                  <a:srgbClr val="143847"/>
+                </a:solidFill>
+                <a:latin typeface="Calibri" pitchFamily="34" charset="0"/>
+                <a:ea typeface="Calibri" pitchFamily="34" charset="-122"/>
+                <a:cs typeface="Calibri" pitchFamily="34" charset="-120"/>
+              </a:rPr>
+              <a:t>content</a:t>
+            </a:r>
+            <a:r>
+              <a:rPr lang="en-US" sz="1400" b="0" i="0" dirty="0">
+                <a:solidFill>
+                  <a:srgbClr val="3B3B3B"/>
+                </a:solidFill>
+                <a:effectLst/>
+              </a:rPr>
+              <a:t> and </a:t>
+            </a:r>
+            <a:r>
+              <a:rPr lang="en-US" sz="1400" b="1" dirty="0">
+                <a:solidFill>
+                  <a:srgbClr val="143847"/>
+                </a:solidFill>
+                <a:latin typeface="Calibri" pitchFamily="34" charset="0"/>
+                <a:ea typeface="Calibri" pitchFamily="34" charset="-122"/>
+                <a:cs typeface="Calibri" pitchFamily="34" charset="-120"/>
+              </a:rPr>
+              <a:t>presentation</a:t>
+            </a:r>
+            <a:r>
+              <a:rPr lang="en-US" sz="1400" b="0" i="0" dirty="0">
+                <a:solidFill>
+                  <a:srgbClr val="3B3B3B"/>
+                </a:solidFill>
+                <a:effectLst/>
+              </a:rPr>
+              <a:t>. Our design holds content and varies </a:t>
+            </a:r>
+            <a:r>
+              <a:rPr lang="en-US" sz="1400" b="1" dirty="0">
+                <a:solidFill>
+                  <a:srgbClr val="143847"/>
+                </a:solidFill>
+                <a:latin typeface="Calibri" pitchFamily="34" charset="0"/>
+                <a:ea typeface="Calibri" pitchFamily="34" charset="-122"/>
+                <a:cs typeface="Calibri" pitchFamily="34" charset="-120"/>
+              </a:rPr>
+              <a:t>only the form</a:t>
+            </a:r>
+            <a:r>
+              <a:rPr lang="en-US" sz="1400" b="0" i="0" dirty="0">
+                <a:solidFill>
+                  <a:srgbClr val="3B3B3B"/>
+                </a:solidFill>
+                <a:effectLst/>
+              </a:rPr>
+              <a:t>, which isolates the presentation aspect.</a:t>
+            </a:r>
+          </a:p>
+          <a:p>
+            <a:pPr algn="l"/>
+            <a:endParaRPr lang="en-US" sz="1400" dirty="0">
+              <a:solidFill>
+                <a:srgbClr val="3B3B3B"/>
+              </a:solidFill>
+            </a:endParaRPr>
+          </a:p>
+          <a:p>
+            <a:pPr algn="l"/>
+            <a:r>
+              <a:rPr lang="en-US" sz="1400" b="0" i="0" dirty="0">
+                <a:solidFill>
+                  <a:srgbClr val="3B3B3B"/>
+                </a:solidFill>
+                <a:effectLst/>
+              </a:rPr>
+              <a:t>The XAI literature (Wang &amp; Yin 2021, Bansal 2021) has shown explanations can raise trust without improving understanding, but only in one-shot decisions. We test the same dissociation under </a:t>
+            </a:r>
+            <a:r>
+              <a:rPr lang="en-US" sz="1400" b="1" dirty="0">
+                <a:solidFill>
+                  <a:srgbClr val="143847"/>
+                </a:solidFill>
+                <a:latin typeface="Calibri" pitchFamily="34" charset="0"/>
+                <a:ea typeface="Calibri" pitchFamily="34" charset="-122"/>
+                <a:cs typeface="Calibri" pitchFamily="34" charset="-120"/>
+              </a:rPr>
+              <a:t>multitasking load</a:t>
+            </a:r>
+            <a:r>
+              <a:rPr lang="en-US" sz="1400" b="0" i="0" dirty="0">
+                <a:solidFill>
+                  <a:srgbClr val="3B3B3B"/>
+                </a:solidFill>
+                <a:effectLst/>
+              </a:rPr>
+              <a:t>.</a:t>
+            </a:r>
+          </a:p>
+          <a:p>
+            <a:br>
+              <a:rPr lang="en-US" sz="1400" dirty="0"/>
+            </a:br>
+            <a:r>
+              <a:rPr lang="en-US" sz="600" dirty="0">
+                <a:solidFill>
+                  <a:srgbClr val="1A1A1A"/>
+                </a:solidFill>
+                <a:ea typeface="Calibri" pitchFamily="34" charset="-122"/>
+                <a:cs typeface="Calibri" pitchFamily="34" charset="-120"/>
+              </a:rPr>
+              <a:t> </a:t>
+            </a:r>
+            <a:endParaRPr lang="en-US" sz="1300" dirty="0"/>
+          </a:p>
+        </p:txBody>
+      </p:sp>
+      <p:sp>
+        <p:nvSpPr>
+          <p:cNvPr id="18" name="Text 11">
+            <a:extLst>
+              <a:ext uri="{FF2B5EF4-FFF2-40B4-BE49-F238E27FC236}">
+                <a16:creationId xmlns:a16="http://schemas.microsoft.com/office/drawing/2014/main" id="{63DA7977-11F1-D627-5998-16F138B908DE}"/>
+              </a:ext>
+            </a:extLst>
+          </p:cNvPr>
+          <p:cNvSpPr/>
+          <p:nvPr/>
+        </p:nvSpPr>
+        <p:spPr>
+          <a:xfrm>
+            <a:off x="411480" y="4479856"/>
+            <a:ext cx="5486400" cy="310896"/>
+          </a:xfrm>
+          <a:prstGeom prst="rect">
+            <a:avLst/>
+          </a:prstGeom>
+          <a:noFill/>
+          <a:ln/>
+        </p:spPr>
+        <p:txBody>
+          <a:bodyPr wrap="square" lIns="0" tIns="0" rIns="0" bIns="0" rtlCol="0" anchor="ctr"/>
+          <a:lstStyle/>
+          <a:p>
+            <a:pPr marL="0" indent="0">
+              <a:buNone/>
+            </a:pPr>
+            <a:r>
+              <a:rPr lang="en-US" sz="1400" b="1" dirty="0">
+                <a:solidFill>
+                  <a:srgbClr val="143847"/>
+                </a:solidFill>
+                <a:latin typeface="Calibri" pitchFamily="34" charset="0"/>
+                <a:ea typeface="Calibri" pitchFamily="34" charset="-122"/>
+                <a:cs typeface="Calibri" pitchFamily="34" charset="-120"/>
+              </a:rPr>
+              <a:t>Relation to the lecture content</a:t>
+            </a:r>
+            <a:endParaRPr lang="en-US" sz="1400" dirty="0"/>
+          </a:p>
+        </p:txBody>
+      </p:sp>
+      <p:sp>
+        <p:nvSpPr>
+          <p:cNvPr id="20" name="Text 12">
+            <a:extLst>
+              <a:ext uri="{FF2B5EF4-FFF2-40B4-BE49-F238E27FC236}">
+                <a16:creationId xmlns:a16="http://schemas.microsoft.com/office/drawing/2014/main" id="{D8369497-5F6A-ECFB-7F41-B1DAB0A100EC}"/>
+              </a:ext>
+            </a:extLst>
+          </p:cNvPr>
+          <p:cNvSpPr/>
+          <p:nvPr/>
+        </p:nvSpPr>
+        <p:spPr>
+          <a:xfrm>
+            <a:off x="411480" y="4809508"/>
+            <a:ext cx="5486400" cy="1606238"/>
           </a:xfrm>
           <a:prstGeom prst="rect">
             <a:avLst/>
@@ -2377,69 +2564,232 @@
               <a:buNone/>
             </a:pPr>
             <a:r>
-              <a:rPr lang="en-US" sz="1300" dirty="0">
-                <a:solidFill>
-                  <a:srgbClr val="1A1A1A"/>
-                </a:solidFill>
-                <a:latin typeface="Calibri" pitchFamily="34" charset="0"/>
-                <a:ea typeface="Calibri" pitchFamily="34" charset="-122"/>
-                <a:cs typeface="Calibri" pitchFamily="34" charset="-120"/>
-              </a:rPr>
-              <a:t>The distinction matters wherever a human supervises an automated system — </a:t>
-            </a:r>
-            <a:r>
-              <a:rPr lang="en-US" sz="1300" b="1" dirty="0">
-                <a:solidFill>
-                  <a:srgbClr val="1A1A1A"/>
-                </a:solidFill>
-                <a:latin typeface="Calibri" pitchFamily="34" charset="0"/>
-                <a:ea typeface="Calibri" pitchFamily="34" charset="-122"/>
-                <a:cs typeface="Calibri" pitchFamily="34" charset="-120"/>
-              </a:rPr>
-              <a:t>aviation, medical monitoring, autonomous driving aids.</a:t>
-            </a:r>
-            <a:endParaRPr lang="en-US" sz="1300" dirty="0"/>
-          </a:p>
-          <a:p>
-            <a:pPr marL="0" indent="0">
+              <a:rPr lang="en-US" sz="1300" b="0" i="0" dirty="0">
+                <a:solidFill>
+                  <a:srgbClr val="3B3B3B"/>
+                </a:solidFill>
+                <a:effectLst/>
+                <a:latin typeface="-apple-system"/>
+              </a:rPr>
+              <a:t>The project is anchored in two lectures: </a:t>
+            </a:r>
+          </a:p>
+          <a:p>
+            <a:pPr marL="285750" indent="-285750">
               <a:spcAft>
                 <a:spcPts val="400"/>
               </a:spcAft>
-              <a:buNone/>
-            </a:pPr>
-            <a:r>
-              <a:rPr lang="en-US" sz="600" dirty="0">
-                <a:solidFill>
-                  <a:srgbClr val="1A1A1A"/>
-                </a:solidFill>
-                <a:latin typeface="Calibri" pitchFamily="34" charset="0"/>
-                <a:ea typeface="Calibri" pitchFamily="34" charset="-122"/>
-                <a:cs typeface="Calibri" pitchFamily="34" charset="-120"/>
-              </a:rPr>
-              <a:t> </a:t>
-            </a:r>
-            <a:endParaRPr lang="en-US" sz="1300" dirty="0"/>
-          </a:p>
-          <a:p>
-            <a:pPr marL="0" indent="0">
+              <a:buFont typeface="Arial" panose="020B0604020202020204" pitchFamily="34" charset="0"/>
+              <a:buChar char="•"/>
+            </a:pPr>
+            <a:r>
+              <a:rPr lang="en-US" sz="1300" b="1" dirty="0">
+                <a:solidFill>
+                  <a:srgbClr val="143847"/>
+                </a:solidFill>
+                <a:latin typeface="Calibri" pitchFamily="34" charset="0"/>
+                <a:ea typeface="Calibri" pitchFamily="34" charset="-122"/>
+                <a:cs typeface="Calibri" pitchFamily="34" charset="-120"/>
+              </a:rPr>
+              <a:t>Transparency</a:t>
+            </a:r>
+            <a:r>
+              <a:rPr lang="en-US" sz="1300" dirty="0">
+                <a:solidFill>
+                  <a:srgbClr val="3B3B3B"/>
+                </a:solidFill>
+                <a:latin typeface="-apple-system"/>
+              </a:rPr>
+              <a:t>: </a:t>
+            </a:r>
+            <a:r>
+              <a:rPr lang="en-US" sz="1300" b="0" i="0" dirty="0">
+                <a:solidFill>
+                  <a:srgbClr val="3B3B3B"/>
+                </a:solidFill>
+                <a:effectLst/>
+                <a:latin typeface="-apple-system"/>
+              </a:rPr>
+              <a:t>The question of what level of information the aid should communicate, Three-Gap-Model</a:t>
+            </a:r>
+          </a:p>
+          <a:p>
+            <a:pPr marL="285750" indent="-285750">
               <a:spcAft>
                 <a:spcPts val="400"/>
               </a:spcAft>
-              <a:buNone/>
-            </a:pPr>
+              <a:buFont typeface="Arial" panose="020B0604020202020204" pitchFamily="34" charset="0"/>
+              <a:buChar char="•"/>
+            </a:pPr>
+            <a:r>
+              <a:rPr lang="en-US" sz="1300" b="1" dirty="0">
+                <a:solidFill>
+                  <a:srgbClr val="143847"/>
+                </a:solidFill>
+                <a:latin typeface="Calibri" pitchFamily="34" charset="0"/>
+                <a:ea typeface="Calibri" pitchFamily="34" charset="-122"/>
+                <a:cs typeface="Calibri" pitchFamily="34" charset="-120"/>
+              </a:rPr>
+              <a:t>Explainability &amp; Explicability</a:t>
+            </a:r>
             <a:r>
               <a:rPr lang="en-US" sz="1300" dirty="0">
                 <a:solidFill>
-                  <a:srgbClr val="1A1A1A"/>
-                </a:solidFill>
-                <a:latin typeface="Calibri" pitchFamily="34" charset="0"/>
-                <a:ea typeface="Calibri" pitchFamily="34" charset="-122"/>
-                <a:cs typeface="Calibri" pitchFamily="34" charset="-120"/>
-              </a:rPr>
-              <a:t>If an explanation is long and reads like a status log, the operator may feel informed without being able to predict the system's next action.</a:t>
-            </a:r>
-            <a:endParaRPr lang="en-US" sz="1300" dirty="0"/>
-          </a:p>
+                  <a:srgbClr val="3B3B3B"/>
+                </a:solidFill>
+                <a:latin typeface="-apple-system"/>
+              </a:rPr>
+              <a:t>: </a:t>
+            </a:r>
+            <a:r>
+              <a:rPr lang="en-US" sz="1300" b="0" i="0" dirty="0">
+                <a:solidFill>
+                  <a:srgbClr val="3B3B3B"/>
+                </a:solidFill>
+                <a:effectLst/>
+                <a:latin typeface="-apple-system"/>
+              </a:rPr>
+              <a:t>Criteria for good explanations, among others </a:t>
+            </a:r>
+            <a:r>
+              <a:rPr lang="de-DE" sz="1300" b="0" i="0" dirty="0" err="1">
+                <a:solidFill>
+                  <a:srgbClr val="3B3B3B"/>
+                </a:solidFill>
+                <a:effectLst/>
+                <a:latin typeface="-apple-system"/>
+              </a:rPr>
+              <a:t>selectivity</a:t>
+            </a:r>
+            <a:r>
+              <a:rPr lang="de-DE" sz="1300" b="0" i="0" dirty="0">
+                <a:solidFill>
+                  <a:srgbClr val="3B3B3B"/>
+                </a:solidFill>
+                <a:effectLst/>
+                <a:latin typeface="-apple-system"/>
+              </a:rPr>
+              <a:t>, </a:t>
+            </a:r>
+            <a:r>
+              <a:rPr lang="de-DE" sz="1300" b="0" i="0" dirty="0" err="1">
+                <a:solidFill>
+                  <a:srgbClr val="3B3B3B"/>
+                </a:solidFill>
+                <a:effectLst/>
+                <a:latin typeface="-apple-system"/>
+              </a:rPr>
+              <a:t>contrastiveness</a:t>
+            </a:r>
+            <a:r>
+              <a:rPr lang="de-DE" sz="1300" dirty="0">
+                <a:solidFill>
+                  <a:srgbClr val="3B3B3B"/>
+                </a:solidFill>
+                <a:latin typeface="-apple-system"/>
+              </a:rPr>
+              <a:t> and </a:t>
+            </a:r>
+            <a:r>
+              <a:rPr lang="de-DE" sz="1300" b="0" i="0" dirty="0" err="1">
+                <a:solidFill>
+                  <a:srgbClr val="3B3B3B"/>
+                </a:solidFill>
+                <a:effectLst/>
+                <a:latin typeface="-apple-system"/>
+              </a:rPr>
+              <a:t>actionability</a:t>
+            </a:r>
+            <a:r>
+              <a:rPr lang="en-US" sz="1300" dirty="0">
+                <a:solidFill>
+                  <a:srgbClr val="3B3B3B"/>
+                </a:solidFill>
+                <a:latin typeface="-apple-system"/>
+              </a:rPr>
+              <a:t>.</a:t>
+            </a:r>
+            <a:endParaRPr lang="en-US" sz="1300" dirty="0">
+              <a:solidFill>
+                <a:srgbClr val="1A1A1A"/>
+              </a:solidFill>
+              <a:ea typeface="Calibri" pitchFamily="34" charset="-122"/>
+              <a:cs typeface="Calibri" pitchFamily="34" charset="-120"/>
+            </a:endParaRPr>
+          </a:p>
+        </p:txBody>
+      </p:sp>
+      <p:sp>
+        <p:nvSpPr>
+          <p:cNvPr id="21" name="Text 14">
+            <a:extLst>
+              <a:ext uri="{FF2B5EF4-FFF2-40B4-BE49-F238E27FC236}">
+                <a16:creationId xmlns:a16="http://schemas.microsoft.com/office/drawing/2014/main" id="{7AC0B3D1-626A-52D3-F751-9B2913BC0B89}"/>
+              </a:ext>
+            </a:extLst>
+          </p:cNvPr>
+          <p:cNvSpPr/>
+          <p:nvPr/>
+        </p:nvSpPr>
+        <p:spPr>
+          <a:xfrm>
+            <a:off x="6309360" y="4021362"/>
+            <a:ext cx="5486400" cy="310896"/>
+          </a:xfrm>
+          <a:prstGeom prst="rect">
+            <a:avLst/>
+          </a:prstGeom>
+          <a:noFill/>
+          <a:ln/>
+        </p:spPr>
+        <p:txBody>
+          <a:bodyPr wrap="square" lIns="0" tIns="0" rIns="0" bIns="0" rtlCol="0" anchor="ctr"/>
+          <a:lstStyle/>
+          <a:p>
+            <a:pPr marL="0" indent="0">
+              <a:buNone/>
+            </a:pPr>
+            <a:r>
+              <a:rPr lang="en-US" sz="1400" b="1" dirty="0">
+                <a:solidFill>
+                  <a:srgbClr val="143847"/>
+                </a:solidFill>
+                <a:latin typeface="Calibri" pitchFamily="34" charset="0"/>
+                <a:ea typeface="Calibri" pitchFamily="34" charset="-122"/>
+                <a:cs typeface="Calibri" pitchFamily="34" charset="-120"/>
+              </a:rPr>
+              <a:t>Research Gap</a:t>
+            </a:r>
+            <a:endParaRPr lang="en-US" sz="1400" dirty="0"/>
+          </a:p>
+        </p:txBody>
+      </p:sp>
+      <p:sp>
+        <p:nvSpPr>
+          <p:cNvPr id="22" name="Text 15">
+            <a:extLst>
+              <a:ext uri="{FF2B5EF4-FFF2-40B4-BE49-F238E27FC236}">
+                <a16:creationId xmlns:a16="http://schemas.microsoft.com/office/drawing/2014/main" id="{8083DEF1-AA3A-8D23-2086-A40348F06C6C}"/>
+              </a:ext>
+            </a:extLst>
+          </p:cNvPr>
+          <p:cNvSpPr/>
+          <p:nvPr/>
+        </p:nvSpPr>
+        <p:spPr>
+          <a:xfrm>
+            <a:off x="6278880" y="2296611"/>
+            <a:ext cx="5486400" cy="1531615"/>
+          </a:xfrm>
+          <a:prstGeom prst="rect">
+            <a:avLst/>
+          </a:prstGeom>
+          <a:noFill/>
+          <a:ln/>
+        </p:spPr>
+        <p:txBody>
+          <a:bodyPr wrap="square" lIns="0" tIns="0" rIns="0" bIns="0" rtlCol="0" anchor="t"/>
+          <a:lstStyle/>
           <a:p>
             <a:pPr marL="0" indent="0">
               <a:spcAft>
@@ -2448,15 +2798,35 @@
               <a:buNone/>
             </a:pPr>
             <a:r>
-              <a:rPr lang="en-US" sz="600" dirty="0">
+              <a:rPr lang="en-US" sz="1300" dirty="0">
                 <a:solidFill>
                   <a:srgbClr val="1A1A1A"/>
                 </a:solidFill>
-                <a:latin typeface="Calibri" pitchFamily="34" charset="0"/>
-                <a:ea typeface="Calibri" pitchFamily="34" charset="-122"/>
-                <a:cs typeface="Calibri" pitchFamily="34" charset="-120"/>
-              </a:rPr>
-              <a:t> </a:t>
+                <a:ea typeface="Calibri" pitchFamily="34" charset="-122"/>
+                <a:cs typeface="Calibri" pitchFamily="34" charset="-120"/>
+              </a:rPr>
+              <a:t>The distinction matters wherever a human supervises an automated system — </a:t>
+            </a:r>
+            <a:r>
+              <a:rPr lang="en-US" sz="1300" b="1" dirty="0">
+                <a:solidFill>
+                  <a:srgbClr val="143847"/>
+                </a:solidFill>
+                <a:latin typeface="Calibri" pitchFamily="34" charset="0"/>
+                <a:ea typeface="Calibri" pitchFamily="34" charset="-122"/>
+                <a:cs typeface="Calibri" pitchFamily="34" charset="-120"/>
+              </a:rPr>
+              <a:t>aviation, medical monitoring, autonomous driving aids</a:t>
+            </a:r>
+            <a:r>
+              <a:rPr lang="en-US" sz="1300" b="1" dirty="0">
+                <a:solidFill>
+                  <a:srgbClr val="1A1A1A"/>
+                </a:solidFill>
+                <a:ea typeface="Calibri" pitchFamily="34" charset="-122"/>
+                <a:cs typeface="Calibri" pitchFamily="34" charset="-120"/>
+              </a:rPr>
+              <a:t>.</a:t>
             </a:r>
             <a:endParaRPr lang="en-US" sz="1300" dirty="0"/>
           </a:p>
@@ -2468,15 +2838,68 @@
               <a:buNone/>
             </a:pPr>
             <a:r>
-              <a:rPr lang="en-US" sz="1300" i="1" dirty="0">
-                <a:solidFill>
-                  <a:srgbClr val="143847"/>
-                </a:solidFill>
-                <a:latin typeface="Calibri" pitchFamily="34" charset="0"/>
-                <a:ea typeface="Calibri" pitchFamily="34" charset="-122"/>
-                <a:cs typeface="Calibri" pitchFamily="34" charset="-120"/>
-              </a:rPr>
-              <a:t>That failure mode has measurable consequences for detecting automation errors — and it is precisely what the lecture warns against.</a:t>
+              <a:rPr lang="en-US" sz="600" dirty="0">
+                <a:solidFill>
+                  <a:srgbClr val="1A1A1A"/>
+                </a:solidFill>
+                <a:ea typeface="Calibri" pitchFamily="34" charset="-122"/>
+                <a:cs typeface="Calibri" pitchFamily="34" charset="-120"/>
+              </a:rPr>
+              <a:t> </a:t>
+            </a:r>
+            <a:endParaRPr lang="en-US" sz="1300" dirty="0"/>
+          </a:p>
+          <a:p>
+            <a:pPr marL="0" indent="0">
+              <a:spcAft>
+                <a:spcPts val="400"/>
+              </a:spcAft>
+              <a:buNone/>
+            </a:pPr>
+            <a:r>
+              <a:rPr lang="en-US" sz="1300" dirty="0">
+                <a:solidFill>
+                  <a:srgbClr val="1A1A1A"/>
+                </a:solidFill>
+                <a:ea typeface="Calibri" pitchFamily="34" charset="-122"/>
+                <a:cs typeface="Calibri" pitchFamily="34" charset="-120"/>
+              </a:rPr>
+              <a:t>If an explanation is long and reads like a status log, the operator may feel informed without being able to predict the system's next action. This may lead to the human supervisor missing automation errors with </a:t>
+            </a:r>
+            <a:r>
+              <a:rPr lang="de-DE" sz="1400" dirty="0" err="1"/>
+              <a:t>far-reaching</a:t>
+            </a:r>
+            <a:r>
+              <a:rPr lang="de-DE" sz="1400" dirty="0"/>
+              <a:t> </a:t>
+            </a:r>
+            <a:r>
+              <a:rPr lang="de-DE" sz="1400" dirty="0" err="1"/>
+              <a:t>consequences</a:t>
+            </a:r>
+            <a:r>
+              <a:rPr lang="de-DE" sz="1400" dirty="0"/>
+              <a:t>.</a:t>
+            </a:r>
+            <a:endParaRPr lang="en-US" sz="1300" dirty="0"/>
+          </a:p>
+          <a:p>
+            <a:pPr marL="0" indent="0">
+              <a:spcAft>
+                <a:spcPts val="400"/>
+              </a:spcAft>
+              <a:buNone/>
+            </a:pPr>
+            <a:r>
+              <a:rPr lang="en-US" sz="600" dirty="0">
+                <a:solidFill>
+                  <a:srgbClr val="1A1A1A"/>
+                </a:solidFill>
+                <a:ea typeface="Calibri" pitchFamily="34" charset="-122"/>
+                <a:cs typeface="Calibri" pitchFamily="34" charset="-120"/>
+              </a:rPr>
+              <a:t> </a:t>
             </a:r>
             <a:endParaRPr lang="en-US" sz="1300" dirty="0"/>
           </a:p>
@@ -2892,9 +3315,8 @@
                 <a:ea typeface="Calibri" pitchFamily="34" charset="-122"/>
                 <a:cs typeface="Calibri" pitchFamily="34" charset="-120"/>
               </a:rPr>
-              <a:t>All three forms communicate the aid's reasoning. Information content is matched; only the form varies.</a:t>
-            </a:r>
-            <a:endParaRPr lang="en-US" sz="1300" dirty="0"/>
+              <a:t>All three forms communicate the aid's reasoning. The comparison is therefore between forms of explanation, not between explanation and no explanation.</a:t>
+            </a:r>
           </a:p>
         </p:txBody>
       </p:sp>
@@ -3059,7 +3481,7 @@
                 <a:ea typeface="Calibri" pitchFamily="34" charset="-122"/>
                 <a:cs typeface="Calibri" pitchFamily="34" charset="-120"/>
               </a:rPr>
-              <a:t>Routine status prose, every cycle.</a:t>
+              <a:t>Routine status update, every cycle.</a:t>
             </a:r>
             <a:endParaRPr lang="en-US" sz="1100" dirty="0"/>
           </a:p>
@@ -3113,7 +3535,7 @@
         <p:spPr>
           <a:xfrm>
             <a:off x="594360" y="3703320"/>
-            <a:ext cx="3301898" cy="1417320"/>
+            <a:ext cx="3301898" cy="1600200"/>
           </a:xfrm>
           <a:prstGeom prst="rect">
             <a:avLst/>
@@ -3138,7 +3560,7 @@
         <p:spPr>
           <a:xfrm>
             <a:off x="685800" y="3794760"/>
-            <a:ext cx="3119018" cy="1280160"/>
+            <a:ext cx="3119018" cy="1490472"/>
           </a:xfrm>
           <a:prstGeom prst="rect">
             <a:avLst/>
@@ -3165,7 +3587,40 @@
                 <a:ea typeface="Consolas" pitchFamily="34" charset="-122"/>
                 <a:cs typeface="Consolas" pitchFamily="34" charset="-120"/>
               </a:rPr>
-              <a:t>"Scale-1 was 47.0 &gt; upper bound 45.0, auto-aid not engaged. Scale-2: 31.5, in range..."</a:t>
+              <a:t>"Scale-1: was 47.3 &gt; upper bound 45.0 for 1.0 s - reset to 32.0. Scale-2: 31.5, in range. Scale-3: 29.7, in range. Scale-4: 30.2, in range. Lights: OK.“</a:t>
+            </a:r>
+            <a:br>
+              <a:rPr lang="en-US" sz="1000" dirty="0">
+                <a:solidFill>
+                  <a:srgbClr val="1A1A1A"/>
+                </a:solidFill>
+                <a:latin typeface="Consolas" pitchFamily="34" charset="0"/>
+                <a:ea typeface="Consolas" pitchFamily="34" charset="-122"/>
+                <a:cs typeface="Consolas" pitchFamily="34" charset="-120"/>
+              </a:rPr>
+            </a:br>
+            <a:endParaRPr lang="en-US" sz="1000" dirty="0">
+              <a:solidFill>
+                <a:srgbClr val="1A1A1A"/>
+              </a:solidFill>
+              <a:latin typeface="Consolas" pitchFamily="34" charset="0"/>
+            </a:endParaRPr>
+          </a:p>
+          <a:p>
+            <a:pPr marL="0" indent="0">
+              <a:spcAft>
+                <a:spcPts val="300"/>
+              </a:spcAft>
+              <a:buNone/>
+            </a:pPr>
+            <a:r>
+              <a:rPr lang="en-US" sz="1000" dirty="0">
+                <a:solidFill>
+                  <a:srgbClr val="1A1A1A"/>
+                </a:solidFill>
+                <a:latin typeface="Consolas" pitchFamily="34" charset="0"/>
+              </a:rPr>
+              <a:t>“Scale-1: was 47.0 &gt; upper bound 45.0, auto-aid not engaged. Scale-2: 31.5, in range. Scale-3: 29.7, in range. Scale-4: 30.2, in range. Lights: OK.”</a:t>
             </a:r>
             <a:endParaRPr lang="en-US" sz="1000" dirty="0"/>
           </a:p>
@@ -3179,7 +3634,7 @@
         </p:nvSpPr>
         <p:spPr>
           <a:xfrm>
-            <a:off x="594360" y="5212080"/>
+            <a:off x="594360" y="5372101"/>
             <a:ext cx="3301898" cy="731520"/>
           </a:xfrm>
           <a:prstGeom prst="rect">
@@ -3204,7 +3659,7 @@
                 <a:ea typeface="Calibri" pitchFamily="34" charset="-122"/>
                 <a:cs typeface="Calibri" pitchFamily="34" charset="-120"/>
               </a:rPr>
-              <a:t>Embeds every fact in routine prose — fires on every automation cycle.</a:t>
+              <a:t>Embeds every fact in routine update — fires on every automation cycle.</a:t>
             </a:r>
             <a:endParaRPr lang="en-US" sz="1100" dirty="0"/>
           </a:p>
@@ -3425,7 +3880,7 @@
         <p:spPr>
           <a:xfrm>
             <a:off x="4444898" y="3703320"/>
-            <a:ext cx="3301898" cy="1417320"/>
+            <a:ext cx="3301898" cy="1581912"/>
           </a:xfrm>
           <a:prstGeom prst="rect">
             <a:avLst/>
@@ -3477,9 +3932,8 @@
                 <a:ea typeface="Consolas" pitchFamily="34" charset="-122"/>
                 <a:cs typeface="Consolas" pitchFamily="34" charset="-120"/>
               </a:rPr>
-              <a:t>"Reset scale-1 — would have failed in ~2.5 s."</a:t>
-            </a:r>
-            <a:endParaRPr lang="en-US" sz="1000" dirty="0"/>
+              <a:t>"Reset scale-1 - would have failed in ~2.5 s.“</a:t>
+            </a:r>
           </a:p>
           <a:p>
             <a:pPr marL="0" indent="0">
@@ -3488,6 +3942,15 @@
               </a:spcAft>
               <a:buNone/>
             </a:pPr>
+            <a:endParaRPr lang="en-US" sz="1000" dirty="0"/>
+          </a:p>
+          <a:p>
+            <a:pPr marL="0" indent="0">
+              <a:spcAft>
+                <a:spcPts val="300"/>
+              </a:spcAft>
+              <a:buNone/>
+            </a:pPr>
             <a:r>
               <a:rPr lang="en-US" sz="1000" dirty="0">
                 <a:solidFill>
@@ -3511,7 +3974,7 @@
         </p:nvSpPr>
         <p:spPr>
           <a:xfrm>
-            <a:off x="4444898" y="5212080"/>
+            <a:off x="4444898" y="5372101"/>
             <a:ext cx="3301898" cy="731520"/>
           </a:xfrm>
           <a:prstGeom prst="rect">
@@ -3536,7 +3999,7 @@
                 <a:ea typeface="Calibri" pitchFamily="34" charset="-122"/>
                 <a:cs typeface="Calibri" pitchFamily="34" charset="-120"/>
               </a:rPr>
-              <a:t>Same facts as F1, reframed selectively and contrastively.</a:t>
+              <a:t>Same necessary facts as F1, reframed selectively and contrastively.</a:t>
             </a:r>
             <a:endParaRPr lang="en-US" sz="1100" dirty="0"/>
           </a:p>
@@ -3757,7 +4220,7 @@
         <p:spPr>
           <a:xfrm>
             <a:off x="8295437" y="3703320"/>
-            <a:ext cx="3301898" cy="1417320"/>
+            <a:ext cx="3301898" cy="1581912"/>
           </a:xfrm>
           <a:prstGeom prst="rect">
             <a:avLst/>
@@ -3794,11 +4257,10 @@
           <a:bodyPr wrap="square" lIns="0" tIns="0" rIns="0" bIns="0" rtlCol="0" anchor="t"/>
           <a:lstStyle/>
           <a:p>
-            <a:pPr marL="0" indent="0">
+            <a:pPr>
               <a:spcAft>
                 <a:spcPts val="300"/>
               </a:spcAft>
-              <a:buNone/>
             </a:pPr>
             <a:r>
               <a:rPr lang="en-US" sz="1000" dirty="0">
@@ -3809,15 +4271,29 @@
                 <a:ea typeface="Consolas" pitchFamily="34" charset="-122"/>
                 <a:cs typeface="Consolas" pitchFamily="34" charset="-120"/>
               </a:rPr>
-              <a:t>"Skipped scale-2 — auto-aid did not act."</a:t>
-            </a:r>
-            <a:endParaRPr lang="en-US" sz="1000" dirty="0"/>
-          </a:p>
-          <a:p>
-            <a:pPr marL="0" indent="0">
+              <a:t>"Reset scale-1 — would have failed in ~2.5 s.“</a:t>
+            </a:r>
+          </a:p>
+          <a:p>
+            <a:pPr>
               <a:spcAft>
                 <a:spcPts val="300"/>
               </a:spcAft>
+            </a:pPr>
+            <a:endParaRPr lang="en-US" sz="1000" dirty="0">
+              <a:solidFill>
+                <a:srgbClr val="1A1A1A"/>
+              </a:solidFill>
+              <a:latin typeface="Consolas" pitchFamily="34" charset="0"/>
+              <a:ea typeface="Consolas" pitchFamily="34" charset="-122"/>
+              <a:cs typeface="Consolas" pitchFamily="34" charset="-120"/>
+            </a:endParaRPr>
+          </a:p>
+          <a:p>
+            <a:pPr marL="0" indent="0">
+              <a:spcAft>
+                <a:spcPts val="300"/>
+              </a:spcAft>
               <a:buNone/>
             </a:pPr>
             <a:r>
@@ -3829,7 +4305,33 @@
                 <a:ea typeface="Consolas" pitchFamily="34" charset="-122"/>
                 <a:cs typeface="Consolas" pitchFamily="34" charset="-120"/>
               </a:rPr>
-              <a:t>"Check it yourself."</a:t>
+              <a:t>"Skipped scale-2 — auto-aid did not act.</a:t>
+            </a:r>
+            <a:r>
+              <a:rPr lang="en-US" sz="1000" dirty="0"/>
+              <a:t> </a:t>
+            </a:r>
+            <a:r>
+              <a:rPr lang="en-US" sz="1000" b="1" dirty="0">
+                <a:solidFill>
+                  <a:srgbClr val="1A1A1A"/>
+                </a:solidFill>
+                <a:latin typeface="Consolas" pitchFamily="34" charset="0"/>
+                <a:ea typeface="Consolas" pitchFamily="34" charset="-122"/>
+                <a:cs typeface="Consolas" pitchFamily="34" charset="-120"/>
+              </a:rPr>
+              <a:t>Check scale-2 manually</a:t>
+            </a:r>
+            <a:r>
+              <a:rPr lang="en-US" sz="1000" dirty="0">
+                <a:solidFill>
+                  <a:srgbClr val="1A1A1A"/>
+                </a:solidFill>
+                <a:latin typeface="Consolas" pitchFamily="34" charset="0"/>
+                <a:ea typeface="Consolas" pitchFamily="34" charset="-122"/>
+                <a:cs typeface="Consolas" pitchFamily="34" charset="-120"/>
+              </a:rPr>
+              <a:t>."</a:t>
             </a:r>
             <a:endParaRPr lang="en-US" sz="1000" dirty="0"/>
           </a:p>
@@ -3843,7 +4345,7 @@
         </p:nvSpPr>
         <p:spPr>
           <a:xfrm>
-            <a:off x="8295437" y="5212080"/>
+            <a:off x="8295436" y="5370343"/>
             <a:ext cx="3301898" cy="731520"/>
           </a:xfrm>
           <a:prstGeom prst="rect">
@@ -3868,7 +4370,7 @@
                 <a:ea typeface="Calibri" pitchFamily="34" charset="-122"/>
                 <a:cs typeface="Calibri" pitchFamily="34" charset="-120"/>
               </a:rPr>
-              <a:t>F3 minus F2 = the actionable cue, isolated.</a:t>
+              <a:t>F2 and the actionable cue.</a:t>
             </a:r>
             <a:endParaRPr lang="en-US" sz="1100" dirty="0"/>
           </a:p>
@@ -4222,7 +4724,7 @@
                 <a:ea typeface="Calibri" pitchFamily="34" charset="-122"/>
                 <a:cs typeface="Calibri" pitchFamily="34" charset="-120"/>
               </a:rPr>
-              <a:t>Research question &amp; hypotheses</a:t>
+              <a:t>Research Question &amp; Hypotheses</a:t>
             </a:r>
             <a:endParaRPr lang="en-US" sz="2600" dirty="0"/>
           </a:p>
@@ -4404,7 +4906,7 @@
               <a:buNone/>
             </a:pPr>
             <a:r>
-              <a:rPr lang="en-US" sz="1100" dirty="0">
+              <a:rPr lang="en-US" sz="1300" dirty="0">
                 <a:solidFill>
                   <a:srgbClr val="1A1A1A"/>
                 </a:solidFill>
@@ -4412,9 +4914,9 @@
                 <a:ea typeface="Calibri" pitchFamily="34" charset="-122"/>
                 <a:cs typeface="Calibri" pitchFamily="34" charset="-120"/>
               </a:rPr>
-              <a:t>In a multitasking supervisory-control environment with an imperfect automation aid that communicates its reasoning, does the form of the explanation — varied along Miller's criteria of selectivity, contrastiveness and actionability — produce measurable mental-model alignment and improved detection of automation errors, beyond what an equally informative but verbose always-on explanation provides?</a:t>
-            </a:r>
-            <a:endParaRPr lang="en-US" sz="1100" dirty="0"/>
+              <a:t>Does the form of an automation aid's reasoning explanation — holding information content constant — change whether the operator's mental model actually updates under multitasking load?</a:t>
+            </a:r>
+            <a:endParaRPr lang="en-US" sz="1300" dirty="0"/>
           </a:p>
         </p:txBody>
       </p:sp>
@@ -4426,7 +4928,7 @@
         </p:nvSpPr>
         <p:spPr>
           <a:xfrm>
-            <a:off x="411480" y="2880360"/>
+            <a:off x="411479" y="2912012"/>
             <a:ext cx="11368735" cy="274320"/>
           </a:xfrm>
           <a:prstGeom prst="rect">
@@ -4451,8 +4953,13 @@
                 <a:ea typeface="Calibri" pitchFamily="34" charset="-122"/>
                 <a:cs typeface="Calibri" pitchFamily="34" charset="-120"/>
               </a:rPr>
-              <a:t>Hypotheses  ·  H1 and H2 are the load-bearing pair</a:t>
-            </a:r>
+              <a:t>Hypotheses  ·  H1 and H2 are the main hypothesis</a:t>
+            </a:r>
+          </a:p>
+          <a:p>
+            <a:pPr marL="0" indent="0">
+              <a:buNone/>
+            </a:pPr>
             <a:endParaRPr lang="en-US" sz="1200" dirty="0"/>
           </a:p>
         </p:txBody>
@@ -5462,7 +5969,7 @@
                 <a:ea typeface="Calibri" pitchFamily="34" charset="-122"/>
                 <a:cs typeface="Calibri" pitchFamily="34" charset="-120"/>
               </a:rPr>
-              <a:t>Design &amp; session</a:t>
+              <a:t>Study design and implementation</a:t>
             </a:r>
             <a:endParaRPr lang="en-US" sz="1400" dirty="0"/>
           </a:p>
@@ -5477,7 +5984,7 @@
         <p:spPr>
           <a:xfrm>
             <a:off x="411480" y="2267712"/>
-            <a:ext cx="5486400" cy="3794760"/>
+            <a:ext cx="5486400" cy="4080334"/>
           </a:xfrm>
           <a:prstGeom prst="rect">
             <a:avLst/>
@@ -5496,28 +6003,26 @@
               <a:buNone/>
             </a:pPr>
             <a:r>
-              <a:rPr lang="en-US" sz="1200" b="1" dirty="0">
+              <a:rPr lang="en-US" sz="1400" b="1" dirty="0">
                 <a:solidFill>
                   <a:srgbClr val="1A1A1A"/>
                 </a:solidFill>
-                <a:latin typeface="Calibri" pitchFamily="34" charset="0"/>
                 <a:ea typeface="Calibri" pitchFamily="34" charset="-122"/>
                 <a:cs typeface="Calibri" pitchFamily="34" charset="-120"/>
               </a:rPr>
               <a:t>Platform.  </a:t>
             </a:r>
             <a:r>
-              <a:rPr lang="en-US" sz="1200" dirty="0">
+              <a:rPr lang="en-US" sz="1400" dirty="0">
                 <a:solidFill>
                   <a:srgbClr val="1A1A1A"/>
                 </a:solidFill>
-                <a:latin typeface="Calibri" pitchFamily="34" charset="0"/>
-                <a:ea typeface="Calibri" pitchFamily="34" charset="-122"/>
-                <a:cs typeface="Calibri" pitchFamily="34" charset="-120"/>
-              </a:rPr>
-              <a:t>OpenMATB — four concurrent supervisory tasks: system monitoring, communications, scheduling, resource management.</a:t>
-            </a:r>
-            <a:endParaRPr lang="en-US" sz="1200" dirty="0"/>
+                <a:ea typeface="Calibri" pitchFamily="34" charset="-122"/>
+                <a:cs typeface="Calibri" pitchFamily="34" charset="-120"/>
+              </a:rPr>
+              <a:t>OpenMATB — three concurrent supervisory tasks: system monitoring, communications, and resource management.</a:t>
+            </a:r>
+            <a:endParaRPr lang="en-US" sz="1400" dirty="0"/>
           </a:p>
           <a:p>
             <a:pPr marL="0" indent="0">
@@ -5527,17 +6032,16 @@
               <a:buNone/>
             </a:pPr>
             <a:r>
-              <a:rPr lang="en-US" sz="600" dirty="0">
+              <a:rPr lang="en-US" sz="1400" dirty="0">
                 <a:solidFill>
                   <a:srgbClr val="1A1A1A"/>
                 </a:solidFill>
-                <a:latin typeface="Calibri" pitchFamily="34" charset="0"/>
                 <a:ea typeface="Calibri" pitchFamily="34" charset="-122"/>
                 <a:cs typeface="Calibri" pitchFamily="34" charset="-120"/>
               </a:rPr>
               <a:t> </a:t>
             </a:r>
-            <a:endParaRPr lang="en-US" sz="1200" dirty="0"/>
+            <a:endParaRPr lang="en-US" sz="1400" dirty="0"/>
           </a:p>
           <a:p>
             <a:pPr marL="0" indent="0">
@@ -5547,28 +6051,26 @@
               <a:buNone/>
             </a:pPr>
             <a:r>
-              <a:rPr lang="en-US" sz="1200" b="1" dirty="0">
+              <a:rPr lang="en-US" sz="1400" b="1" dirty="0">
                 <a:solidFill>
                   <a:srgbClr val="1A1A1A"/>
                 </a:solidFill>
-                <a:latin typeface="Calibri" pitchFamily="34" charset="0"/>
                 <a:ea typeface="Calibri" pitchFamily="34" charset="-122"/>
                 <a:cs typeface="Calibri" pitchFamily="34" charset="-120"/>
               </a:rPr>
               <a:t>Automation aid.  </a:t>
             </a:r>
             <a:r>
-              <a:rPr lang="en-US" sz="1200" dirty="0">
+              <a:rPr lang="en-US" sz="1400" dirty="0">
                 <a:solidFill>
                   <a:srgbClr val="1A1A1A"/>
                 </a:solidFill>
-                <a:latin typeface="Calibri" pitchFamily="34" charset="0"/>
-                <a:ea typeface="Calibri" pitchFamily="34" charset="-122"/>
-                <a:cs typeface="Calibri" pitchFamily="34" charset="-120"/>
-              </a:rPr>
-              <a:t>Runs only on system monitoring at ~78% reliability; the other three tasks compete for attention.</a:t>
-            </a:r>
-            <a:endParaRPr lang="en-US" sz="1200" dirty="0"/>
+                <a:ea typeface="Calibri" pitchFamily="34" charset="-122"/>
+                <a:cs typeface="Calibri" pitchFamily="34" charset="-120"/>
+              </a:rPr>
+              <a:t>Runs only on system monitoring at ~78% reliability; the other two tasks compete for attention and are not aided.</a:t>
+            </a:r>
+            <a:endParaRPr lang="en-US" sz="1400" dirty="0"/>
           </a:p>
           <a:p>
             <a:pPr marL="0" indent="0">
@@ -5578,17 +6080,16 @@
               <a:buNone/>
             </a:pPr>
             <a:r>
-              <a:rPr lang="en-US" sz="600" dirty="0">
+              <a:rPr lang="en-US" sz="1400" dirty="0">
                 <a:solidFill>
                   <a:srgbClr val="1A1A1A"/>
                 </a:solidFill>
-                <a:latin typeface="Calibri" pitchFamily="34" charset="0"/>
                 <a:ea typeface="Calibri" pitchFamily="34" charset="-122"/>
                 <a:cs typeface="Calibri" pitchFamily="34" charset="-120"/>
               </a:rPr>
               <a:t> </a:t>
             </a:r>
-            <a:endParaRPr lang="en-US" sz="1200" dirty="0"/>
+            <a:endParaRPr lang="en-US" sz="1400" dirty="0"/>
           </a:p>
           <a:p>
             <a:pPr marL="0" indent="0">
@@ -5598,28 +6099,46 @@
               <a:buNone/>
             </a:pPr>
             <a:r>
-              <a:rPr lang="en-US" sz="1200" b="1" dirty="0">
+              <a:rPr lang="en-US" sz="1400" b="1" dirty="0">
                 <a:solidFill>
                   <a:srgbClr val="1A1A1A"/>
                 </a:solidFill>
-                <a:latin typeface="Calibri" pitchFamily="34" charset="0"/>
                 <a:ea typeface="Calibri" pitchFamily="34" charset="-122"/>
                 <a:cs typeface="Calibri" pitchFamily="34" charset="-120"/>
               </a:rPr>
               <a:t>Within-subjects design.  </a:t>
             </a:r>
             <a:r>
-              <a:rPr lang="en-US" sz="1200" dirty="0">
+              <a:rPr lang="en-US" sz="1400" dirty="0">
                 <a:solidFill>
                   <a:srgbClr val="1A1A1A"/>
                 </a:solidFill>
-                <a:latin typeface="Calibri" pitchFamily="34" charset="0"/>
-                <a:ea typeface="Calibri" pitchFamily="34" charset="-122"/>
-                <a:cs typeface="Calibri" pitchFamily="34" charset="-120"/>
-              </a:rPr>
-              <a:t>Each participant runs all three forms (F1/F2/F3), once each on three different gauge sets. Order counterbalanced across participants (Latin-square) to mitigate learning effects.</a:t>
-            </a:r>
-            <a:endParaRPr lang="en-US" sz="1200" dirty="0"/>
+                <a:ea typeface="Calibri" pitchFamily="34" charset="-122"/>
+                <a:cs typeface="Calibri" pitchFamily="34" charset="-120"/>
+              </a:rPr>
+              <a:t>Each participant runs all three forms (F1/F2/F3), each on three different gauge sets (A,B,C). The gauge sets contain different subsets of gauges and lights that need the operators attention, s</a:t>
+            </a:r>
+            <a:r>
+              <a:rPr lang="en-US" sz="1400" b="0" i="0" dirty="0">
+                <a:solidFill>
+                  <a:srgbClr val="3B3B3B"/>
+                </a:solidFill>
+                <a:effectLst/>
+                <a:latin typeface="-apple-system"/>
+              </a:rPr>
+              <a:t>o the post-block memory probe cannot be answered by recall from another block.</a:t>
+            </a:r>
+            <a:r>
+              <a:rPr lang="en-US" sz="1400" dirty="0">
+                <a:solidFill>
+                  <a:srgbClr val="1A1A1A"/>
+                </a:solidFill>
+                <a:ea typeface="Calibri" pitchFamily="34" charset="-122"/>
+                <a:cs typeface="Calibri" pitchFamily="34" charset="-120"/>
+              </a:rPr>
+              <a:t> Order of F1/F2/F3 is counterbalanced across participants to mitigate learning effects.</a:t>
+            </a:r>
+            <a:endParaRPr lang="en-US" sz="1400" dirty="0"/>
           </a:p>
           <a:p>
             <a:pPr marL="0" indent="0">
@@ -5629,17 +6148,16 @@
               <a:buNone/>
             </a:pPr>
             <a:r>
-              <a:rPr lang="en-US" sz="600" dirty="0">
+              <a:rPr lang="en-US" sz="1400" dirty="0">
                 <a:solidFill>
                   <a:srgbClr val="1A1A1A"/>
                 </a:solidFill>
-                <a:latin typeface="Calibri" pitchFamily="34" charset="0"/>
                 <a:ea typeface="Calibri" pitchFamily="34" charset="-122"/>
                 <a:cs typeface="Calibri" pitchFamily="34" charset="-120"/>
               </a:rPr>
               <a:t> </a:t>
             </a:r>
-            <a:endParaRPr lang="en-US" sz="1200" dirty="0"/>
+            <a:endParaRPr lang="en-US" sz="1400" dirty="0"/>
           </a:p>
           <a:p>
             <a:pPr marL="0" indent="0">
@@ -5649,28 +6167,25 @@
               <a:buNone/>
             </a:pPr>
             <a:r>
-              <a:rPr lang="en-US" sz="1200" b="1" dirty="0">
+              <a:rPr lang="en-US" sz="1400" b="1" dirty="0">
                 <a:solidFill>
                   <a:srgbClr val="1A1A1A"/>
                 </a:solidFill>
-                <a:latin typeface="Calibri" pitchFamily="34" charset="0"/>
-                <a:ea typeface="Calibri" pitchFamily="34" charset="-122"/>
-                <a:cs typeface="Calibri" pitchFamily="34" charset="-120"/>
-              </a:rPr>
-              <a:t>Participants.  </a:t>
-            </a:r>
-            <a:r>
-              <a:rPr lang="en-US" sz="1200" dirty="0">
+                <a:ea typeface="Calibri" pitchFamily="34" charset="-122"/>
+                <a:cs typeface="Calibri" pitchFamily="34" charset="-120"/>
+              </a:rPr>
+              <a:t>Session.  </a:t>
+            </a:r>
+            <a:r>
+              <a:rPr lang="en-US" sz="1400" dirty="0">
                 <a:solidFill>
                   <a:srgbClr val="1A1A1A"/>
                 </a:solidFill>
-                <a:latin typeface="Calibri" pitchFamily="34" charset="0"/>
-                <a:ea typeface="Calibri" pitchFamily="34" charset="-122"/>
-                <a:cs typeface="Calibri" pitchFamily="34" charset="-120"/>
-              </a:rPr>
-              <a:t>≈10 (pilot). Age and gender collected; blinded briefing — research question and hypotheses are not disclosed to avoid expectancy effects.</a:t>
-            </a:r>
-            <a:endParaRPr lang="en-US" sz="1200" dirty="0"/>
+                <a:ea typeface="Calibri" pitchFamily="34" charset="-122"/>
+                <a:cs typeface="Calibri" pitchFamily="34" charset="-120"/>
+              </a:rPr>
+              <a:t>≈ 20 min per participant: 3 min practice → three 5 min experimental blocks → debriefing.</a:t>
+            </a:r>
           </a:p>
           <a:p>
             <a:pPr marL="0" indent="0">
@@ -5679,17 +6194,6 @@
               </a:spcAft>
               <a:buNone/>
             </a:pPr>
-            <a:r>
-              <a:rPr lang="en-US" sz="600" dirty="0">
-                <a:solidFill>
-                  <a:srgbClr val="1A1A1A"/>
-                </a:solidFill>
-                <a:latin typeface="Calibri" pitchFamily="34" charset="0"/>
-                <a:ea typeface="Calibri" pitchFamily="34" charset="-122"/>
-                <a:cs typeface="Calibri" pitchFamily="34" charset="-120"/>
-              </a:rPr>
-              <a:t> </a:t>
-            </a:r>
             <a:endParaRPr lang="en-US" sz="1200" dirty="0"/>
           </a:p>
           <a:p>
@@ -5700,26 +6204,14 @@
               <a:buNone/>
             </a:pPr>
             <a:r>
-              <a:rPr lang="en-US" sz="1200" b="1" dirty="0">
+              <a:rPr lang="en-US" sz="600" dirty="0">
                 <a:solidFill>
                   <a:srgbClr val="1A1A1A"/>
                 </a:solidFill>
-                <a:latin typeface="Calibri" pitchFamily="34" charset="0"/>
-                <a:ea typeface="Calibri" pitchFamily="34" charset="-122"/>
-                <a:cs typeface="Calibri" pitchFamily="34" charset="-120"/>
-              </a:rPr>
-              <a:t>Session.  </a:t>
-            </a:r>
-            <a:r>
-              <a:rPr lang="en-US" sz="1200" dirty="0">
-                <a:solidFill>
-                  <a:srgbClr val="1A1A1A"/>
-                </a:solidFill>
-                <a:latin typeface="Calibri" pitchFamily="34" charset="0"/>
-                <a:ea typeface="Calibri" pitchFamily="34" charset="-122"/>
-                <a:cs typeface="Calibri" pitchFamily="34" charset="-120"/>
-              </a:rPr>
-              <a:t>≈20 min per participant: 3 min practice → three 5 min experimental blocks → final questionnaire battery and debriefing.</a:t>
+                <a:ea typeface="Calibri" pitchFamily="34" charset="-122"/>
+                <a:cs typeface="Calibri" pitchFamily="34" charset="-120"/>
+              </a:rPr>
+              <a:t> </a:t>
             </a:r>
             <a:endParaRPr lang="en-US" sz="1200" dirty="0"/>
           </a:p>
@@ -5730,18 +6222,13 @@
               </a:spcAft>
               <a:buNone/>
             </a:pPr>
-            <a:r>
-              <a:rPr lang="en-US" sz="600" dirty="0">
-                <a:solidFill>
-                  <a:srgbClr val="1A1A1A"/>
-                </a:solidFill>
-                <a:latin typeface="Calibri" pitchFamily="34" charset="0"/>
-                <a:ea typeface="Calibri" pitchFamily="34" charset="-122"/>
-                <a:cs typeface="Calibri" pitchFamily="34" charset="-120"/>
-              </a:rPr>
-              <a:t> </a:t>
-            </a:r>
-            <a:endParaRPr lang="en-US" sz="1200" dirty="0"/>
+            <a:endParaRPr lang="en-US" sz="1200" b="1" dirty="0">
+              <a:solidFill>
+                <a:srgbClr val="8C1D2C"/>
+              </a:solidFill>
+              <a:ea typeface="Calibri" pitchFamily="34" charset="-122"/>
+              <a:cs typeface="Calibri" pitchFamily="34" charset="-120"/>
+            </a:endParaRPr>
           </a:p>
           <a:p>
             <a:pPr marL="0" indent="0">
@@ -5750,29 +6237,28 @@
               </a:spcAft>
               <a:buNone/>
             </a:pPr>
-            <a:r>
-              <a:rPr lang="en-US" sz="1200" b="1" dirty="0">
-                <a:solidFill>
-                  <a:srgbClr val="8C1D2C"/>
-                </a:solidFill>
-                <a:latin typeface="Calibri" pitchFamily="34" charset="0"/>
-                <a:ea typeface="Calibri" pitchFamily="34" charset="-122"/>
-                <a:cs typeface="Calibri" pitchFamily="34" charset="-120"/>
-              </a:rPr>
-              <a:t>Content matching.  </a:t>
-            </a:r>
-            <a:r>
-              <a:rPr lang="en-US" sz="1200" i="1" dirty="0">
-                <a:solidFill>
-                  <a:srgbClr val="1A1A1A"/>
-                </a:solidFill>
-                <a:latin typeface="Calibri" pitchFamily="34" charset="0"/>
-                <a:ea typeface="Calibri" pitchFamily="34" charset="-122"/>
-                <a:cs typeface="Calibri" pitchFamily="34" charset="-120"/>
-              </a:rPr>
-              <a:t>F1's verbose stream contains every fact F2/F3 surface — the central design constraint. Any leak invalidates the comparison.</a:t>
-            </a:r>
-            <a:endParaRPr lang="en-US" sz="1200" dirty="0"/>
+            <a:endParaRPr lang="en-US" sz="1200" b="1" dirty="0">
+              <a:solidFill>
+                <a:srgbClr val="8C1D2C"/>
+              </a:solidFill>
+              <a:ea typeface="Calibri" pitchFamily="34" charset="-122"/>
+              <a:cs typeface="Calibri" pitchFamily="34" charset="-120"/>
+            </a:endParaRPr>
+          </a:p>
+          <a:p>
+            <a:pPr marL="0" indent="0">
+              <a:spcAft>
+                <a:spcPts val="300"/>
+              </a:spcAft>
+              <a:buNone/>
+            </a:pPr>
+            <a:endParaRPr lang="en-US" sz="1200" b="1" dirty="0">
+              <a:solidFill>
+                <a:srgbClr val="8C1D2C"/>
+              </a:solidFill>
+              <a:ea typeface="Calibri" pitchFamily="34" charset="-122"/>
+              <a:cs typeface="Calibri" pitchFamily="34" charset="-120"/>
+            </a:endParaRPr>
           </a:p>
         </p:txBody>
       </p:sp>
@@ -5801,13 +6287,117 @@
       </p:sp>
       <p:sp>
         <p:nvSpPr>
-          <p:cNvPr id="16" name="Text 14"/>
-          <p:cNvSpPr/>
-          <p:nvPr/>
-        </p:nvSpPr>
-        <p:spPr>
-          <a:xfrm>
-            <a:off x="6263640" y="1920240"/>
+          <p:cNvPr id="17" name="Text 15"/>
+          <p:cNvSpPr/>
+          <p:nvPr/>
+        </p:nvSpPr>
+        <p:spPr>
+          <a:xfrm>
+            <a:off x="6293815" y="3635214"/>
+            <a:ext cx="5486400" cy="690605"/>
+          </a:xfrm>
+          <a:prstGeom prst="rect">
+            <a:avLst/>
+          </a:prstGeom>
+          <a:noFill/>
+          <a:ln/>
+        </p:spPr>
+        <p:txBody>
+          <a:bodyPr wrap="square" lIns="0" tIns="0" rIns="0" bIns="0" rtlCol="0" anchor="t"/>
+          <a:lstStyle/>
+          <a:p>
+            <a:pPr marL="171450" indent="-171450">
+              <a:buFont typeface="Arial" panose="020B0604020202020204" pitchFamily="34" charset="0"/>
+              <a:buChar char="•"/>
+            </a:pPr>
+            <a:r>
+              <a:rPr lang="de-DE" sz="1400" dirty="0" err="1">
+                <a:solidFill>
+                  <a:srgbClr val="3B3B3B"/>
+                </a:solidFill>
+                <a:latin typeface="-apple-system"/>
+              </a:rPr>
+              <a:t>Two</a:t>
+            </a:r>
+            <a:r>
+              <a:rPr lang="de-DE" sz="1400" dirty="0">
+                <a:solidFill>
+                  <a:srgbClr val="3B3B3B"/>
+                </a:solidFill>
+                <a:latin typeface="-apple-system"/>
+              </a:rPr>
+              <a:t> </a:t>
+            </a:r>
+            <a:r>
+              <a:rPr lang="de-DE" sz="1400" dirty="0" err="1">
+                <a:solidFill>
+                  <a:srgbClr val="3B3B3B"/>
+                </a:solidFill>
+                <a:latin typeface="-apple-system"/>
+              </a:rPr>
+              <a:t>q</a:t>
+            </a:r>
+            <a:r>
+              <a:rPr lang="de-DE" sz="1400" i="0" dirty="0" err="1">
+                <a:solidFill>
+                  <a:srgbClr val="3B3B3B"/>
+                </a:solidFill>
+                <a:effectLst/>
+                <a:latin typeface="-apple-system"/>
+              </a:rPr>
+              <a:t>uestionnaires</a:t>
+            </a:r>
+            <a:r>
+              <a:rPr lang="en-US" sz="1400" dirty="0"/>
+              <a:t> after each block</a:t>
+            </a:r>
+          </a:p>
+          <a:p>
+            <a:pPr marL="171450" indent="-171450">
+              <a:buFont typeface="Arial" panose="020B0604020202020204" pitchFamily="34" charset="0"/>
+              <a:buChar char="•"/>
+            </a:pPr>
+            <a:r>
+              <a:rPr lang="en-US" sz="1400" dirty="0" err="1"/>
+              <a:t>Plattform</a:t>
+            </a:r>
+            <a:r>
+              <a:rPr lang="en-US" sz="1400" dirty="0"/>
+              <a:t> log</a:t>
+            </a:r>
+          </a:p>
+          <a:p>
+            <a:pPr marL="171450" indent="-171450">
+              <a:buFont typeface="Arial" panose="020B0604020202020204" pitchFamily="34" charset="0"/>
+              <a:buChar char="•"/>
+            </a:pPr>
+            <a:r>
+              <a:rPr lang="en-US" sz="1400" dirty="0"/>
+              <a:t>One final </a:t>
+            </a:r>
+            <a:r>
+              <a:rPr lang="en-US" sz="1400" dirty="0" err="1"/>
+              <a:t>questionaire</a:t>
+            </a:r>
+            <a:endParaRPr lang="en-US" sz="1400" dirty="0"/>
+          </a:p>
+        </p:txBody>
+      </p:sp>
+      <p:sp>
+        <p:nvSpPr>
+          <p:cNvPr id="57" name="Text 14">
+            <a:extLst>
+              <a:ext uri="{FF2B5EF4-FFF2-40B4-BE49-F238E27FC236}">
+                <a16:creationId xmlns:a16="http://schemas.microsoft.com/office/drawing/2014/main" id="{0967EADA-6F94-0B37-0F4E-0B70829C203C}"/>
+              </a:ext>
+            </a:extLst>
+          </p:cNvPr>
+          <p:cNvSpPr/>
+          <p:nvPr/>
+        </p:nvSpPr>
+        <p:spPr>
+          <a:xfrm>
+            <a:off x="6309360" y="3306380"/>
             <a:ext cx="5486400" cy="292608"/>
           </a:xfrm>
           <a:prstGeom prst="rect">
@@ -5840,52 +6430,84 @@
       </p:sp>
       <p:sp>
         <p:nvSpPr>
-          <p:cNvPr id="17" name="Text 15"/>
-          <p:cNvSpPr/>
-          <p:nvPr/>
-        </p:nvSpPr>
-        <p:spPr>
-          <a:xfrm>
-            <a:off x="6263640" y="2267712"/>
-            <a:ext cx="5486400" cy="914400"/>
-          </a:xfrm>
-          <a:prstGeom prst="rect">
-            <a:avLst/>
-          </a:prstGeom>
-          <a:noFill/>
-          <a:ln/>
-        </p:spPr>
-        <p:txBody>
-          <a:bodyPr wrap="square" lIns="0" tIns="0" rIns="0" bIns="0" rtlCol="0" anchor="t"/>
-          <a:lstStyle/>
-          <a:p>
-            <a:pPr marL="0" indent="0">
-              <a:buNone/>
-            </a:pPr>
-            <a:r>
-              <a:rPr lang="en-US" sz="1200" i="1" dirty="0">
+          <p:cNvPr id="59" name="Textfeld 58">
+            <a:extLst>
+              <a:ext uri="{FF2B5EF4-FFF2-40B4-BE49-F238E27FC236}">
+                <a16:creationId xmlns:a16="http://schemas.microsoft.com/office/drawing/2014/main" id="{2668AE6A-5F18-F033-1266-8296B19B5313}"/>
+              </a:ext>
+            </a:extLst>
+          </p:cNvPr>
+          <p:cNvSpPr txBox="1"/>
+          <p:nvPr/>
+        </p:nvSpPr>
+        <p:spPr>
+          <a:xfrm>
+            <a:off x="6257428" y="4443392"/>
+            <a:ext cx="5383585" cy="992579"/>
+          </a:xfrm>
+          <a:prstGeom prst="rect">
+            <a:avLst/>
+          </a:prstGeom>
+          <a:noFill/>
+        </p:spPr>
+        <p:txBody>
+          <a:bodyPr wrap="square">
+            <a:spAutoFit/>
+          </a:bodyPr>
+          <a:lstStyle/>
+          <a:p>
+            <a:pPr marL="0" indent="0">
+              <a:spcAft>
+                <a:spcPts val="300"/>
+              </a:spcAft>
+              <a:buNone/>
+            </a:pPr>
+            <a:r>
+              <a:rPr lang="en-US" sz="1400" b="1" dirty="0">
+                <a:solidFill>
+                  <a:srgbClr val="8C1D2C"/>
+                </a:solidFill>
+                <a:ea typeface="Calibri" pitchFamily="34" charset="-122"/>
+                <a:cs typeface="Calibri" pitchFamily="34" charset="-120"/>
+              </a:rPr>
+              <a:t>Content matching.  </a:t>
+            </a:r>
+          </a:p>
+          <a:p>
+            <a:pPr marL="0" indent="0">
+              <a:spcAft>
+                <a:spcPts val="300"/>
+              </a:spcAft>
+              <a:buNone/>
+            </a:pPr>
+            <a:r>
+              <a:rPr lang="en-US" sz="1400" dirty="0">
                 <a:solidFill>
                   <a:srgbClr val="1A1A1A"/>
                 </a:solidFill>
-                <a:latin typeface="Calibri" pitchFamily="34" charset="0"/>
-                <a:ea typeface="Calibri" pitchFamily="34" charset="-122"/>
-                <a:cs typeface="Calibri" pitchFamily="34" charset="-120"/>
-              </a:rPr>
-              <a:t>Two kinds of measures: things the participant tells us (questionnaires) and things the platform records (key presses, response times, hits and misses). Each maps onto one or more hypotheses — detailed on the next slide.</a:t>
-            </a:r>
-            <a:endParaRPr lang="en-US" sz="1200" dirty="0"/>
-          </a:p>
-        </p:txBody>
-      </p:sp>
-      <p:sp>
-        <p:nvSpPr>
-          <p:cNvPr id="18" name="Shape 16"/>
-          <p:cNvSpPr/>
-          <p:nvPr/>
-        </p:nvSpPr>
-        <p:spPr>
-          <a:xfrm>
-            <a:off x="6263640" y="3337560"/>
+                <a:ea typeface="Calibri" pitchFamily="34" charset="-122"/>
+                <a:cs typeface="Calibri" pitchFamily="34" charset="-120"/>
+              </a:rPr>
+              <a:t>F1's verbose stream contains every fact F2/F3 reports. All information needed by the operator to catch automation failure is equally present in F1, F2, and F3.</a:t>
+            </a:r>
+          </a:p>
+        </p:txBody>
+      </p:sp>
+      <p:sp>
+        <p:nvSpPr>
+          <p:cNvPr id="60" name="Shape 16">
+            <a:extLst>
+              <a:ext uri="{FF2B5EF4-FFF2-40B4-BE49-F238E27FC236}">
+                <a16:creationId xmlns:a16="http://schemas.microsoft.com/office/drawing/2014/main" id="{03255E86-004F-D00E-426A-757D736D276B}"/>
+              </a:ext>
+            </a:extLst>
+          </p:cNvPr>
+          <p:cNvSpPr/>
+          <p:nvPr/>
+        </p:nvSpPr>
+        <p:spPr>
+          <a:xfrm>
+            <a:off x="6405254" y="1987518"/>
             <a:ext cx="1014984" cy="502920"/>
           </a:xfrm>
           <a:prstGeom prst="rect">
@@ -5904,13 +6526,19 @@
       </p:sp>
       <p:sp>
         <p:nvSpPr>
-          <p:cNvPr id="19" name="Text 17"/>
-          <p:cNvSpPr/>
-          <p:nvPr/>
-        </p:nvSpPr>
-        <p:spPr>
-          <a:xfrm>
-            <a:off x="6263640" y="3383280"/>
+          <p:cNvPr id="61" name="Text 17">
+            <a:extLst>
+              <a:ext uri="{FF2B5EF4-FFF2-40B4-BE49-F238E27FC236}">
+                <a16:creationId xmlns:a16="http://schemas.microsoft.com/office/drawing/2014/main" id="{6A8FDFFC-38ED-4D98-96D4-138055D50532}"/>
+              </a:ext>
+            </a:extLst>
+          </p:cNvPr>
+          <p:cNvSpPr/>
+          <p:nvPr/>
+        </p:nvSpPr>
+        <p:spPr>
+          <a:xfrm>
+            <a:off x="6405254" y="2033238"/>
             <a:ext cx="1014984" cy="411480"/>
           </a:xfrm>
           <a:prstGeom prst="rect">
@@ -5943,13 +6571,19 @@
       </p:sp>
       <p:sp>
         <p:nvSpPr>
-          <p:cNvPr id="20" name="Shape 18"/>
-          <p:cNvSpPr/>
-          <p:nvPr/>
-        </p:nvSpPr>
-        <p:spPr>
-          <a:xfrm>
-            <a:off x="7370064" y="3337560"/>
+          <p:cNvPr id="62" name="Shape 18">
+            <a:extLst>
+              <a:ext uri="{FF2B5EF4-FFF2-40B4-BE49-F238E27FC236}">
+                <a16:creationId xmlns:a16="http://schemas.microsoft.com/office/drawing/2014/main" id="{3BFCC1D3-E18E-E866-7C4F-D20DC5AEC3D1}"/>
+              </a:ext>
+            </a:extLst>
+          </p:cNvPr>
+          <p:cNvSpPr/>
+          <p:nvPr/>
+        </p:nvSpPr>
+        <p:spPr>
+          <a:xfrm>
+            <a:off x="7511678" y="1987518"/>
             <a:ext cx="1014984" cy="502920"/>
           </a:xfrm>
           <a:prstGeom prst="rect">
@@ -5968,13 +6602,19 @@
       </p:sp>
       <p:sp>
         <p:nvSpPr>
-          <p:cNvPr id="21" name="Text 19"/>
-          <p:cNvSpPr/>
-          <p:nvPr/>
-        </p:nvSpPr>
-        <p:spPr>
-          <a:xfrm>
-            <a:off x="7370064" y="3383280"/>
+          <p:cNvPr id="63" name="Text 19">
+            <a:extLst>
+              <a:ext uri="{FF2B5EF4-FFF2-40B4-BE49-F238E27FC236}">
+                <a16:creationId xmlns:a16="http://schemas.microsoft.com/office/drawing/2014/main" id="{30C48C8F-66EE-6431-4113-3BABA12B343E}"/>
+              </a:ext>
+            </a:extLst>
+          </p:cNvPr>
+          <p:cNvSpPr/>
+          <p:nvPr/>
+        </p:nvSpPr>
+        <p:spPr>
+          <a:xfrm>
+            <a:off x="7511678" y="2033238"/>
             <a:ext cx="1014984" cy="411480"/>
           </a:xfrm>
           <a:prstGeom prst="rect">
@@ -6007,13 +6647,19 @@
       </p:sp>
       <p:sp>
         <p:nvSpPr>
-          <p:cNvPr id="22" name="Shape 20"/>
-          <p:cNvSpPr/>
-          <p:nvPr/>
-        </p:nvSpPr>
-        <p:spPr>
-          <a:xfrm>
-            <a:off x="8430768" y="3337560"/>
+          <p:cNvPr id="64" name="Shape 20">
+            <a:extLst>
+              <a:ext uri="{FF2B5EF4-FFF2-40B4-BE49-F238E27FC236}">
+                <a16:creationId xmlns:a16="http://schemas.microsoft.com/office/drawing/2014/main" id="{090E7CDB-D40C-8343-5508-F3C6776457A5}"/>
+              </a:ext>
+            </a:extLst>
+          </p:cNvPr>
+          <p:cNvSpPr/>
+          <p:nvPr/>
+        </p:nvSpPr>
+        <p:spPr>
+          <a:xfrm>
+            <a:off x="8572382" y="1987518"/>
             <a:ext cx="1014984" cy="502920"/>
           </a:xfrm>
           <a:prstGeom prst="rect">
@@ -6032,13 +6678,19 @@
       </p:sp>
       <p:sp>
         <p:nvSpPr>
-          <p:cNvPr id="23" name="Text 21"/>
-          <p:cNvSpPr/>
-          <p:nvPr/>
-        </p:nvSpPr>
-        <p:spPr>
-          <a:xfrm>
-            <a:off x="8430768" y="3383280"/>
+          <p:cNvPr id="65" name="Text 21">
+            <a:extLst>
+              <a:ext uri="{FF2B5EF4-FFF2-40B4-BE49-F238E27FC236}">
+                <a16:creationId xmlns:a16="http://schemas.microsoft.com/office/drawing/2014/main" id="{1864FCEC-C44E-4AFB-A031-82F5DB42E059}"/>
+              </a:ext>
+            </a:extLst>
+          </p:cNvPr>
+          <p:cNvSpPr/>
+          <p:nvPr/>
+        </p:nvSpPr>
+        <p:spPr>
+          <a:xfrm>
+            <a:off x="8572382" y="2033238"/>
             <a:ext cx="1014984" cy="411480"/>
           </a:xfrm>
           <a:prstGeom prst="rect">
@@ -6071,13 +6723,19 @@
       </p:sp>
       <p:sp>
         <p:nvSpPr>
-          <p:cNvPr id="24" name="Shape 22"/>
-          <p:cNvSpPr/>
-          <p:nvPr/>
-        </p:nvSpPr>
-        <p:spPr>
-          <a:xfrm>
-            <a:off x="9491472" y="3337560"/>
+          <p:cNvPr id="66" name="Shape 22">
+            <a:extLst>
+              <a:ext uri="{FF2B5EF4-FFF2-40B4-BE49-F238E27FC236}">
+                <a16:creationId xmlns:a16="http://schemas.microsoft.com/office/drawing/2014/main" id="{D78A7BB8-67C8-6B55-A6B0-C3C0E71C5B6C}"/>
+              </a:ext>
+            </a:extLst>
+          </p:cNvPr>
+          <p:cNvSpPr/>
+          <p:nvPr/>
+        </p:nvSpPr>
+        <p:spPr>
+          <a:xfrm>
+            <a:off x="9633086" y="1987518"/>
             <a:ext cx="1014984" cy="502920"/>
           </a:xfrm>
           <a:prstGeom prst="rect">
@@ -6096,13 +6754,19 @@
       </p:sp>
       <p:sp>
         <p:nvSpPr>
-          <p:cNvPr id="25" name="Text 23"/>
-          <p:cNvSpPr/>
-          <p:nvPr/>
-        </p:nvSpPr>
-        <p:spPr>
-          <a:xfrm>
-            <a:off x="9491472" y="3383280"/>
+          <p:cNvPr id="67" name="Text 23">
+            <a:extLst>
+              <a:ext uri="{FF2B5EF4-FFF2-40B4-BE49-F238E27FC236}">
+                <a16:creationId xmlns:a16="http://schemas.microsoft.com/office/drawing/2014/main" id="{13BEB501-75EB-351F-B572-49E2F4625BCF}"/>
+              </a:ext>
+            </a:extLst>
+          </p:cNvPr>
+          <p:cNvSpPr/>
+          <p:nvPr/>
+        </p:nvSpPr>
+        <p:spPr>
+          <a:xfrm>
+            <a:off x="9633086" y="2033238"/>
             <a:ext cx="1014984" cy="411480"/>
           </a:xfrm>
           <a:prstGeom prst="rect">
@@ -6135,13 +6799,19 @@
       </p:sp>
       <p:sp>
         <p:nvSpPr>
-          <p:cNvPr id="26" name="Shape 24"/>
-          <p:cNvSpPr/>
-          <p:nvPr/>
-        </p:nvSpPr>
-        <p:spPr>
-          <a:xfrm>
-            <a:off x="10552176" y="3337560"/>
+          <p:cNvPr id="68" name="Shape 24">
+            <a:extLst>
+              <a:ext uri="{FF2B5EF4-FFF2-40B4-BE49-F238E27FC236}">
+                <a16:creationId xmlns:a16="http://schemas.microsoft.com/office/drawing/2014/main" id="{E4FE43D8-936C-FA6B-CDB8-5000D7D4F9B6}"/>
+              </a:ext>
+            </a:extLst>
+          </p:cNvPr>
+          <p:cNvSpPr/>
+          <p:nvPr/>
+        </p:nvSpPr>
+        <p:spPr>
+          <a:xfrm>
+            <a:off x="10693790" y="1987518"/>
             <a:ext cx="1014984" cy="502920"/>
           </a:xfrm>
           <a:prstGeom prst="rect">
@@ -6160,13 +6830,19 @@
       </p:sp>
       <p:sp>
         <p:nvSpPr>
-          <p:cNvPr id="27" name="Text 25"/>
-          <p:cNvSpPr/>
-          <p:nvPr/>
-        </p:nvSpPr>
-        <p:spPr>
-          <a:xfrm>
-            <a:off x="10552176" y="3383280"/>
+          <p:cNvPr id="69" name="Text 25">
+            <a:extLst>
+              <a:ext uri="{FF2B5EF4-FFF2-40B4-BE49-F238E27FC236}">
+                <a16:creationId xmlns:a16="http://schemas.microsoft.com/office/drawing/2014/main" id="{D2B0EA86-D810-1F6C-5CDC-B3FA21721168}"/>
+              </a:ext>
+            </a:extLst>
+          </p:cNvPr>
+          <p:cNvSpPr/>
+          <p:nvPr/>
+        </p:nvSpPr>
+        <p:spPr>
+          <a:xfrm>
+            <a:off x="10693790" y="2033238"/>
             <a:ext cx="1014984" cy="411480"/>
           </a:xfrm>
           <a:prstGeom prst="rect">
@@ -6199,13 +6875,19 @@
       </p:sp>
       <p:sp>
         <p:nvSpPr>
-          <p:cNvPr id="28" name="Text 26"/>
-          <p:cNvSpPr/>
-          <p:nvPr/>
-        </p:nvSpPr>
-        <p:spPr>
-          <a:xfrm>
-            <a:off x="6263640" y="3931920"/>
+          <p:cNvPr id="70" name="Text 26">
+            <a:extLst>
+              <a:ext uri="{FF2B5EF4-FFF2-40B4-BE49-F238E27FC236}">
+                <a16:creationId xmlns:a16="http://schemas.microsoft.com/office/drawing/2014/main" id="{0391BB20-FA1F-34F1-0686-DE1B0A7DAB74}"/>
+              </a:ext>
+            </a:extLst>
+          </p:cNvPr>
+          <p:cNvSpPr/>
+          <p:nvPr/>
+        </p:nvSpPr>
+        <p:spPr>
+          <a:xfrm>
+            <a:off x="6405254" y="2581878"/>
             <a:ext cx="5486400" cy="228600"/>
           </a:xfrm>
           <a:prstGeom prst="rect">
@@ -6233,240 +6915,6 @@
               <a:t>3 min        →        5 min        →        5 min        →        5 min        →        questionnaires</a:t>
             </a:r>
             <a:endParaRPr lang="en-US" sz="900" dirty="0"/>
-          </a:p>
-        </p:txBody>
-      </p:sp>
-      <p:sp>
-        <p:nvSpPr>
-          <p:cNvPr id="29" name="Text 27"/>
-          <p:cNvSpPr/>
-          <p:nvPr/>
-        </p:nvSpPr>
-        <p:spPr>
-          <a:xfrm>
-            <a:off x="6263640" y="4343400"/>
-            <a:ext cx="1737360" cy="502920"/>
-          </a:xfrm>
-          <a:prstGeom prst="rect">
-            <a:avLst/>
-          </a:prstGeom>
-          <a:noFill/>
-          <a:ln/>
-        </p:spPr>
-        <p:txBody>
-          <a:bodyPr wrap="square" lIns="0" tIns="0" rIns="0" bIns="0" rtlCol="0" anchor="ctr"/>
-          <a:lstStyle/>
-          <a:p>
-            <a:pPr marL="0" indent="0" algn="ctr">
-              <a:buNone/>
-            </a:pPr>
-            <a:r>
-              <a:rPr lang="en-US" sz="2800" b="1" dirty="0">
-                <a:solidFill>
-                  <a:srgbClr val="143847"/>
-                </a:solidFill>
-                <a:latin typeface="Calibri" pitchFamily="34" charset="0"/>
-                <a:ea typeface="Calibri" pitchFamily="34" charset="-122"/>
-                <a:cs typeface="Calibri" pitchFamily="34" charset="-120"/>
-              </a:rPr>
-              <a:t>3</a:t>
-            </a:r>
-            <a:endParaRPr lang="en-US" sz="2800" dirty="0"/>
-          </a:p>
-        </p:txBody>
-      </p:sp>
-      <p:sp>
-        <p:nvSpPr>
-          <p:cNvPr id="30" name="Text 28"/>
-          <p:cNvSpPr/>
-          <p:nvPr/>
-        </p:nvSpPr>
-        <p:spPr>
-          <a:xfrm>
-            <a:off x="6263640" y="4846320"/>
-            <a:ext cx="1737360" cy="274320"/>
-          </a:xfrm>
-          <a:prstGeom prst="rect">
-            <a:avLst/>
-          </a:prstGeom>
-          <a:noFill/>
-          <a:ln/>
-        </p:spPr>
-        <p:txBody>
-          <a:bodyPr wrap="square" lIns="0" tIns="0" rIns="0" bIns="0" rtlCol="0" anchor="ctr"/>
-          <a:lstStyle/>
-          <a:p>
-            <a:pPr marL="0" indent="0" algn="ctr">
-              <a:buNone/>
-            </a:pPr>
-            <a:r>
-              <a:rPr lang="en-US" sz="1000" i="1" dirty="0">
-                <a:solidFill>
-                  <a:srgbClr val="5A6770"/>
-                </a:solidFill>
-                <a:latin typeface="Calibri" pitchFamily="34" charset="0"/>
-                <a:ea typeface="Calibri" pitchFamily="34" charset="-122"/>
-                <a:cs typeface="Calibri" pitchFamily="34" charset="-120"/>
-              </a:rPr>
-              <a:t>concurrent tasks</a:t>
-            </a:r>
-            <a:endParaRPr lang="en-US" sz="1000" dirty="0"/>
-          </a:p>
-        </p:txBody>
-      </p:sp>
-      <p:sp>
-        <p:nvSpPr>
-          <p:cNvPr id="31" name="Text 29"/>
-          <p:cNvSpPr/>
-          <p:nvPr/>
-        </p:nvSpPr>
-        <p:spPr>
-          <a:xfrm>
-            <a:off x="8138160" y="4343400"/>
-            <a:ext cx="1737360" cy="502920"/>
-          </a:xfrm>
-          <a:prstGeom prst="rect">
-            <a:avLst/>
-          </a:prstGeom>
-          <a:noFill/>
-          <a:ln/>
-        </p:spPr>
-        <p:txBody>
-          <a:bodyPr wrap="square" lIns="0" tIns="0" rIns="0" bIns="0" rtlCol="0" anchor="ctr"/>
-          <a:lstStyle/>
-          <a:p>
-            <a:pPr marL="0" indent="0" algn="ctr">
-              <a:buNone/>
-            </a:pPr>
-            <a:r>
-              <a:rPr lang="en-US" sz="2800" b="1" dirty="0">
-                <a:solidFill>
-                  <a:srgbClr val="143847"/>
-                </a:solidFill>
-                <a:latin typeface="Calibri" pitchFamily="34" charset="0"/>
-                <a:ea typeface="Calibri" pitchFamily="34" charset="-122"/>
-                <a:cs typeface="Calibri" pitchFamily="34" charset="-120"/>
-              </a:rPr>
-              <a:t>78%</a:t>
-            </a:r>
-            <a:endParaRPr lang="en-US" sz="2800" dirty="0"/>
-          </a:p>
-        </p:txBody>
-      </p:sp>
-      <p:sp>
-        <p:nvSpPr>
-          <p:cNvPr id="32" name="Text 30"/>
-          <p:cNvSpPr/>
-          <p:nvPr/>
-        </p:nvSpPr>
-        <p:spPr>
-          <a:xfrm>
-            <a:off x="8138160" y="4846320"/>
-            <a:ext cx="1737360" cy="274320"/>
-          </a:xfrm>
-          <a:prstGeom prst="rect">
-            <a:avLst/>
-          </a:prstGeom>
-          <a:noFill/>
-          <a:ln/>
-        </p:spPr>
-        <p:txBody>
-          <a:bodyPr wrap="square" lIns="0" tIns="0" rIns="0" bIns="0" rtlCol="0" anchor="ctr"/>
-          <a:lstStyle/>
-          <a:p>
-            <a:pPr marL="0" indent="0" algn="ctr">
-              <a:buNone/>
-            </a:pPr>
-            <a:r>
-              <a:rPr lang="en-US" sz="1000" i="1" dirty="0">
-                <a:solidFill>
-                  <a:srgbClr val="5A6770"/>
-                </a:solidFill>
-                <a:latin typeface="Calibri" pitchFamily="34" charset="0"/>
-                <a:ea typeface="Calibri" pitchFamily="34" charset="-122"/>
-                <a:cs typeface="Calibri" pitchFamily="34" charset="-120"/>
-              </a:rPr>
-              <a:t>aid reliability</a:t>
-            </a:r>
-            <a:endParaRPr lang="en-US" sz="1000" dirty="0"/>
-          </a:p>
-        </p:txBody>
-      </p:sp>
-      <p:sp>
-        <p:nvSpPr>
-          <p:cNvPr id="33" name="Text 31"/>
-          <p:cNvSpPr/>
-          <p:nvPr/>
-        </p:nvSpPr>
-        <p:spPr>
-          <a:xfrm>
-            <a:off x="10012680" y="4343400"/>
-            <a:ext cx="1737360" cy="502920"/>
-          </a:xfrm>
-          <a:prstGeom prst="rect">
-            <a:avLst/>
-          </a:prstGeom>
-          <a:noFill/>
-          <a:ln/>
-        </p:spPr>
-        <p:txBody>
-          <a:bodyPr wrap="square" lIns="0" tIns="0" rIns="0" bIns="0" rtlCol="0" anchor="ctr"/>
-          <a:lstStyle/>
-          <a:p>
-            <a:pPr marL="0" indent="0" algn="ctr">
-              <a:buNone/>
-            </a:pPr>
-            <a:r>
-              <a:rPr lang="en-US" sz="2800" b="1" dirty="0">
-                <a:solidFill>
-                  <a:srgbClr val="143847"/>
-                </a:solidFill>
-                <a:latin typeface="Calibri" pitchFamily="34" charset="0"/>
-                <a:ea typeface="Calibri" pitchFamily="34" charset="-122"/>
-                <a:cs typeface="Calibri" pitchFamily="34" charset="-120"/>
-              </a:rPr>
-              <a:t>3 × 5</a:t>
-            </a:r>
-            <a:endParaRPr lang="en-US" sz="2800" dirty="0"/>
-          </a:p>
-        </p:txBody>
-      </p:sp>
-      <p:sp>
-        <p:nvSpPr>
-          <p:cNvPr id="34" name="Text 32"/>
-          <p:cNvSpPr/>
-          <p:nvPr/>
-        </p:nvSpPr>
-        <p:spPr>
-          <a:xfrm>
-            <a:off x="10012680" y="4846320"/>
-            <a:ext cx="1737360" cy="274320"/>
-          </a:xfrm>
-          <a:prstGeom prst="rect">
-            <a:avLst/>
-          </a:prstGeom>
-          <a:noFill/>
-          <a:ln/>
-        </p:spPr>
-        <p:txBody>
-          <a:bodyPr wrap="square" lIns="0" tIns="0" rIns="0" bIns="0" rtlCol="0" anchor="ctr"/>
-          <a:lstStyle/>
-          <a:p>
-            <a:pPr marL="0" indent="0" algn="ctr">
-              <a:buNone/>
-            </a:pPr>
-            <a:r>
-              <a:rPr lang="en-US" sz="1000" i="1" dirty="0">
-                <a:solidFill>
-                  <a:srgbClr val="5A6770"/>
-                </a:solidFill>
-                <a:latin typeface="Calibri" pitchFamily="34" charset="0"/>
-                <a:ea typeface="Calibri" pitchFamily="34" charset="-122"/>
-                <a:cs typeface="Calibri" pitchFamily="34" charset="-120"/>
-              </a:rPr>
-              <a:t>min blocks</a:t>
-            </a:r>
-            <a:endParaRPr lang="en-US" sz="1000" dirty="0"/>
           </a:p>
         </p:txBody>
       </p:sp>
@@ -6818,7 +7266,7 @@
                 <a:ea typeface="Calibri" pitchFamily="34" charset="-122"/>
                 <a:cs typeface="Calibri" pitchFamily="34" charset="-120"/>
               </a:rPr>
-              <a:t>Measures &amp; considerations</a:t>
+              <a:t>Measures &amp; Considerations</a:t>
             </a:r>
             <a:endParaRPr lang="en-US" sz="2600" dirty="0"/>
           </a:p>
@@ -7900,7 +8348,7 @@
                 <a:ea typeface="Calibri" pitchFamily="34" charset="-122"/>
                 <a:cs typeface="Calibri" pitchFamily="34" charset="-120"/>
               </a:rPr>
-              <a:t>Considerations &amp; limits</a:t>
+              <a:t>Considerations &amp;Limits</a:t>
             </a:r>
             <a:endParaRPr lang="en-US" sz="1200" dirty="0"/>
           </a:p>

--- a/Documents/Study.pptx
+++ b/Documents/Study.pptx
@@ -1498,7 +1498,29 @@
                 <a:ea typeface="Calibri" pitchFamily="34" charset="-122"/>
                 <a:cs typeface="Calibri" pitchFamily="34" charset="-120"/>
               </a:rPr>
-              <a:t>Does the form of an automation aid's reasoning explanation — holding information content constant — change whether the operator's mental model actually updates under multitasking load?</a:t>
+              <a:t>Does the form of an automation aid's reasoning explanation — holding decision-relevant information constant — change subjective transparency </a:t>
+            </a:r>
+            <a:r>
+              <a:rPr lang="en-US" sz="1600" dirty="0">
+                <a:solidFill>
+                  <a:srgbClr val="1A1A1A"/>
+                </a:solidFill>
+                <a:latin typeface="Calibri" pitchFamily="34" charset="0"/>
+                <a:ea typeface="Calibri" pitchFamily="34" charset="-122"/>
+                <a:cs typeface="Calibri" pitchFamily="34" charset="-120"/>
+              </a:rPr>
+              <a:t>and </a:t>
+            </a:r>
+            <a:r>
+              <a:rPr lang="en-US" sz="1600" i="1" dirty="0">
+                <a:solidFill>
+                  <a:srgbClr val="1A1A1A"/>
+                </a:solidFill>
+                <a:latin typeface="Calibri" pitchFamily="34" charset="0"/>
+                <a:ea typeface="Calibri" pitchFamily="34" charset="-122"/>
+                <a:cs typeface="Calibri" pitchFamily="34" charset="-120"/>
+              </a:rPr>
+              <a:t>whether the operator's mental model actually updates under multitasking load?</a:t>
             </a:r>
             <a:endParaRPr lang="en-US" sz="1600" dirty="0"/>
           </a:p>
@@ -1829,7 +1851,7 @@
                 <a:ea typeface="Calibri" pitchFamily="34" charset="-122"/>
                 <a:cs typeface="Calibri" pitchFamily="34" charset="-120"/>
               </a:rPr>
-              <a:t>Project pitch  ·  14 May 2026</a:t>
+              <a:t>May 2026</a:t>
             </a:r>
             <a:endParaRPr lang="en-US" sz="1000" dirty="0"/>
           </a:p>
@@ -2208,7 +2230,7 @@
                 <a:ea typeface="Calibri" pitchFamily="34" charset="-122"/>
                 <a:cs typeface="Calibri" pitchFamily="34" charset="-120"/>
               </a:rPr>
-              <a:t> is whether that explanation is actually understood and processed by the operator.</a:t>
+              <a:t> is whether that explanation is presented in a way that it is actually understood and processed by the operator.</a:t>
             </a:r>
           </a:p>
           <a:p>
@@ -2243,7 +2265,7 @@
                 </a:solidFill>
                 <a:effectLst/>
               </a:rPr>
-              <a:t>while holding the information content constant. </a:t>
+              <a:t>while holding the decision-relevant information constant. </a:t>
             </a:r>
             <a:endParaRPr lang="en-US" sz="1300" dirty="0">
               <a:solidFill>
@@ -2340,7 +2362,7 @@
           <a:p>
             <a:pPr algn="l"/>
             <a:r>
-              <a:rPr lang="en-US" sz="1400" b="0" i="0" dirty="0">
+              <a:rPr lang="en-US" sz="1300" b="0" i="0" dirty="0">
                 <a:solidFill>
                   <a:srgbClr val="3B3B3B"/>
                 </a:solidFill>
@@ -2349,7 +2371,7 @@
               <a:t>Transparency studies (Mercado 2016, Stowers 2017) vary the </a:t>
             </a:r>
             <a:r>
-              <a:rPr lang="en-US" sz="1400" b="0" i="1" dirty="0">
+              <a:rPr lang="en-US" sz="1300" b="0" i="1" dirty="0">
                 <a:solidFill>
                   <a:srgbClr val="3B3B3B"/>
                 </a:solidFill>
@@ -2358,7 +2380,7 @@
               <a:t>level</a:t>
             </a:r>
             <a:r>
-              <a:rPr lang="en-US" sz="1400" b="0" i="0" dirty="0">
+              <a:rPr lang="en-US" sz="1300" b="0" i="0" dirty="0">
                 <a:solidFill>
                   <a:srgbClr val="3B3B3B"/>
                 </a:solidFill>
@@ -2367,7 +2389,7 @@
               <a:t> of information but do not distinguish information </a:t>
             </a:r>
             <a:r>
-              <a:rPr lang="en-US" sz="1400" b="1" dirty="0">
+              <a:rPr lang="en-US" sz="1300" b="1" dirty="0">
                 <a:solidFill>
                   <a:srgbClr val="143847"/>
                 </a:solidFill>
@@ -2378,7 +2400,7 @@
               <a:t>content</a:t>
             </a:r>
             <a:r>
-              <a:rPr lang="en-US" sz="1400" b="0" i="0" dirty="0">
+              <a:rPr lang="en-US" sz="1300" b="0" i="0" dirty="0">
                 <a:solidFill>
                   <a:srgbClr val="3B3B3B"/>
                 </a:solidFill>
@@ -2387,7 +2409,7 @@
               <a:t> and </a:t>
             </a:r>
             <a:r>
-              <a:rPr lang="en-US" sz="1400" b="1" dirty="0">
+              <a:rPr lang="en-US" sz="1300" b="1" dirty="0">
                 <a:solidFill>
                   <a:srgbClr val="143847"/>
                 </a:solidFill>
@@ -2398,16 +2420,16 @@
               <a:t>presentation</a:t>
             </a:r>
             <a:r>
-              <a:rPr lang="en-US" sz="1400" b="0" i="0" dirty="0">
+              <a:rPr lang="en-US" sz="1300" b="0" i="0" dirty="0">
                 <a:solidFill>
                   <a:srgbClr val="3B3B3B"/>
                 </a:solidFill>
                 <a:effectLst/>
               </a:rPr>
-              <a:t>. Our design holds content and varies </a:t>
-            </a:r>
-            <a:r>
-              <a:rPr lang="en-US" sz="1400" b="1" dirty="0">
+              <a:t>. Our design holds decision-relevant content and varies </a:t>
+            </a:r>
+            <a:r>
+              <a:rPr lang="en-US" sz="1300" b="1" dirty="0">
                 <a:solidFill>
                   <a:srgbClr val="143847"/>
                 </a:solidFill>
@@ -2418,7 +2440,7 @@
               <a:t>only the form</a:t>
             </a:r>
             <a:r>
-              <a:rPr lang="en-US" sz="1400" b="0" i="0" dirty="0">
+              <a:rPr lang="en-US" sz="1300" b="0" i="0" dirty="0">
                 <a:solidFill>
                   <a:srgbClr val="3B3B3B"/>
                 </a:solidFill>
@@ -2429,7 +2451,7 @@
           </a:p>
           <a:p>
             <a:pPr algn="l"/>
-            <a:endParaRPr lang="en-US" sz="1400" dirty="0">
+            <a:endParaRPr lang="en-US" sz="1300" dirty="0">
               <a:solidFill>
                 <a:srgbClr val="3B3B3B"/>
               </a:solidFill>
@@ -2438,7 +2460,7 @@
           <a:p>
             <a:pPr algn="l"/>
             <a:r>
-              <a:rPr lang="en-US" sz="1400" b="0" i="0" dirty="0">
+              <a:rPr lang="en-US" sz="1300" b="0" i="0" dirty="0">
                 <a:solidFill>
                   <a:srgbClr val="3B3B3B"/>
                 </a:solidFill>
@@ -2447,7 +2469,7 @@
               <a:t>The XAI literature (Wang &amp; Yin 2021, Bansal 2021) has shown explanations can raise trust without improving understanding, but only in one-shot decisions. We test the same dissociation under </a:t>
             </a:r>
             <a:r>
-              <a:rPr lang="en-US" sz="1400" b="1" dirty="0">
+              <a:rPr lang="en-US" sz="1300" b="1" dirty="0">
                 <a:solidFill>
                   <a:srgbClr val="143847"/>
                 </a:solidFill>
@@ -2458,7 +2480,7 @@
               <a:t>multitasking load</a:t>
             </a:r>
             <a:r>
-              <a:rPr lang="en-US" sz="1400" b="0" i="0" dirty="0">
+              <a:rPr lang="en-US" sz="1300" b="0" i="0" dirty="0">
                 <a:solidFill>
                   <a:srgbClr val="3B3B3B"/>
                 </a:solidFill>
@@ -2469,7 +2491,7 @@
           </a:p>
           <a:p>
             <a:br>
-              <a:rPr lang="en-US" sz="1400" dirty="0"/>
+              <a:rPr lang="en-US" sz="1300" dirty="0"/>
             </a:br>
             <a:r>
               <a:rPr lang="en-US" sz="600" dirty="0">
@@ -2805,7 +2827,7 @@
                 <a:ea typeface="Calibri" pitchFamily="34" charset="-122"/>
                 <a:cs typeface="Calibri" pitchFamily="34" charset="-120"/>
               </a:rPr>
-              <a:t>The distinction matters wherever a human supervises an automated system — </a:t>
+              <a:t>This topic matters wherever a human supervises an automated system — </a:t>
             </a:r>
             <a:r>
               <a:rPr lang="en-US" sz="1300" b="1" dirty="0">
@@ -2867,22 +2889,52 @@
               <a:t>If an explanation is long and reads like a status log, the operator may feel informed without being able to predict the system's next action. This may lead to the human supervisor missing automation errors with </a:t>
             </a:r>
             <a:r>
-              <a:rPr lang="de-DE" sz="1400" dirty="0" err="1"/>
+              <a:rPr lang="de-DE" sz="1300" dirty="0" err="1">
+                <a:solidFill>
+                  <a:srgbClr val="1A1A1A"/>
+                </a:solidFill>
+                <a:ea typeface="Calibri" pitchFamily="34" charset="-122"/>
+                <a:cs typeface="Calibri" pitchFamily="34" charset="-120"/>
+              </a:rPr>
               <a:t>far-reaching</a:t>
             </a:r>
             <a:r>
-              <a:rPr lang="de-DE" sz="1400" dirty="0"/>
+              <a:rPr lang="de-DE" sz="1300" dirty="0">
+                <a:solidFill>
+                  <a:srgbClr val="1A1A1A"/>
+                </a:solidFill>
+                <a:ea typeface="Calibri" pitchFamily="34" charset="-122"/>
+                <a:cs typeface="Calibri" pitchFamily="34" charset="-120"/>
+              </a:rPr>
               <a:t> </a:t>
             </a:r>
             <a:r>
-              <a:rPr lang="de-DE" sz="1400" dirty="0" err="1"/>
+              <a:rPr lang="de-DE" sz="1300" dirty="0" err="1">
+                <a:solidFill>
+                  <a:srgbClr val="1A1A1A"/>
+                </a:solidFill>
+                <a:ea typeface="Calibri" pitchFamily="34" charset="-122"/>
+                <a:cs typeface="Calibri" pitchFamily="34" charset="-120"/>
+              </a:rPr>
               <a:t>consequences</a:t>
             </a:r>
             <a:r>
-              <a:rPr lang="de-DE" sz="1400" dirty="0"/>
+              <a:rPr lang="de-DE" sz="1300" dirty="0">
+                <a:solidFill>
+                  <a:srgbClr val="1A1A1A"/>
+                </a:solidFill>
+                <a:ea typeface="Calibri" pitchFamily="34" charset="-122"/>
+                <a:cs typeface="Calibri" pitchFamily="34" charset="-120"/>
+              </a:rPr>
               <a:t>.</a:t>
             </a:r>
-            <a:endParaRPr lang="en-US" sz="1300" dirty="0"/>
+            <a:endParaRPr lang="en-US" sz="1300" dirty="0">
+              <a:solidFill>
+                <a:srgbClr val="1A1A1A"/>
+              </a:solidFill>
+              <a:ea typeface="Calibri" pitchFamily="34" charset="-122"/>
+              <a:cs typeface="Calibri" pitchFamily="34" charset="-120"/>
+            </a:endParaRPr>
           </a:p>
           <a:p>
             <a:pPr marL="0" indent="0">
@@ -3113,7 +3165,7 @@
                 <a:ea typeface="Calibri" pitchFamily="34" charset="-122"/>
                 <a:cs typeface="Calibri" pitchFamily="34" charset="-120"/>
               </a:rPr>
-              <a:t>Project pitch  ·  14 May 2026</a:t>
+              <a:t>  14 May 2026</a:t>
             </a:r>
             <a:endParaRPr lang="en-US" sz="1000" dirty="0"/>
           </a:p>
@@ -3999,7 +4051,7 @@
                 <a:ea typeface="Calibri" pitchFamily="34" charset="-122"/>
                 <a:cs typeface="Calibri" pitchFamily="34" charset="-120"/>
               </a:rPr>
-              <a:t>Same necessary facts as F1, reframed selectively and contrastively.</a:t>
+              <a:t>Same necessary decision-relevant facts as F1, reframed selectively and contrastively.</a:t>
             </a:r>
             <a:endParaRPr lang="en-US" sz="1100" dirty="0"/>
           </a:p>
@@ -4584,7 +4636,7 @@
                 <a:ea typeface="Calibri" pitchFamily="34" charset="-122"/>
                 <a:cs typeface="Calibri" pitchFamily="34" charset="-120"/>
               </a:rPr>
-              <a:t>Project pitch  ·  14 May 2026</a:t>
+              <a:t>May 2026</a:t>
             </a:r>
             <a:endParaRPr lang="en-US" sz="1000" dirty="0"/>
           </a:p>
@@ -4914,7 +4966,7 @@
                 <a:ea typeface="Calibri" pitchFamily="34" charset="-122"/>
                 <a:cs typeface="Calibri" pitchFamily="34" charset="-120"/>
               </a:rPr>
-              <a:t>Does the form of an automation aid's reasoning explanation — holding information content constant — change whether the operator's mental model actually updates under multitasking load?</a:t>
+              <a:t>Does the form of an automation aid's reasoning explanation — holding decision-relevant information constant — change subjective transparency and whether the operator's mental model actually updates under multitasking load?</a:t>
             </a:r>
             <a:endParaRPr lang="en-US" sz="1300" dirty="0"/>
           </a:p>
@@ -4988,6 +5040,13 @@
             <a:prstDash val="solid"/>
           </a:ln>
         </p:spPr>
+        <p:txBody>
+          <a:bodyPr/>
+          <a:lstStyle/>
+          <a:p>
+            <a:endParaRPr lang="de-DE" dirty="0"/>
+          </a:p>
+        </p:txBody>
       </p:sp>
       <p:sp>
         <p:nvSpPr>
@@ -5089,7 +5148,7 @@
               <a:buNone/>
             </a:pPr>
             <a:r>
-              <a:rPr lang="en-US" sz="1100" dirty="0">
+              <a:rPr lang="en-US" sz="1200" dirty="0">
                 <a:solidFill>
                   <a:srgbClr val="1A1A1A"/>
                 </a:solidFill>
@@ -5097,9 +5156,9 @@
                 <a:ea typeface="Calibri" pitchFamily="34" charset="-122"/>
                 <a:cs typeface="Calibri" pitchFamily="34" charset="-120"/>
               </a:rPr>
-              <a:t>Participants will rate the verbose always-on explanation (F1) as more transparent than the selective explanations (F2/F3), even when information content is held constant across conditions.</a:t>
-            </a:r>
-            <a:endParaRPr lang="en-US" sz="1100" dirty="0"/>
+              <a:t>Participants will rate the verbose always-on explanation (F1) as more transparent than the selective explanations (F2/F3), even when decision-relevant information is held constant.</a:t>
+            </a:r>
+            <a:endParaRPr lang="en-US" sz="1200" dirty="0"/>
           </a:p>
         </p:txBody>
       </p:sp>
@@ -5228,7 +5287,7 @@
               <a:buNone/>
             </a:pPr>
             <a:r>
-              <a:rPr lang="en-US" sz="1100" dirty="0">
+              <a:rPr lang="en-US" sz="1200" dirty="0">
                 <a:solidFill>
                   <a:srgbClr val="1A1A1A"/>
                 </a:solidFill>
@@ -5236,9 +5295,9 @@
                 <a:ea typeface="Calibri" pitchFamily="34" charset="-122"/>
                 <a:cs typeface="Calibri" pitchFamily="34" charset="-120"/>
               </a:rPr>
-              <a:t>Participants exposed to selective and contrastive explanations (F2/F3) will achieve higher post-block mental-model accuracy than participants exposed to a verbose always-on explanation (F1), even when information content is held constant.</a:t>
-            </a:r>
-            <a:endParaRPr lang="en-US" sz="1100" dirty="0"/>
+              <a:t>Participants exposed to selective and contrastive explanations (F2/F3) will achieve higher post-block mental-model accuracy than participants exposed to a verbose always-on explanation (F1), even when decision-relevant information is held constant.</a:t>
+            </a:r>
+            <a:endParaRPr lang="en-US" sz="1200" dirty="0"/>
           </a:p>
         </p:txBody>
       </p:sp>
@@ -5367,7 +5426,7 @@
               <a:buNone/>
             </a:pPr>
             <a:r>
-              <a:rPr lang="en-US" sz="1100" dirty="0">
+              <a:rPr lang="en-US" sz="1200" dirty="0">
                 <a:solidFill>
                   <a:srgbClr val="1A1A1A"/>
                 </a:solidFill>
@@ -5377,7 +5436,7 @@
               </a:rPr>
               <a:t>Participants will detect a higher proportion of automation-missed events under selective explanations (F2/F3) than under a verbose always-on explanation (F1).</a:t>
             </a:r>
-            <a:endParaRPr lang="en-US" sz="1100" dirty="0"/>
+            <a:endParaRPr lang="en-US" sz="1200" dirty="0"/>
           </a:p>
         </p:txBody>
       </p:sp>
@@ -5506,7 +5565,7 @@
               <a:buNone/>
             </a:pPr>
             <a:r>
-              <a:rPr lang="en-US" sz="1100" dirty="0">
+              <a:rPr lang="en-US" sz="1200" dirty="0">
                 <a:solidFill>
                   <a:srgbClr val="1A1A1A"/>
                 </a:solidFill>
@@ -5516,7 +5575,7 @@
               </a:rPr>
               <a:t>Participants will achieve higher performance on the non-automated tasks (communications and resource management) under selective explanations (F2/F3) than under a verbose always-on explanation (F1).</a:t>
             </a:r>
-            <a:endParaRPr lang="en-US" sz="1100" dirty="0"/>
+            <a:endParaRPr lang="en-US" sz="1200" dirty="0"/>
           </a:p>
         </p:txBody>
       </p:sp>
@@ -5728,7 +5787,7 @@
                 <a:ea typeface="Calibri" pitchFamily="34" charset="-122"/>
                 <a:cs typeface="Calibri" pitchFamily="34" charset="-120"/>
               </a:rPr>
-              <a:t>Project pitch  ·  14 May 2026</a:t>
+              <a:t>May 2026</a:t>
             </a:r>
             <a:endParaRPr lang="en-US" sz="1000" dirty="0"/>
           </a:p>
@@ -6358,12 +6417,8 @@
               <a:buChar char="•"/>
             </a:pPr>
             <a:r>
-              <a:rPr lang="en-US" sz="1400" dirty="0" err="1"/>
-              <a:t>Plattform</a:t>
-            </a:r>
-            <a:r>
               <a:rPr lang="en-US" sz="1400" dirty="0"/>
-              <a:t> log</a:t>
+              <a:t>Platform log</a:t>
             </a:r>
           </a:p>
           <a:p>
@@ -7126,7 +7181,7 @@
                 <a:ea typeface="Calibri" pitchFamily="34" charset="-122"/>
                 <a:cs typeface="Calibri" pitchFamily="34" charset="-120"/>
               </a:rPr>
-              <a:t>Project pitch  ·  14 May 2026</a:t>
+              <a:t>14 May 2026</a:t>
             </a:r>
             <a:endParaRPr lang="en-US" sz="1000" dirty="0"/>
           </a:p>

--- a/Documents/Study.pptx
+++ b/Documents/Study.pptx
@@ -1258,7 +1258,7 @@
             </a:pPr>
             <a:r>
               <a:rPr lang="en-US" sz="1000" dirty="0"/>
-              <a:t>Mai 2026</a:t>
+              <a:t>May 2026</a:t>
             </a:r>
           </a:p>
         </p:txBody>
@@ -2162,7 +2162,7 @@
                 <a:ea typeface="Calibri" pitchFamily="34" charset="-122"/>
                 <a:cs typeface="Calibri" pitchFamily="34" charset="-120"/>
               </a:rPr>
-              <a:t> gives the operator insight into the systems inner workings</a:t>
+              <a:t> gives the operator insight into the system’s inner workings</a:t>
             </a:r>
           </a:p>
           <a:p>
@@ -4422,7 +4422,7 @@
                 <a:ea typeface="Calibri" pitchFamily="34" charset="-122"/>
                 <a:cs typeface="Calibri" pitchFamily="34" charset="-120"/>
               </a:rPr>
-              <a:t>F2 and the actionable cue.</a:t>
+              <a:t>F2 plus an explicit operator cue.</a:t>
             </a:r>
             <a:endParaRPr lang="en-US" sz="1100" dirty="0"/>
           </a:p>
@@ -6175,7 +6175,7 @@
                 <a:ea typeface="Calibri" pitchFamily="34" charset="-122"/>
                 <a:cs typeface="Calibri" pitchFamily="34" charset="-120"/>
               </a:rPr>
-              <a:t>Each participant runs all three forms (F1/F2/F3), each on three different gauge sets (A,B,C). The gauge sets contain different subsets of gauges and lights that need the operators attention, s</a:t>
+              <a:t>Each participant runs all three forms (F1/F2/F3), each on three different gauge sets (A,B,C). The gauge sets contain different subsets of gauges and lights that need the operator’s attention, s</a:t>
             </a:r>
             <a:r>
               <a:rPr lang="en-US" sz="1400" b="0" i="0" dirty="0">
@@ -6394,17 +6394,7 @@
                 </a:solidFill>
                 <a:latin typeface="-apple-system"/>
               </a:rPr>
-              <a:t>q</a:t>
-            </a:r>
-            <a:r>
-              <a:rPr lang="de-DE" sz="1400" i="0" dirty="0" err="1">
-                <a:solidFill>
-                  <a:srgbClr val="3B3B3B"/>
-                </a:solidFill>
-                <a:effectLst/>
-                <a:latin typeface="-apple-system"/>
-              </a:rPr>
-              <a:t>uestionnaires</a:t>
+              <a:t>questionnaires</a:t>
             </a:r>
             <a:r>
               <a:rPr lang="en-US" sz="1400" dirty="0"/>
@@ -6428,13 +6418,8 @@
             </a:pPr>
             <a:r>
               <a:rPr lang="en-US" sz="1400" dirty="0"/>
-              <a:t>One final </a:t>
-            </a:r>
-            <a:r>
-              <a:rPr lang="en-US" sz="1400" dirty="0" err="1"/>
-              <a:t>questionaire</a:t>
-            </a:r>
-            <a:endParaRPr lang="en-US" sz="1400" dirty="0"/>
+              <a:t>One final questionnaire</a:t>
+            </a:r>
           </a:p>
         </p:txBody>
       </p:sp>
@@ -8307,7 +8292,7 @@
                 <a:ea typeface="Calibri" pitchFamily="34" charset="-122"/>
                 <a:cs typeface="Calibri" pitchFamily="34" charset="-120"/>
               </a:rPr>
-              <a:t>Communications: whether each radio call was answered correctly and how quickly. Scheduling: correct entries on a time-table. These tasks the aid does not help with — so they reveal whether reading less in the panel actually frees attention elsewhere.</a:t>
+              <a:t>Communications: whether each radio call was answered correctly and how quickly. Resource Management: How stable the tank level was held. These tasks the aid does not help with — so they reveal whether reading less in the panel actually frees attention elsewhere.</a:t>
             </a:r>
             <a:endParaRPr lang="en-US" sz="1050" dirty="0"/>
           </a:p>

--- a/Documents/Study.pptx
+++ b/Documents/Study.pptx
@@ -1498,7 +1498,7 @@
                 <a:ea typeface="Calibri" pitchFamily="34" charset="-122"/>
                 <a:cs typeface="Calibri" pitchFamily="34" charset="-120"/>
               </a:rPr>
-              <a:t>Does the form of an automation aid's reasoning explanation — holding decision-relevant information constant — change subjective transparency </a:t>
+              <a:t>Does the form of an automation aid's reasoning explanation — holding action-relevant information constant — change subjective transparency </a:t>
             </a:r>
             <a:r>
               <a:rPr lang="en-US" sz="1600" dirty="0">
@@ -2265,7 +2265,24 @@
                 </a:solidFill>
                 <a:effectLst/>
               </a:rPr>
-              <a:t>while holding the decision-relevant information constant. </a:t>
+              <a:t>while holding the </a:t>
+            </a:r>
+            <a:r>
+              <a:rPr lang="en-US" sz="1400" dirty="0">
+                <a:solidFill>
+                  <a:srgbClr val="3B3B3B"/>
+                </a:solidFill>
+              </a:rPr>
+              <a:t>action</a:t>
+            </a:r>
+            <a:r>
+              <a:rPr lang="en-US" sz="1400" b="0" i="0" dirty="0">
+                <a:solidFill>
+                  <a:srgbClr val="3B3B3B"/>
+                </a:solidFill>
+                <a:effectLst/>
+              </a:rPr>
+              <a:t>-relevant information constant. </a:t>
             </a:r>
             <a:endParaRPr lang="en-US" sz="1300" dirty="0">
               <a:solidFill>
@@ -2347,8 +2364,8 @@
         </p:nvSpPr>
         <p:spPr>
           <a:xfrm>
-            <a:off x="6309360" y="4428269"/>
-            <a:ext cx="5486400" cy="1831854"/>
+            <a:off x="6309360" y="4348756"/>
+            <a:ext cx="5486400" cy="2109691"/>
           </a:xfrm>
           <a:prstGeom prst="rect">
             <a:avLst/>
@@ -2426,7 +2443,7 @@
                 </a:solidFill>
                 <a:effectLst/>
               </a:rPr>
-              <a:t>. Our design holds decision-relevant content and varies </a:t>
+              <a:t>. Our design holds action-relevant content and varies </a:t>
             </a:r>
             <a:r>
               <a:rPr lang="en-US" sz="1300" b="1" dirty="0">
@@ -2460,13 +2477,21 @@
           <a:p>
             <a:pPr algn="l"/>
             <a:r>
+              <a:rPr lang="en-US" sz="1300" dirty="0">
+                <a:solidFill>
+                  <a:srgbClr val="3B3B3B"/>
+                </a:solidFill>
+              </a:rPr>
+              <a:t> The XAI literature shows that explanations can raise agreement and the feeling of being informed without improving the user's ability to catch AI mistakes (Bansal 2021), and that subjective understanding often rises without objective understanding (Wang &amp; Yin 2021) — but these results come from single-task settings. </a:t>
+            </a:r>
+            <a:r>
               <a:rPr lang="en-US" sz="1300" b="0" i="0" dirty="0">
                 <a:solidFill>
                   <a:srgbClr val="3B3B3B"/>
                 </a:solidFill>
                 <a:effectLst/>
               </a:rPr>
-              <a:t>The XAI literature (Wang &amp; Yin 2021, Bansal 2021) has shown explanations can raise trust without improving understanding, but only in one-shot decisions. We test the same dissociation under </a:t>
+              <a:t>We test the same dissociation under </a:t>
             </a:r>
             <a:r>
               <a:rPr lang="en-US" sz="1300" b="1" dirty="0">
@@ -2755,7 +2780,7 @@
         </p:nvSpPr>
         <p:spPr>
           <a:xfrm>
-            <a:off x="6309360" y="4021362"/>
+            <a:off x="6309360" y="3994858"/>
             <a:ext cx="5486400" cy="310896"/>
           </a:xfrm>
           <a:prstGeom prst="rect">
@@ -4051,7 +4076,7 @@
                 <a:ea typeface="Calibri" pitchFamily="34" charset="-122"/>
                 <a:cs typeface="Calibri" pitchFamily="34" charset="-120"/>
               </a:rPr>
-              <a:t>Same necessary decision-relevant facts as F1, reframed selectively and contrastively.</a:t>
+              <a:t>Same necessary action-relevant facts as F1, reframed selectively and contrastively.</a:t>
             </a:r>
             <a:endParaRPr lang="en-US" sz="1100" dirty="0"/>
           </a:p>
@@ -4966,7 +4991,7 @@
                 <a:ea typeface="Calibri" pitchFamily="34" charset="-122"/>
                 <a:cs typeface="Calibri" pitchFamily="34" charset="-120"/>
               </a:rPr>
-              <a:t>Does the form of an automation aid's reasoning explanation — holding decision-relevant information constant — change subjective transparency and whether the operator's mental model actually updates under multitasking load?</a:t>
+              <a:t>Does the form of an automation aid's reasoning explanation — holding action-relevant information constant — change subjective transparency and whether the operator's mental model actually updates under multitasking load?</a:t>
             </a:r>
             <a:endParaRPr lang="en-US" sz="1300" dirty="0"/>
           </a:p>
@@ -5117,7 +5142,29 @@
                 <a:ea typeface="Calibri" pitchFamily="34" charset="-122"/>
                 <a:cs typeface="Calibri" pitchFamily="34" charset="-120"/>
               </a:rPr>
-              <a:t>Subjective transparency favours verbose explanations</a:t>
+              <a:t>Subjective transparency  and subjective trust </a:t>
+            </a:r>
+            <a:r>
+              <a:rPr lang="en-US" sz="1200" b="1" dirty="0" err="1">
+                <a:solidFill>
+                  <a:srgbClr val="1A1A1A"/>
+                </a:solidFill>
+                <a:latin typeface="Calibri" pitchFamily="34" charset="0"/>
+                <a:ea typeface="Calibri" pitchFamily="34" charset="-122"/>
+                <a:cs typeface="Calibri" pitchFamily="34" charset="-120"/>
+              </a:rPr>
+              <a:t>favours</a:t>
+            </a:r>
+            <a:r>
+              <a:rPr lang="en-US" sz="1200" b="1" dirty="0">
+                <a:solidFill>
+                  <a:srgbClr val="1A1A1A"/>
+                </a:solidFill>
+                <a:latin typeface="Calibri" pitchFamily="34" charset="0"/>
+                <a:ea typeface="Calibri" pitchFamily="34" charset="-122"/>
+                <a:cs typeface="Calibri" pitchFamily="34" charset="-120"/>
+              </a:rPr>
+              <a:t> verbose explanations</a:t>
             </a:r>
             <a:endParaRPr lang="en-US" sz="1300" dirty="0"/>
           </a:p>
@@ -5156,7 +5203,7 @@
                 <a:ea typeface="Calibri" pitchFamily="34" charset="-122"/>
                 <a:cs typeface="Calibri" pitchFamily="34" charset="-120"/>
               </a:rPr>
-              <a:t>Participants will rate the verbose always-on explanation (F1) as more transparent than the selective explanations (F2/F3), even when decision-relevant information is held constant.</a:t>
+              <a:t>Participants will rate the verbose always-on explanation (F1) as more transparent and more trustworthy than the selective explanations (F2/F3) , even when action-relevant information is held constant.</a:t>
             </a:r>
             <a:endParaRPr lang="en-US" sz="1200" dirty="0"/>
           </a:p>
@@ -5295,7 +5342,7 @@
                 <a:ea typeface="Calibri" pitchFamily="34" charset="-122"/>
                 <a:cs typeface="Calibri" pitchFamily="34" charset="-120"/>
               </a:rPr>
-              <a:t>Participants exposed to selective and contrastive explanations (F2/F3) will achieve higher post-block mental-model accuracy than participants exposed to a verbose always-on explanation (F1), even when decision-relevant information is held constant.</a:t>
+              <a:t>Participants exposed to selective and contrastive explanations (F2/F3) will achieve higher post-block mental-model accuracy than participants exposed to a verbose always-on explanation (F1), even when action-relevant information is held constant.</a:t>
             </a:r>
             <a:endParaRPr lang="en-US" sz="1200" dirty="0"/>
           </a:p>
@@ -5325,6 +5372,13 @@
             <a:prstDash val="solid"/>
           </a:ln>
         </p:spPr>
+        <p:txBody>
+          <a:bodyPr/>
+          <a:lstStyle/>
+          <a:p>
+            <a:endParaRPr lang="de-DE" dirty="0"/>
+          </a:p>
+        </p:txBody>
       </p:sp>
       <p:sp>
         <p:nvSpPr>
@@ -5395,7 +5449,7 @@
                 <a:ea typeface="Calibri" pitchFamily="34" charset="-122"/>
                 <a:cs typeface="Calibri" pitchFamily="34" charset="-120"/>
               </a:rPr>
-              <a:t>Selectivity directs attention to anomalies</a:t>
+              <a:t>Selectivity directs attention to anomalies and improves </a:t>
             </a:r>
             <a:endParaRPr lang="en-US" sz="1300" dirty="0"/>
           </a:p>
@@ -5434,9 +5488,37 @@
                 <a:ea typeface="Calibri" pitchFamily="34" charset="-122"/>
                 <a:cs typeface="Calibri" pitchFamily="34" charset="-120"/>
               </a:rPr>
-              <a:t>Participants will detect a higher proportion of automation-missed events under selective explanations (F2/F3) than under a verbose always-on explanation (F1).</a:t>
-            </a:r>
-            <a:endParaRPr lang="en-US" sz="1200" dirty="0"/>
+              <a:t>A: Participants will detect a higher proportion of automation-missed events under selective explanations (F2/F3) than under a verbose always-on explanation (F1).</a:t>
+            </a:r>
+          </a:p>
+          <a:p>
+            <a:pPr marL="0" indent="0">
+              <a:buNone/>
+            </a:pPr>
+            <a:endParaRPr lang="en-US" sz="1200" dirty="0">
+              <a:solidFill>
+                <a:srgbClr val="1A1A1A"/>
+              </a:solidFill>
+              <a:latin typeface="Calibri" pitchFamily="34" charset="0"/>
+              <a:ea typeface="Calibri" pitchFamily="34" charset="-122"/>
+              <a:cs typeface="Calibri" pitchFamily="34" charset="-120"/>
+            </a:endParaRPr>
+          </a:p>
+          <a:p>
+            <a:pPr marL="0" indent="0">
+              <a:buNone/>
+            </a:pPr>
+            <a:r>
+              <a:rPr lang="en-US" sz="1200" dirty="0">
+                <a:solidFill>
+                  <a:srgbClr val="1A1A1A"/>
+                </a:solidFill>
+                <a:latin typeface="Calibri" pitchFamily="34" charset="0"/>
+                <a:ea typeface="Calibri" pitchFamily="34" charset="-122"/>
+                <a:cs typeface="Calibri" pitchFamily="34" charset="-120"/>
+              </a:rPr>
+              <a:t>B: Participants will less likely overwrite the aid even when it was right under (F2/F3) than under (F1).</a:t>
+            </a:r>
           </a:p>
         </p:txBody>
       </p:sp>
@@ -6127,7 +6209,7 @@
                 <a:ea typeface="Calibri" pitchFamily="34" charset="-122"/>
                 <a:cs typeface="Calibri" pitchFamily="34" charset="-120"/>
               </a:rPr>
-              <a:t>Runs only on system monitoring at ~78% reliability; the other two tasks compete for attention and are not aided.</a:t>
+              <a:t>Runs only on system monitoring at ~78% reliability; the other two tasks compete for attention and are not aided. Every automation miss is communicated, so that the operator can handle the event manually if the information is perceived and processed.</a:t>
             </a:r>
             <a:endParaRPr lang="en-US" sz="1400" dirty="0"/>
           </a:p>
@@ -6376,7 +6458,7 @@
                 </a:solidFill>
                 <a:latin typeface="-apple-system"/>
               </a:rPr>
-              <a:t>Two</a:t>
+              <a:t>Three</a:t>
             </a:r>
             <a:r>
               <a:rPr lang="de-DE" sz="1400" dirty="0">
@@ -7382,7 +7464,7 @@
         </p:nvSpPr>
         <p:spPr>
           <a:xfrm>
-            <a:off x="411480" y="1874520"/>
+            <a:off x="411480" y="1728748"/>
             <a:ext cx="5592928" cy="1234440"/>
           </a:xfrm>
           <a:prstGeom prst="rect">
@@ -7407,7 +7489,7 @@
         </p:nvSpPr>
         <p:spPr>
           <a:xfrm>
-            <a:off x="411480" y="1874520"/>
+            <a:off x="411480" y="1728748"/>
             <a:ext cx="73152" cy="1234440"/>
           </a:xfrm>
           <a:prstGeom prst="rect">
@@ -7432,7 +7514,7 @@
         </p:nvSpPr>
         <p:spPr>
           <a:xfrm>
-            <a:off x="576072" y="1947672"/>
+            <a:off x="576072" y="1801900"/>
             <a:ext cx="4312768" cy="274320"/>
           </a:xfrm>
           <a:prstGeom prst="rect">
@@ -7471,7 +7553,7 @@
         </p:nvSpPr>
         <p:spPr>
           <a:xfrm>
-            <a:off x="4952848" y="1965960"/>
+            <a:off x="4952848" y="1820188"/>
             <a:ext cx="868680" cy="237744"/>
           </a:xfrm>
           <a:prstGeom prst="rect">
@@ -7496,7 +7578,7 @@
         </p:nvSpPr>
         <p:spPr>
           <a:xfrm>
-            <a:off x="4952848" y="1975104"/>
+            <a:off x="4952848" y="1829332"/>
             <a:ext cx="868680" cy="219456"/>
           </a:xfrm>
           <a:prstGeom prst="rect">
@@ -7535,7 +7617,7 @@
         </p:nvSpPr>
         <p:spPr>
           <a:xfrm>
-            <a:off x="576072" y="2203704"/>
+            <a:off x="576072" y="2057932"/>
             <a:ext cx="5318608" cy="201168"/>
           </a:xfrm>
           <a:prstGeom prst="rect">
@@ -7574,7 +7656,7 @@
         </p:nvSpPr>
         <p:spPr>
           <a:xfrm>
-            <a:off x="576072" y="2404872"/>
+            <a:off x="576072" y="2259100"/>
             <a:ext cx="5318608" cy="640080"/>
           </a:xfrm>
           <a:prstGeom prst="rect">
@@ -7613,7 +7695,7 @@
         </p:nvSpPr>
         <p:spPr>
           <a:xfrm>
-            <a:off x="6187288" y="1874520"/>
+            <a:off x="6187288" y="1728748"/>
             <a:ext cx="5592928" cy="1234440"/>
           </a:xfrm>
           <a:prstGeom prst="rect">
@@ -7638,7 +7720,7 @@
         </p:nvSpPr>
         <p:spPr>
           <a:xfrm>
-            <a:off x="6187288" y="1874520"/>
+            <a:off x="6187288" y="1728748"/>
             <a:ext cx="73152" cy="1234440"/>
           </a:xfrm>
           <a:prstGeom prst="rect">
@@ -7663,7 +7745,7 @@
         </p:nvSpPr>
         <p:spPr>
           <a:xfrm>
-            <a:off x="6351880" y="1947672"/>
+            <a:off x="6351880" y="1801900"/>
             <a:ext cx="4312768" cy="274320"/>
           </a:xfrm>
           <a:prstGeom prst="rect">
@@ -7702,7 +7784,7 @@
         </p:nvSpPr>
         <p:spPr>
           <a:xfrm>
-            <a:off x="10728655" y="1965960"/>
+            <a:off x="10728655" y="1820188"/>
             <a:ext cx="868680" cy="237744"/>
           </a:xfrm>
           <a:prstGeom prst="rect">
@@ -7727,7 +7809,7 @@
         </p:nvSpPr>
         <p:spPr>
           <a:xfrm>
-            <a:off x="10728655" y="1975104"/>
+            <a:off x="10728655" y="1829332"/>
             <a:ext cx="868680" cy="219456"/>
           </a:xfrm>
           <a:prstGeom prst="rect">
@@ -7766,7 +7848,7 @@
         </p:nvSpPr>
         <p:spPr>
           <a:xfrm>
-            <a:off x="6351880" y="2203704"/>
+            <a:off x="6351880" y="2057932"/>
             <a:ext cx="5318608" cy="201168"/>
           </a:xfrm>
           <a:prstGeom prst="rect">
@@ -7805,7 +7887,7 @@
         </p:nvSpPr>
         <p:spPr>
           <a:xfrm>
-            <a:off x="6351880" y="2404872"/>
+            <a:off x="6351880" y="2259100"/>
             <a:ext cx="5318608" cy="640080"/>
           </a:xfrm>
           <a:prstGeom prst="rect">
@@ -7844,8 +7926,8 @@
         </p:nvSpPr>
         <p:spPr>
           <a:xfrm>
-            <a:off x="411480" y="3200400"/>
-            <a:ext cx="5592928" cy="1234440"/>
+            <a:off x="411480" y="3054628"/>
+            <a:ext cx="5592928" cy="881388"/>
           </a:xfrm>
           <a:prstGeom prst="rect">
             <a:avLst/>
@@ -7869,8 +7951,8 @@
         </p:nvSpPr>
         <p:spPr>
           <a:xfrm>
-            <a:off x="411480" y="3200400"/>
-            <a:ext cx="73152" cy="1234440"/>
+            <a:off x="411480" y="3054628"/>
+            <a:ext cx="73152" cy="890532"/>
           </a:xfrm>
           <a:prstGeom prst="rect">
             <a:avLst/>
@@ -7894,7 +7976,7 @@
         </p:nvSpPr>
         <p:spPr>
           <a:xfrm>
-            <a:off x="576072" y="3273552"/>
+            <a:off x="576072" y="3127780"/>
             <a:ext cx="4312768" cy="274320"/>
           </a:xfrm>
           <a:prstGeom prst="rect">
@@ -7933,7 +8015,7 @@
         </p:nvSpPr>
         <p:spPr>
           <a:xfrm>
-            <a:off x="4952848" y="3291840"/>
+            <a:off x="4952848" y="3146068"/>
             <a:ext cx="868680" cy="237744"/>
           </a:xfrm>
           <a:prstGeom prst="rect">
@@ -7958,7 +8040,7 @@
         </p:nvSpPr>
         <p:spPr>
           <a:xfrm>
-            <a:off x="4952848" y="3300984"/>
+            <a:off x="4952848" y="3155212"/>
             <a:ext cx="868680" cy="219456"/>
           </a:xfrm>
           <a:prstGeom prst="rect">
@@ -7997,7 +8079,7 @@
         </p:nvSpPr>
         <p:spPr>
           <a:xfrm>
-            <a:off x="576072" y="3529584"/>
+            <a:off x="576072" y="3383812"/>
             <a:ext cx="5318608" cy="201168"/>
           </a:xfrm>
           <a:prstGeom prst="rect">
@@ -8036,8 +8118,8 @@
         </p:nvSpPr>
         <p:spPr>
           <a:xfrm>
-            <a:off x="576072" y="3730752"/>
-            <a:ext cx="5318608" cy="640080"/>
+            <a:off x="576072" y="3584980"/>
+            <a:ext cx="5318608" cy="360180"/>
           </a:xfrm>
           <a:prstGeom prst="rect">
             <a:avLst/>
@@ -8075,8 +8157,8 @@
         </p:nvSpPr>
         <p:spPr>
           <a:xfrm>
-            <a:off x="6187288" y="3200400"/>
-            <a:ext cx="5592928" cy="1234440"/>
+            <a:off x="6188611" y="3068236"/>
+            <a:ext cx="5592928" cy="881388"/>
           </a:xfrm>
           <a:prstGeom prst="rect">
             <a:avLst/>
@@ -8091,6 +8173,13 @@
             <a:prstDash val="solid"/>
           </a:ln>
         </p:spPr>
+        <p:txBody>
+          <a:bodyPr/>
+          <a:lstStyle/>
+          <a:p>
+            <a:endParaRPr lang="de-DE" dirty="0"/>
+          </a:p>
+        </p:txBody>
       </p:sp>
       <p:sp>
         <p:nvSpPr>
@@ -8100,8 +8189,8 @@
         </p:nvSpPr>
         <p:spPr>
           <a:xfrm>
-            <a:off x="6187288" y="3200400"/>
-            <a:ext cx="73152" cy="1234440"/>
+            <a:off x="6187288" y="3067880"/>
+            <a:ext cx="73152" cy="881388"/>
           </a:xfrm>
           <a:prstGeom prst="rect">
             <a:avLst/>
@@ -8125,7 +8214,7 @@
         </p:nvSpPr>
         <p:spPr>
           <a:xfrm>
-            <a:off x="6351880" y="3273552"/>
+            <a:off x="6351880" y="3141032"/>
             <a:ext cx="4312768" cy="274320"/>
           </a:xfrm>
           <a:prstGeom prst="rect">
@@ -8150,7 +8239,7 @@
                 <a:ea typeface="Calibri" pitchFamily="34" charset="-122"/>
                 <a:cs typeface="Calibri" pitchFamily="34" charset="-120"/>
               </a:rPr>
-              <a:t>Non-automated task performance</a:t>
+              <a:t>Subjective trust</a:t>
             </a:r>
             <a:endParaRPr lang="en-US" sz="1200" dirty="0"/>
           </a:p>
@@ -8164,7 +8253,7 @@
         </p:nvSpPr>
         <p:spPr>
           <a:xfrm>
-            <a:off x="10728655" y="3291840"/>
+            <a:off x="10728655" y="3192450"/>
             <a:ext cx="868680" cy="237744"/>
           </a:xfrm>
           <a:prstGeom prst="rect">
@@ -8180,6 +8269,13 @@
             <a:prstDash val="solid"/>
           </a:ln>
         </p:spPr>
+        <p:txBody>
+          <a:bodyPr/>
+          <a:lstStyle/>
+          <a:p>
+            <a:endParaRPr lang="de-DE" dirty="0"/>
+          </a:p>
+        </p:txBody>
       </p:sp>
       <p:sp>
         <p:nvSpPr>
@@ -8189,7 +8285,7 @@
         </p:nvSpPr>
         <p:spPr>
           <a:xfrm>
-            <a:off x="10728655" y="3300984"/>
+            <a:off x="10728655" y="3188342"/>
             <a:ext cx="868680" cy="219456"/>
           </a:xfrm>
           <a:prstGeom prst="rect">
@@ -8214,7 +8310,7 @@
                 <a:ea typeface="Calibri" pitchFamily="34" charset="-122"/>
                 <a:cs typeface="Calibri" pitchFamily="34" charset="-120"/>
               </a:rPr>
-              <a:t>H4</a:t>
+              <a:t>H1</a:t>
             </a:r>
             <a:endParaRPr lang="en-US" sz="1000" dirty="0"/>
           </a:p>
@@ -8228,7 +8324,7 @@
         </p:nvSpPr>
         <p:spPr>
           <a:xfrm>
-            <a:off x="6351880" y="3529584"/>
+            <a:off x="6351880" y="3397064"/>
             <a:ext cx="5318608" cy="201168"/>
           </a:xfrm>
           <a:prstGeom prst="rect">
@@ -8253,7 +8349,7 @@
                 <a:ea typeface="Calibri" pitchFamily="34" charset="-122"/>
                 <a:cs typeface="Calibri" pitchFamily="34" charset="-120"/>
               </a:rPr>
-              <a:t>Platform log</a:t>
+              <a:t>Questionnaire · after each block</a:t>
             </a:r>
             <a:endParaRPr lang="en-US" sz="900" dirty="0"/>
           </a:p>
@@ -8267,8 +8363,8 @@
         </p:nvSpPr>
         <p:spPr>
           <a:xfrm>
-            <a:off x="6351880" y="3730752"/>
-            <a:ext cx="5318608" cy="640080"/>
+            <a:off x="6351880" y="3598232"/>
+            <a:ext cx="5318608" cy="360180"/>
           </a:xfrm>
           <a:prstGeom prst="rect">
             <a:avLst/>
@@ -8280,8 +8376,9 @@
           <a:bodyPr wrap="square" lIns="0" tIns="0" rIns="0" bIns="0" rtlCol="0" anchor="t"/>
           <a:lstStyle/>
           <a:p>
-            <a:pPr marL="0" indent="0">
-              <a:buNone/>
+            <a:pPr algn="l">
+              <a:buFont typeface="+mj-lt"/>
+              <a:buAutoNum type="arabicPeriod"/>
             </a:pPr>
             <a:r>
               <a:rPr lang="en-US" sz="1050" dirty="0">
@@ -8292,8 +8389,83 @@
                 <a:ea typeface="Calibri" pitchFamily="34" charset="-122"/>
                 <a:cs typeface="Calibri" pitchFamily="34" charset="-120"/>
               </a:rPr>
-              <a:t>Communications: whether each radio call was answered correctly and how quickly. Resource Management: How stable the tank level was held. These tasks the aid does not help with — so they reveal whether reading less in the panel actually frees attention elsewhere.</a:t>
-            </a:r>
+              <a:t>Several rating like “</a:t>
+            </a:r>
+            <a:r>
+              <a:rPr lang="en-US" sz="1050" b="0" i="0" dirty="0">
+                <a:solidFill>
+                  <a:srgbClr val="3B3B3B"/>
+                </a:solidFill>
+                <a:effectLst/>
+                <a:latin typeface="-apple-system"/>
+              </a:rPr>
+              <a:t>The aid is </a:t>
+            </a:r>
+            <a:r>
+              <a:rPr lang="en-US" sz="1050" i="0" dirty="0">
+                <a:solidFill>
+                  <a:srgbClr val="3B3B3B"/>
+                </a:solidFill>
+                <a:effectLst/>
+                <a:latin typeface="-apple-system"/>
+              </a:rPr>
+              <a:t>dependable</a:t>
+            </a:r>
+            <a:r>
+              <a:rPr lang="en-US" sz="1050" b="0" i="0" dirty="0">
+                <a:solidFill>
+                  <a:srgbClr val="3B3B3B"/>
+                </a:solidFill>
+                <a:effectLst/>
+                <a:latin typeface="-apple-system"/>
+              </a:rPr>
+              <a:t>.”, “The aid is </a:t>
+            </a:r>
+            <a:r>
+              <a:rPr lang="en-US" sz="1050" i="0" dirty="0">
+                <a:solidFill>
+                  <a:srgbClr val="3B3B3B"/>
+                </a:solidFill>
+                <a:effectLst/>
+                <a:latin typeface="-apple-system"/>
+              </a:rPr>
+              <a:t>reliable</a:t>
+            </a:r>
+            <a:r>
+              <a:rPr lang="en-US" sz="1050" b="0" i="0" dirty="0">
+                <a:solidFill>
+                  <a:srgbClr val="3B3B3B"/>
+                </a:solidFill>
+                <a:effectLst/>
+                <a:latin typeface="-apple-system"/>
+              </a:rPr>
+              <a:t>.”, “I am </a:t>
+            </a:r>
+            <a:r>
+              <a:rPr lang="en-US" sz="1050" i="0" dirty="0">
+                <a:solidFill>
+                  <a:srgbClr val="3B3B3B"/>
+                </a:solidFill>
+                <a:effectLst/>
+                <a:latin typeface="-apple-system"/>
+              </a:rPr>
+              <a:t>confident</a:t>
+            </a:r>
+            <a:r>
+              <a:rPr lang="en-US" sz="1050" b="0" i="0" dirty="0">
+                <a:solidFill>
+                  <a:srgbClr val="3B3B3B"/>
+                </a:solidFill>
+                <a:effectLst/>
+                <a:latin typeface="-apple-system"/>
+              </a:rPr>
+              <a:t> in the aid.”, … to capture subjective trust.</a:t>
+            </a:r>
+          </a:p>
+          <a:p>
+            <a:pPr marL="0" indent="0">
+              <a:buNone/>
+            </a:pPr>
             <a:endParaRPr lang="en-US" sz="1050" dirty="0"/>
           </a:p>
         </p:txBody>
@@ -8306,8 +8478,8 @@
         </p:nvSpPr>
         <p:spPr>
           <a:xfrm>
-            <a:off x="411480" y="4572000"/>
-            <a:ext cx="11368735" cy="1417320"/>
+            <a:off x="411480" y="5216708"/>
+            <a:ext cx="11368735" cy="1156920"/>
           </a:xfrm>
           <a:prstGeom prst="rect">
             <a:avLst/>
@@ -8338,8 +8510,8 @@
         </p:nvSpPr>
         <p:spPr>
           <a:xfrm>
-            <a:off x="411480" y="4572000"/>
-            <a:ext cx="91440" cy="1417320"/>
+            <a:off x="411480" y="5216708"/>
+            <a:ext cx="73152" cy="1156920"/>
           </a:xfrm>
           <a:prstGeom prst="rect">
             <a:avLst/>
@@ -8363,7 +8535,7 @@
         </p:nvSpPr>
         <p:spPr>
           <a:xfrm>
-            <a:off x="640080" y="4626864"/>
+            <a:off x="571500" y="5216708"/>
             <a:ext cx="11140135" cy="274320"/>
           </a:xfrm>
           <a:prstGeom prst="rect">
@@ -8402,8 +8574,8 @@
         </p:nvSpPr>
         <p:spPr>
           <a:xfrm>
-            <a:off x="640080" y="4901184"/>
-            <a:ext cx="11140135" cy="1097280"/>
+            <a:off x="576072" y="5523496"/>
+            <a:ext cx="11140135" cy="795268"/>
           </a:xfrm>
           <a:prstGeom prst="rect">
             <a:avLst/>
@@ -8415,11 +8587,12 @@
           <a:bodyPr wrap="square" lIns="0" tIns="0" rIns="0" bIns="0" rtlCol="0" anchor="t"/>
           <a:lstStyle/>
           <a:p>
-            <a:pPr marL="0" indent="0">
+            <a:pPr marL="171450" indent="-171450">
               <a:spcAft>
                 <a:spcPts val="200"/>
               </a:spcAft>
-              <a:buNone/>
+              <a:buFont typeface="Arial" panose="020B0604020202020204" pitchFamily="34" charset="0"/>
+              <a:buChar char="•"/>
             </a:pPr>
             <a:r>
               <a:rPr lang="en-US" sz="1100" dirty="0">
@@ -8430,16 +8603,17 @@
                 <a:ea typeface="Calibri" pitchFamily="34" charset="-122"/>
                 <a:cs typeface="Calibri" pitchFamily="34" charset="-120"/>
               </a:rPr>
-              <a:t>Content matching across F1/F2/F3 is the central design constraint — any leak invalidates the form-vs-content comparison.</a:t>
+              <a:t>F1 → F2 changes three factors simultaneously (selectivity + contrastiveness + framing). Treated as a package-level test of "form", not as three isolated effects; F3 − F2 isolates the actionable cue.</a:t>
             </a:r>
             <a:endParaRPr lang="en-US" sz="1100" dirty="0"/>
           </a:p>
           <a:p>
-            <a:pPr marL="0" indent="0">
+            <a:pPr marL="171450" indent="-171450">
               <a:spcAft>
                 <a:spcPts val="200"/>
               </a:spcAft>
-              <a:buNone/>
+              <a:buFont typeface="Arial" panose="020B0604020202020204" pitchFamily="34" charset="0"/>
+              <a:buChar char="•"/>
             </a:pPr>
             <a:r>
               <a:rPr lang="en-US" sz="1100" dirty="0">
@@ -8450,16 +8624,16 @@
                 <a:ea typeface="Calibri" pitchFamily="34" charset="-122"/>
                 <a:cs typeface="Calibri" pitchFamily="34" charset="-120"/>
               </a:rPr>
-              <a:t>F1 → F2 changes three factors simultaneously (selectivity + contrastiveness + framing). Treated as a package-level test of "form", not as three isolated effects; F3 − F2 isolates the actionable cue.</a:t>
-            </a:r>
-            <a:endParaRPr lang="en-US" sz="1100" dirty="0"/>
-          </a:p>
-          <a:p>
-            <a:pPr marL="0" indent="0">
+              <a:t>Load is held at a single moderate level; generalisation across load levels cannot be done since the load level is held constant.</a:t>
+            </a:r>
+          </a:p>
+          <a:p>
+            <a:pPr marL="171450" indent="-171450">
               <a:spcAft>
                 <a:spcPts val="200"/>
               </a:spcAft>
-              <a:buNone/>
+              <a:buFont typeface="Arial" panose="020B0604020202020204" pitchFamily="34" charset="0"/>
+              <a:buChar char="•"/>
             </a:pPr>
             <a:r>
               <a:rPr lang="en-US" sz="1100" dirty="0">
@@ -8470,9 +8644,620 @@
                 <a:ea typeface="Calibri" pitchFamily="34" charset="-122"/>
                 <a:cs typeface="Calibri" pitchFamily="34" charset="-120"/>
               </a:rPr>
-              <a:t>Load is held at a single moderate level; generalisation across load levels cannot be done since the load level is held constant.</a:t>
-            </a:r>
+              <a:t>The number of automation aid misses is small (3) in the 5 min block. Reliable statistic on such small number is difficult.</a:t>
+            </a:r>
+          </a:p>
+          <a:p>
+            <a:pPr marL="171450" indent="-171450">
+              <a:spcAft>
+                <a:spcPts val="200"/>
+              </a:spcAft>
+              <a:buFont typeface="Arial" panose="020B0604020202020204" pitchFamily="34" charset="0"/>
+              <a:buChar char="•"/>
+            </a:pPr>
+            <a:r>
+              <a:rPr lang="en-US" sz="1100" dirty="0">
+                <a:solidFill>
+                  <a:srgbClr val="1A1A1A"/>
+                </a:solidFill>
+                <a:latin typeface="Calibri" pitchFamily="34" charset="0"/>
+                <a:ea typeface="Calibri" pitchFamily="34" charset="-122"/>
+                <a:cs typeface="Calibri" pitchFamily="34" charset="-120"/>
+              </a:rPr>
+              <a:t>The number of participants might be to low to see any effect </a:t>
+            </a:r>
+            <a:r>
+              <a:rPr lang="en-US" sz="1100">
+                <a:solidFill>
+                  <a:srgbClr val="1A1A1A"/>
+                </a:solidFill>
+                <a:latin typeface="Calibri" pitchFamily="34" charset="0"/>
+                <a:ea typeface="Calibri" pitchFamily="34" charset="-122"/>
+                <a:cs typeface="Calibri" pitchFamily="34" charset="-120"/>
+              </a:rPr>
+              <a:t>with significance.</a:t>
+            </a:r>
+            <a:endParaRPr lang="en-US" sz="1100" dirty="0">
+              <a:solidFill>
+                <a:srgbClr val="1A1A1A"/>
+              </a:solidFill>
+              <a:latin typeface="Calibri" pitchFamily="34" charset="0"/>
+              <a:ea typeface="Calibri" pitchFamily="34" charset="-122"/>
+              <a:cs typeface="Calibri" pitchFamily="34" charset="-120"/>
+            </a:endParaRPr>
+          </a:p>
+          <a:p>
+            <a:pPr marL="171450" indent="-171450">
+              <a:spcAft>
+                <a:spcPts val="200"/>
+              </a:spcAft>
+              <a:buFont typeface="Arial" panose="020B0604020202020204" pitchFamily="34" charset="0"/>
+              <a:buChar char="•"/>
+            </a:pPr>
+            <a:endParaRPr lang="en-US" sz="1100" dirty="0">
+              <a:solidFill>
+                <a:srgbClr val="1A1A1A"/>
+              </a:solidFill>
+              <a:latin typeface="Calibri" pitchFamily="34" charset="0"/>
+              <a:ea typeface="Calibri" pitchFamily="34" charset="-122"/>
+              <a:cs typeface="Calibri" pitchFamily="34" charset="-120"/>
+            </a:endParaRPr>
+          </a:p>
+          <a:p>
+            <a:pPr marL="171450" indent="-171450">
+              <a:spcAft>
+                <a:spcPts val="200"/>
+              </a:spcAft>
+              <a:buFont typeface="Arial" panose="020B0604020202020204" pitchFamily="34" charset="0"/>
+              <a:buChar char="•"/>
+            </a:pPr>
             <a:endParaRPr lang="en-US" sz="1100" dirty="0"/>
+          </a:p>
+        </p:txBody>
+      </p:sp>
+      <p:sp>
+        <p:nvSpPr>
+          <p:cNvPr id="45" name="Shape 25">
+            <a:extLst>
+              <a:ext uri="{FF2B5EF4-FFF2-40B4-BE49-F238E27FC236}">
+                <a16:creationId xmlns:a16="http://schemas.microsoft.com/office/drawing/2014/main" id="{99C447DA-64F6-9732-7CE3-36A58AD49D20}"/>
+              </a:ext>
+            </a:extLst>
+          </p:cNvPr>
+          <p:cNvSpPr/>
+          <p:nvPr/>
+        </p:nvSpPr>
+        <p:spPr>
+          <a:xfrm>
+            <a:off x="411480" y="4064032"/>
+            <a:ext cx="5592928" cy="881388"/>
+          </a:xfrm>
+          <a:prstGeom prst="rect">
+            <a:avLst/>
+          </a:prstGeom>
+          <a:solidFill>
+            <a:srgbClr val="FFFFFF"/>
+          </a:solidFill>
+          <a:ln w="9525">
+            <a:solidFill>
+              <a:srgbClr val="C9D2D9"/>
+            </a:solidFill>
+            <a:prstDash val="solid"/>
+          </a:ln>
+        </p:spPr>
+      </p:sp>
+      <p:sp>
+        <p:nvSpPr>
+          <p:cNvPr id="46" name="Shape 26">
+            <a:extLst>
+              <a:ext uri="{FF2B5EF4-FFF2-40B4-BE49-F238E27FC236}">
+                <a16:creationId xmlns:a16="http://schemas.microsoft.com/office/drawing/2014/main" id="{C54ADFFC-B13F-60CC-0062-7E355B108C72}"/>
+              </a:ext>
+            </a:extLst>
+          </p:cNvPr>
+          <p:cNvSpPr/>
+          <p:nvPr/>
+        </p:nvSpPr>
+        <p:spPr>
+          <a:xfrm>
+            <a:off x="411480" y="4064032"/>
+            <a:ext cx="73152" cy="890532"/>
+          </a:xfrm>
+          <a:prstGeom prst="rect">
+            <a:avLst/>
+          </a:prstGeom>
+          <a:solidFill>
+            <a:srgbClr val="143847"/>
+          </a:solidFill>
+          <a:ln w="12700">
+            <a:solidFill>
+              <a:srgbClr val="143847"/>
+            </a:solidFill>
+            <a:prstDash val="solid"/>
+          </a:ln>
+        </p:spPr>
+      </p:sp>
+      <p:sp>
+        <p:nvSpPr>
+          <p:cNvPr id="47" name="Text 27">
+            <a:extLst>
+              <a:ext uri="{FF2B5EF4-FFF2-40B4-BE49-F238E27FC236}">
+                <a16:creationId xmlns:a16="http://schemas.microsoft.com/office/drawing/2014/main" id="{F42547AA-4F5D-2BCB-6159-5BA3693CED59}"/>
+              </a:ext>
+            </a:extLst>
+          </p:cNvPr>
+          <p:cNvSpPr/>
+          <p:nvPr/>
+        </p:nvSpPr>
+        <p:spPr>
+          <a:xfrm>
+            <a:off x="576072" y="4137184"/>
+            <a:ext cx="4312768" cy="274320"/>
+          </a:xfrm>
+          <a:prstGeom prst="rect">
+            <a:avLst/>
+          </a:prstGeom>
+          <a:noFill/>
+          <a:ln/>
+        </p:spPr>
+        <p:txBody>
+          <a:bodyPr wrap="square" lIns="0" tIns="0" rIns="0" bIns="0" rtlCol="0" anchor="ctr"/>
+          <a:lstStyle/>
+          <a:p>
+            <a:pPr marL="0" indent="0">
+              <a:buNone/>
+            </a:pPr>
+            <a:r>
+              <a:rPr lang="en-US" sz="1200" b="1" dirty="0">
+                <a:solidFill>
+                  <a:srgbClr val="143847"/>
+                </a:solidFill>
+                <a:latin typeface="Calibri" pitchFamily="34" charset="0"/>
+                <a:ea typeface="Calibri" pitchFamily="34" charset="-122"/>
+                <a:cs typeface="Calibri" pitchFamily="34" charset="-120"/>
+              </a:rPr>
+              <a:t>Detection of automation aid overwrites</a:t>
+            </a:r>
+            <a:endParaRPr lang="en-US" sz="1200" dirty="0"/>
+          </a:p>
+        </p:txBody>
+      </p:sp>
+      <p:sp>
+        <p:nvSpPr>
+          <p:cNvPr id="48" name="Shape 28">
+            <a:extLst>
+              <a:ext uri="{FF2B5EF4-FFF2-40B4-BE49-F238E27FC236}">
+                <a16:creationId xmlns:a16="http://schemas.microsoft.com/office/drawing/2014/main" id="{9A15BC7B-8947-66EA-2DAA-5847DE24B6B8}"/>
+              </a:ext>
+            </a:extLst>
+          </p:cNvPr>
+          <p:cNvSpPr/>
+          <p:nvPr/>
+        </p:nvSpPr>
+        <p:spPr>
+          <a:xfrm>
+            <a:off x="4952848" y="4155472"/>
+            <a:ext cx="868680" cy="237744"/>
+          </a:xfrm>
+          <a:prstGeom prst="rect">
+            <a:avLst/>
+          </a:prstGeom>
+          <a:solidFill>
+            <a:srgbClr val="143847"/>
+          </a:solidFill>
+          <a:ln w="12700">
+            <a:solidFill>
+              <a:srgbClr val="143847"/>
+            </a:solidFill>
+            <a:prstDash val="solid"/>
+          </a:ln>
+        </p:spPr>
+      </p:sp>
+      <p:sp>
+        <p:nvSpPr>
+          <p:cNvPr id="49" name="Text 29">
+            <a:extLst>
+              <a:ext uri="{FF2B5EF4-FFF2-40B4-BE49-F238E27FC236}">
+                <a16:creationId xmlns:a16="http://schemas.microsoft.com/office/drawing/2014/main" id="{E624EB60-3DAB-B407-D16C-AE6F878AC49D}"/>
+              </a:ext>
+            </a:extLst>
+          </p:cNvPr>
+          <p:cNvSpPr/>
+          <p:nvPr/>
+        </p:nvSpPr>
+        <p:spPr>
+          <a:xfrm>
+            <a:off x="4952848" y="4164616"/>
+            <a:ext cx="868680" cy="219456"/>
+          </a:xfrm>
+          <a:prstGeom prst="rect">
+            <a:avLst/>
+          </a:prstGeom>
+          <a:noFill/>
+          <a:ln/>
+        </p:spPr>
+        <p:txBody>
+          <a:bodyPr wrap="square" lIns="0" tIns="0" rIns="0" bIns="0" rtlCol="0" anchor="ctr"/>
+          <a:lstStyle/>
+          <a:p>
+            <a:pPr marL="0" indent="0" algn="ctr">
+              <a:buNone/>
+            </a:pPr>
+            <a:r>
+              <a:rPr lang="en-US" sz="1000" b="1" dirty="0">
+                <a:solidFill>
+                  <a:srgbClr val="FFFFFF"/>
+                </a:solidFill>
+                <a:latin typeface="Calibri" pitchFamily="34" charset="0"/>
+                <a:ea typeface="Calibri" pitchFamily="34" charset="-122"/>
+                <a:cs typeface="Calibri" pitchFamily="34" charset="-120"/>
+              </a:rPr>
+              <a:t>H3</a:t>
+            </a:r>
+            <a:endParaRPr lang="en-US" sz="1000" dirty="0"/>
+          </a:p>
+        </p:txBody>
+      </p:sp>
+      <p:sp>
+        <p:nvSpPr>
+          <p:cNvPr id="50" name="Text 30">
+            <a:extLst>
+              <a:ext uri="{FF2B5EF4-FFF2-40B4-BE49-F238E27FC236}">
+                <a16:creationId xmlns:a16="http://schemas.microsoft.com/office/drawing/2014/main" id="{AB7D5820-663E-5810-A09A-8A9FC168AC4E}"/>
+              </a:ext>
+            </a:extLst>
+          </p:cNvPr>
+          <p:cNvSpPr/>
+          <p:nvPr/>
+        </p:nvSpPr>
+        <p:spPr>
+          <a:xfrm>
+            <a:off x="576072" y="4393216"/>
+            <a:ext cx="5318608" cy="201168"/>
+          </a:xfrm>
+          <a:prstGeom prst="rect">
+            <a:avLst/>
+          </a:prstGeom>
+          <a:noFill/>
+          <a:ln/>
+        </p:spPr>
+        <p:txBody>
+          <a:bodyPr wrap="square" lIns="0" tIns="0" rIns="0" bIns="0" rtlCol="0" anchor="ctr"/>
+          <a:lstStyle/>
+          <a:p>
+            <a:pPr marL="0" indent="0">
+              <a:buNone/>
+            </a:pPr>
+            <a:r>
+              <a:rPr lang="en-US" sz="900" i="1" dirty="0">
+                <a:solidFill>
+                  <a:srgbClr val="5A6770"/>
+                </a:solidFill>
+                <a:latin typeface="Calibri" pitchFamily="34" charset="0"/>
+                <a:ea typeface="Calibri" pitchFamily="34" charset="-122"/>
+                <a:cs typeface="Calibri" pitchFamily="34" charset="-120"/>
+              </a:rPr>
+              <a:t>Platform log</a:t>
+            </a:r>
+            <a:endParaRPr lang="en-US" sz="900" dirty="0"/>
+          </a:p>
+        </p:txBody>
+      </p:sp>
+      <p:sp>
+        <p:nvSpPr>
+          <p:cNvPr id="51" name="Text 31">
+            <a:extLst>
+              <a:ext uri="{FF2B5EF4-FFF2-40B4-BE49-F238E27FC236}">
+                <a16:creationId xmlns:a16="http://schemas.microsoft.com/office/drawing/2014/main" id="{08E071E0-5CF2-2F82-6247-9E3742CEACB1}"/>
+              </a:ext>
+            </a:extLst>
+          </p:cNvPr>
+          <p:cNvSpPr/>
+          <p:nvPr/>
+        </p:nvSpPr>
+        <p:spPr>
+          <a:xfrm>
+            <a:off x="576072" y="4594384"/>
+            <a:ext cx="5318608" cy="360180"/>
+          </a:xfrm>
+          <a:prstGeom prst="rect">
+            <a:avLst/>
+          </a:prstGeom>
+          <a:noFill/>
+          <a:ln/>
+        </p:spPr>
+        <p:txBody>
+          <a:bodyPr wrap="square" lIns="0" tIns="0" rIns="0" bIns="0" rtlCol="0" anchor="t"/>
+          <a:lstStyle/>
+          <a:p>
+            <a:pPr marL="0" indent="0">
+              <a:buNone/>
+            </a:pPr>
+            <a:r>
+              <a:rPr lang="en-US" sz="1050" dirty="0">
+                <a:solidFill>
+                  <a:srgbClr val="1A1A1A"/>
+                </a:solidFill>
+                <a:latin typeface="Calibri" pitchFamily="34" charset="0"/>
+                <a:ea typeface="Calibri" pitchFamily="34" charset="-122"/>
+                <a:cs typeface="Calibri" pitchFamily="34" charset="-120"/>
+              </a:rPr>
+              <a:t>Whenever the aid handles an event, the participant should not intervene. We this record interventions.</a:t>
+            </a:r>
+            <a:endParaRPr lang="en-US" sz="1050" dirty="0"/>
+          </a:p>
+        </p:txBody>
+      </p:sp>
+      <p:sp>
+        <p:nvSpPr>
+          <p:cNvPr id="52" name="Shape 32">
+            <a:extLst>
+              <a:ext uri="{FF2B5EF4-FFF2-40B4-BE49-F238E27FC236}">
+                <a16:creationId xmlns:a16="http://schemas.microsoft.com/office/drawing/2014/main" id="{25BB157E-64B4-E872-D51E-CCAD61F59AA9}"/>
+              </a:ext>
+            </a:extLst>
+          </p:cNvPr>
+          <p:cNvSpPr/>
+          <p:nvPr/>
+        </p:nvSpPr>
+        <p:spPr>
+          <a:xfrm>
+            <a:off x="6187290" y="4075046"/>
+            <a:ext cx="5592928" cy="881388"/>
+          </a:xfrm>
+          <a:prstGeom prst="rect">
+            <a:avLst/>
+          </a:prstGeom>
+          <a:solidFill>
+            <a:srgbClr val="FFFFFF"/>
+          </a:solidFill>
+          <a:ln w="9525">
+            <a:solidFill>
+              <a:srgbClr val="C9D2D9"/>
+            </a:solidFill>
+            <a:prstDash val="solid"/>
+          </a:ln>
+        </p:spPr>
+      </p:sp>
+      <p:sp>
+        <p:nvSpPr>
+          <p:cNvPr id="53" name="Shape 33">
+            <a:extLst>
+              <a:ext uri="{FF2B5EF4-FFF2-40B4-BE49-F238E27FC236}">
+                <a16:creationId xmlns:a16="http://schemas.microsoft.com/office/drawing/2014/main" id="{EC34306C-7E89-05B2-B5AF-FBA55BF3B6C7}"/>
+              </a:ext>
+            </a:extLst>
+          </p:cNvPr>
+          <p:cNvSpPr/>
+          <p:nvPr/>
+        </p:nvSpPr>
+        <p:spPr>
+          <a:xfrm>
+            <a:off x="6187290" y="4075046"/>
+            <a:ext cx="73152" cy="881388"/>
+          </a:xfrm>
+          <a:prstGeom prst="rect">
+            <a:avLst/>
+          </a:prstGeom>
+          <a:solidFill>
+            <a:srgbClr val="143847"/>
+          </a:solidFill>
+          <a:ln w="12700">
+            <a:solidFill>
+              <a:srgbClr val="143847"/>
+            </a:solidFill>
+            <a:prstDash val="solid"/>
+          </a:ln>
+        </p:spPr>
+      </p:sp>
+      <p:sp>
+        <p:nvSpPr>
+          <p:cNvPr id="54" name="Text 34">
+            <a:extLst>
+              <a:ext uri="{FF2B5EF4-FFF2-40B4-BE49-F238E27FC236}">
+                <a16:creationId xmlns:a16="http://schemas.microsoft.com/office/drawing/2014/main" id="{C9C70177-BE3B-3824-C39D-D2A42BE0FFC1}"/>
+              </a:ext>
+            </a:extLst>
+          </p:cNvPr>
+          <p:cNvSpPr/>
+          <p:nvPr/>
+        </p:nvSpPr>
+        <p:spPr>
+          <a:xfrm>
+            <a:off x="6351882" y="4148198"/>
+            <a:ext cx="4312768" cy="274320"/>
+          </a:xfrm>
+          <a:prstGeom prst="rect">
+            <a:avLst/>
+          </a:prstGeom>
+          <a:noFill/>
+          <a:ln/>
+        </p:spPr>
+        <p:txBody>
+          <a:bodyPr wrap="square" lIns="0" tIns="0" rIns="0" bIns="0" rtlCol="0" anchor="ctr"/>
+          <a:lstStyle/>
+          <a:p>
+            <a:pPr marL="0" indent="0">
+              <a:buNone/>
+            </a:pPr>
+            <a:r>
+              <a:rPr lang="en-US" sz="1200" b="1" dirty="0">
+                <a:solidFill>
+                  <a:srgbClr val="143847"/>
+                </a:solidFill>
+                <a:latin typeface="Calibri" pitchFamily="34" charset="0"/>
+                <a:ea typeface="Calibri" pitchFamily="34" charset="-122"/>
+                <a:cs typeface="Calibri" pitchFamily="34" charset="-120"/>
+              </a:rPr>
+              <a:t>Non-automated task performance</a:t>
+            </a:r>
+            <a:endParaRPr lang="en-US" sz="1200" dirty="0"/>
+          </a:p>
+        </p:txBody>
+      </p:sp>
+      <p:sp>
+        <p:nvSpPr>
+          <p:cNvPr id="55" name="Shape 35">
+            <a:extLst>
+              <a:ext uri="{FF2B5EF4-FFF2-40B4-BE49-F238E27FC236}">
+                <a16:creationId xmlns:a16="http://schemas.microsoft.com/office/drawing/2014/main" id="{DC92547C-188D-694A-F08E-519F2DB088C1}"/>
+              </a:ext>
+            </a:extLst>
+          </p:cNvPr>
+          <p:cNvSpPr/>
+          <p:nvPr/>
+        </p:nvSpPr>
+        <p:spPr>
+          <a:xfrm>
+            <a:off x="10728657" y="4166486"/>
+            <a:ext cx="868680" cy="237744"/>
+          </a:xfrm>
+          <a:prstGeom prst="rect">
+            <a:avLst/>
+          </a:prstGeom>
+          <a:solidFill>
+            <a:srgbClr val="143847"/>
+          </a:solidFill>
+          <a:ln w="12700">
+            <a:solidFill>
+              <a:srgbClr val="143847"/>
+            </a:solidFill>
+            <a:prstDash val="solid"/>
+          </a:ln>
+        </p:spPr>
+      </p:sp>
+      <p:sp>
+        <p:nvSpPr>
+          <p:cNvPr id="56" name="Text 36">
+            <a:extLst>
+              <a:ext uri="{FF2B5EF4-FFF2-40B4-BE49-F238E27FC236}">
+                <a16:creationId xmlns:a16="http://schemas.microsoft.com/office/drawing/2014/main" id="{8D4107B0-F636-A904-F217-82A6C260D2C2}"/>
+              </a:ext>
+            </a:extLst>
+          </p:cNvPr>
+          <p:cNvSpPr/>
+          <p:nvPr/>
+        </p:nvSpPr>
+        <p:spPr>
+          <a:xfrm>
+            <a:off x="10728657" y="4175630"/>
+            <a:ext cx="868680" cy="219456"/>
+          </a:xfrm>
+          <a:prstGeom prst="rect">
+            <a:avLst/>
+          </a:prstGeom>
+          <a:noFill/>
+          <a:ln/>
+        </p:spPr>
+        <p:txBody>
+          <a:bodyPr wrap="square" lIns="0" tIns="0" rIns="0" bIns="0" rtlCol="0" anchor="ctr"/>
+          <a:lstStyle/>
+          <a:p>
+            <a:pPr marL="0" indent="0" algn="ctr">
+              <a:buNone/>
+            </a:pPr>
+            <a:r>
+              <a:rPr lang="en-US" sz="1000" b="1" dirty="0">
+                <a:solidFill>
+                  <a:srgbClr val="FFFFFF"/>
+                </a:solidFill>
+                <a:latin typeface="Calibri" pitchFamily="34" charset="0"/>
+                <a:ea typeface="Calibri" pitchFamily="34" charset="-122"/>
+                <a:cs typeface="Calibri" pitchFamily="34" charset="-120"/>
+              </a:rPr>
+              <a:t>H4</a:t>
+            </a:r>
+            <a:endParaRPr lang="en-US" sz="1000" dirty="0"/>
+          </a:p>
+        </p:txBody>
+      </p:sp>
+      <p:sp>
+        <p:nvSpPr>
+          <p:cNvPr id="57" name="Text 37">
+            <a:extLst>
+              <a:ext uri="{FF2B5EF4-FFF2-40B4-BE49-F238E27FC236}">
+                <a16:creationId xmlns:a16="http://schemas.microsoft.com/office/drawing/2014/main" id="{6CE56A8E-1E24-F803-F044-1F1B0D3E1E20}"/>
+              </a:ext>
+            </a:extLst>
+          </p:cNvPr>
+          <p:cNvSpPr/>
+          <p:nvPr/>
+        </p:nvSpPr>
+        <p:spPr>
+          <a:xfrm>
+            <a:off x="6351882" y="4404230"/>
+            <a:ext cx="5318608" cy="201168"/>
+          </a:xfrm>
+          <a:prstGeom prst="rect">
+            <a:avLst/>
+          </a:prstGeom>
+          <a:noFill/>
+          <a:ln/>
+        </p:spPr>
+        <p:txBody>
+          <a:bodyPr wrap="square" lIns="0" tIns="0" rIns="0" bIns="0" rtlCol="0" anchor="ctr"/>
+          <a:lstStyle/>
+          <a:p>
+            <a:pPr marL="0" indent="0">
+              <a:buNone/>
+            </a:pPr>
+            <a:r>
+              <a:rPr lang="en-US" sz="900" i="1" dirty="0">
+                <a:solidFill>
+                  <a:srgbClr val="5A6770"/>
+                </a:solidFill>
+                <a:latin typeface="Calibri" pitchFamily="34" charset="0"/>
+                <a:ea typeface="Calibri" pitchFamily="34" charset="-122"/>
+                <a:cs typeface="Calibri" pitchFamily="34" charset="-120"/>
+              </a:rPr>
+              <a:t>Platform log</a:t>
+            </a:r>
+            <a:endParaRPr lang="en-US" sz="900" dirty="0"/>
+          </a:p>
+        </p:txBody>
+      </p:sp>
+      <p:sp>
+        <p:nvSpPr>
+          <p:cNvPr id="58" name="Text 38">
+            <a:extLst>
+              <a:ext uri="{FF2B5EF4-FFF2-40B4-BE49-F238E27FC236}">
+                <a16:creationId xmlns:a16="http://schemas.microsoft.com/office/drawing/2014/main" id="{C40C0D24-1132-3F73-F043-483109F3493C}"/>
+              </a:ext>
+            </a:extLst>
+          </p:cNvPr>
+          <p:cNvSpPr/>
+          <p:nvPr/>
+        </p:nvSpPr>
+        <p:spPr>
+          <a:xfrm>
+            <a:off x="6351882" y="4605398"/>
+            <a:ext cx="5318608" cy="360180"/>
+          </a:xfrm>
+          <a:prstGeom prst="rect">
+            <a:avLst/>
+          </a:prstGeom>
+          <a:noFill/>
+          <a:ln/>
+        </p:spPr>
+        <p:txBody>
+          <a:bodyPr wrap="square" lIns="0" tIns="0" rIns="0" bIns="0" rtlCol="0" anchor="t"/>
+          <a:lstStyle/>
+          <a:p>
+            <a:pPr marL="0" indent="0">
+              <a:buNone/>
+            </a:pPr>
+            <a:r>
+              <a:rPr lang="en-US" sz="1050" dirty="0">
+                <a:solidFill>
+                  <a:srgbClr val="1A1A1A"/>
+                </a:solidFill>
+                <a:latin typeface="Calibri" pitchFamily="34" charset="0"/>
+                <a:ea typeface="Calibri" pitchFamily="34" charset="-122"/>
+                <a:cs typeface="Calibri" pitchFamily="34" charset="-120"/>
+              </a:rPr>
+              <a:t>Communications and resource management are note aided — so they reveal whether reading less in the panel actually frees attention elsewhere. We are measuring performance in these tasks.</a:t>
+            </a:r>
+            <a:endParaRPr lang="en-US" sz="1050" dirty="0"/>
           </a:p>
         </p:txBody>
       </p:sp>

--- a/Documents/Study.pptx
+++ b/Documents/Study.pptx
@@ -5,7 +5,7 @@
     <p:sldMasterId id="2147483648" r:id="rId1"/>
   </p:sldMasterIdLst>
   <p:notesMasterIdLst>
-    <p:notesMasterId r:id="rId8"/>
+    <p:notesMasterId r:id="rId9"/>
   </p:notesMasterIdLst>
   <p:sldIdLst>
     <p:sldId id="256" r:id="rId2"/>
@@ -14,6 +14,7 @@
     <p:sldId id="259" r:id="rId5"/>
     <p:sldId id="260" r:id="rId6"/>
     <p:sldId id="261" r:id="rId7"/>
+    <p:sldId id="262" r:id="rId8"/>
   </p:sldIdLst>
   <p:sldSz cx="12192000" cy="6858000"/>
   <p:notesSz cx="6858000" cy="12192000"/>
@@ -737,6 +738,90 @@
     <p:extLst>
       <p:ext uri="{BB962C8B-B14F-4D97-AF65-F5344CB8AC3E}">
         <p14:creationId xmlns:p14="http://schemas.microsoft.com/office/powerpoint/2010/main" val="1024086991"/>
+      </p:ext>
+    </p:extLst>
+  </p:cSld>
+  <p:clrMapOvr>
+    <a:masterClrMapping/>
+  </p:clrMapOvr>
+</p:notes>
+</file>
+
+<file path=ppt/notesSlides/notesSlide7.xml><?xml version="1.0" encoding="utf-8"?>
+<p:notes xmlns:a="http://schemas.openxmlformats.org/drawingml/2006/main" xmlns:r="http://schemas.openxmlformats.org/officeDocument/2006/relationships" xmlns:p="http://schemas.openxmlformats.org/presentationml/2006/main">
+  <p:cSld>
+    <p:spTree>
+      <p:nvGrpSpPr>
+        <p:cNvPr id="1" name=""/>
+        <p:cNvGrpSpPr/>
+        <p:nvPr/>
+      </p:nvGrpSpPr>
+      <p:grpSpPr>
+        <a:xfrm>
+          <a:off x="0" y="0"/>
+          <a:ext cx="0" cy="0"/>
+          <a:chOff x="0" y="0"/>
+          <a:chExt cx="0" cy="0"/>
+        </a:xfrm>
+      </p:grpSpPr>
+      <p:sp>
+        <p:nvSpPr>
+          <p:cNvPr id="2" name="Slide Image Placeholder 1"/>
+          <p:cNvSpPr>
+            <a:spLocks noGrp="1" noRot="1" noChangeAspect="1"/>
+          </p:cNvSpPr>
+          <p:nvPr>
+            <p:ph type="sldImg"/>
+          </p:nvPr>
+        </p:nvSpPr>
+        <p:spPr/>
+      </p:sp>
+      <p:sp>
+        <p:nvSpPr>
+          <p:cNvPr id="3" name="Notes Placeholder 2"/>
+          <p:cNvSpPr>
+            <a:spLocks noGrp="1"/>
+          </p:cNvSpPr>
+          <p:nvPr>
+            <p:ph type="body" idx="1"/>
+          </p:nvPr>
+        </p:nvSpPr>
+        <p:spPr/>
+        <p:txBody>
+          <a:bodyPr/>
+          <a:lstStyle/>
+          <a:p>
+            <a:endParaRPr lang="en-US" dirty="0"/>
+          </a:p>
+        </p:txBody>
+      </p:sp>
+      <p:sp>
+        <p:nvSpPr>
+          <p:cNvPr id="4" name="Slide Number Placeholder 3"/>
+          <p:cNvSpPr>
+            <a:spLocks noGrp="1"/>
+          </p:cNvSpPr>
+          <p:nvPr>
+            <p:ph type="sldNum" sz="quarter" idx="10"/>
+          </p:nvPr>
+        </p:nvSpPr>
+        <p:spPr/>
+        <p:txBody>
+          <a:bodyPr/>
+          <a:lstStyle/>
+          <a:p>
+            <a:fld id="{F7021451-1387-4CA6-816F-3879F97B5CBC}" type="slidenum">
+              <a:rPr lang="en-US"/>
+              <a:t>7</a:t>
+            </a:fld>
+            <a:endParaRPr lang="en-US"/>
+          </a:p>
+        </p:txBody>
+      </p:sp>
+    </p:spTree>
+    <p:extLst>
+      <p:ext uri="{BB962C8B-B14F-4D97-AF65-F5344CB8AC3E}">
+        <p14:creationId xmlns:p14="http://schemas.microsoft.com/office/powerpoint/2010/main" val="770154956"/>
       </p:ext>
     </p:extLst>
   </p:cSld>
@@ -2482,7 +2567,7 @@
                   <a:srgbClr val="3B3B3B"/>
                 </a:solidFill>
               </a:rPr>
-              <a:t> The XAI literature shows that explanations can raise agreement and the feeling of being informed without improving the user's ability to catch AI mistakes (Bansal 2021), and that subjective understanding often rises without objective understanding (Wang &amp; Yin 2021) — but these results come from single-task settings. </a:t>
+              <a:t>The XAI literature shows that explanations can raise agreement and the feeling of being informed without improving the user's ability to catch AI mistakes (Bansal 2021), and that subjective understanding often rises without objective understanding (Wang &amp; Yin 2021) — but these results come from single-task settings. </a:t>
             </a:r>
             <a:r>
               <a:rPr lang="en-US" sz="1300" b="0" i="0" dirty="0">
@@ -5142,7 +5227,7 @@
                 <a:ea typeface="Calibri" pitchFamily="34" charset="-122"/>
                 <a:cs typeface="Calibri" pitchFamily="34" charset="-120"/>
               </a:rPr>
-              <a:t>Subjective transparency  and subjective trust </a:t>
+              <a:t>Subjective transparency and subjective trust </a:t>
             </a:r>
             <a:r>
               <a:rPr lang="en-US" sz="1200" b="1" dirty="0" err="1">
@@ -5153,7 +5238,7 @@
                 <a:ea typeface="Calibri" pitchFamily="34" charset="-122"/>
                 <a:cs typeface="Calibri" pitchFamily="34" charset="-120"/>
               </a:rPr>
-              <a:t>favours</a:t>
+              <a:t>favour</a:t>
             </a:r>
             <a:r>
               <a:rPr lang="en-US" sz="1200" b="1" dirty="0">
@@ -5450,6 +5535,17 @@
                 <a:cs typeface="Calibri" pitchFamily="34" charset="-120"/>
               </a:rPr>
               <a:t>Selectivity directs attention to anomalies and improves </a:t>
+            </a:r>
+            <a:r>
+              <a:rPr lang="en-US" sz="1200" b="1">
+                <a:solidFill>
+                  <a:srgbClr val="1A1A1A"/>
+                </a:solidFill>
+                <a:latin typeface="Calibri" pitchFamily="34" charset="0"/>
+                <a:ea typeface="Calibri" pitchFamily="34" charset="-122"/>
+                <a:cs typeface="Calibri" pitchFamily="34" charset="-120"/>
+              </a:rPr>
+              <a:t>subjective trust</a:t>
             </a:r>
             <a:endParaRPr lang="en-US" sz="1300" dirty="0"/>
           </a:p>
@@ -6209,7 +6305,28 @@
                 <a:ea typeface="Calibri" pitchFamily="34" charset="-122"/>
                 <a:cs typeface="Calibri" pitchFamily="34" charset="-120"/>
               </a:rPr>
-              <a:t>Runs only on system monitoring at ~78% reliability; the other two tasks compete for attention and are not aided. Every automation miss is communicated, so that the operator can handle the event manually if the information is perceived and processed.</a:t>
+              <a:t>Runs </a:t>
+            </a:r>
+            <a:r>
+              <a:rPr lang="en-US" sz="1400" b="1" dirty="0">
+                <a:solidFill>
+                  <a:srgbClr val="143847"/>
+                </a:solidFill>
+                <a:latin typeface="Calibri" pitchFamily="34" charset="0"/>
+                <a:ea typeface="Calibri" pitchFamily="34" charset="-122"/>
+                <a:cs typeface="Calibri" pitchFamily="34" charset="-120"/>
+              </a:rPr>
+              <a:t>only</a:t>
+            </a:r>
+            <a:r>
+              <a:rPr lang="en-US" sz="1400" dirty="0">
+                <a:solidFill>
+                  <a:srgbClr val="1A1A1A"/>
+                </a:solidFill>
+                <a:ea typeface="Calibri" pitchFamily="34" charset="-122"/>
+                <a:cs typeface="Calibri" pitchFamily="34" charset="-120"/>
+              </a:rPr>
+              <a:t> on system monitoring at ~78% reliability; the other two tasks compete for attention and are not aided. Every automation miss is communicated, so that the operator can handle the event manually if the information is perceived and processed.</a:t>
             </a:r>
             <a:endParaRPr lang="en-US" sz="1400" dirty="0"/>
           </a:p>
@@ -7248,7 +7365,7 @@
                 <a:ea typeface="Calibri" pitchFamily="34" charset="-122"/>
                 <a:cs typeface="Calibri" pitchFamily="34" charset="-120"/>
               </a:rPr>
-              <a:t>14 May 2026</a:t>
+              <a:t>May 2026</a:t>
             </a:r>
             <a:endParaRPr lang="en-US" sz="1000" dirty="0"/>
           </a:p>
@@ -7450,7 +7567,7 @@
                 <a:ea typeface="Calibri" pitchFamily="34" charset="-122"/>
                 <a:cs typeface="Calibri" pitchFamily="34" charset="-120"/>
               </a:rPr>
-              <a:t>Each measure maps onto a specific hypothesis; design constraints define the limits of inference.</a:t>
+              <a:t>Each measure maps onto a specific hypothesis.</a:t>
             </a:r>
             <a:endParaRPr lang="en-US" sz="1300" dirty="0"/>
           </a:p>
@@ -8664,27 +8781,8 @@
                 <a:ea typeface="Calibri" pitchFamily="34" charset="-122"/>
                 <a:cs typeface="Calibri" pitchFamily="34" charset="-120"/>
               </a:rPr>
-              <a:t>The number of participants might be to low to see any effect </a:t>
-            </a:r>
-            <a:r>
-              <a:rPr lang="en-US" sz="1100">
-                <a:solidFill>
-                  <a:srgbClr val="1A1A1A"/>
-                </a:solidFill>
-                <a:latin typeface="Calibri" pitchFamily="34" charset="0"/>
-                <a:ea typeface="Calibri" pitchFamily="34" charset="-122"/>
-                <a:cs typeface="Calibri" pitchFamily="34" charset="-120"/>
-              </a:rPr>
-              <a:t>with significance.</a:t>
-            </a:r>
-            <a:endParaRPr lang="en-US" sz="1100" dirty="0">
-              <a:solidFill>
-                <a:srgbClr val="1A1A1A"/>
-              </a:solidFill>
-              <a:latin typeface="Calibri" pitchFamily="34" charset="0"/>
-              <a:ea typeface="Calibri" pitchFamily="34" charset="-122"/>
-              <a:cs typeface="Calibri" pitchFamily="34" charset="-120"/>
-            </a:endParaRPr>
+              <a:t>The number of participants might be to low to see any effect with significance (Number of participants in the literature is at least 50-100).</a:t>
+            </a:r>
           </a:p>
           <a:p>
             <a:pPr marL="171450" indent="-171450">
@@ -8982,7 +9080,7 @@
                 <a:ea typeface="Calibri" pitchFamily="34" charset="-122"/>
                 <a:cs typeface="Calibri" pitchFamily="34" charset="-120"/>
               </a:rPr>
-              <a:t>Whenever the aid handles an event, the participant should not intervene. We this record interventions.</a:t>
+              <a:t>Whenever the aid handles an event, the participant should not intervene. We this record interventions the user persons although the automation aid catches the event.</a:t>
             </a:r>
             <a:endParaRPr lang="en-US" sz="1050" dirty="0"/>
           </a:p>
@@ -9255,13 +9353,829 @@
                 <a:ea typeface="Calibri" pitchFamily="34" charset="-122"/>
                 <a:cs typeface="Calibri" pitchFamily="34" charset="-120"/>
               </a:rPr>
-              <a:t>Communications and resource management are note aided — so they reveal whether reading less in the panel actually frees attention elsewhere. We are measuring performance in these tasks.</a:t>
+              <a:t>Communications and resource management are not aided — so they reveal whether reading less in the panel actually frees attention elsewhere. We are measuring performance in these tasks.</a:t>
             </a:r>
             <a:endParaRPr lang="en-US" sz="1050" dirty="0"/>
           </a:p>
         </p:txBody>
       </p:sp>
     </p:spTree>
+  </p:cSld>
+  <p:clrMapOvr>
+    <a:masterClrMapping/>
+  </p:clrMapOvr>
+</p:sld>
+</file>
+
+<file path=ppt/slides/slide7.xml><?xml version="1.0" encoding="utf-8"?>
+<p:sld xmlns:a="http://schemas.openxmlformats.org/drawingml/2006/main" xmlns:r="http://schemas.openxmlformats.org/officeDocument/2006/relationships" xmlns:p="http://schemas.openxmlformats.org/presentationml/2006/main">
+  <p:cSld>
+    <p:spTree>
+      <p:nvGrpSpPr>
+        <p:cNvPr id="1" name=""/>
+        <p:cNvGrpSpPr/>
+        <p:nvPr/>
+      </p:nvGrpSpPr>
+      <p:grpSpPr>
+        <a:xfrm>
+          <a:off x="0" y="0"/>
+          <a:ext cx="0" cy="0"/>
+          <a:chOff x="0" y="0"/>
+          <a:chExt cx="0" cy="0"/>
+        </a:xfrm>
+      </p:grpSpPr>
+      <p:sp>
+        <p:nvSpPr>
+          <p:cNvPr id="2" name="Shape 0"/>
+          <p:cNvSpPr/>
+          <p:nvPr/>
+        </p:nvSpPr>
+        <p:spPr>
+          <a:xfrm>
+            <a:off x="0" y="0"/>
+            <a:ext cx="12191695" cy="548640"/>
+          </a:xfrm>
+          <a:prstGeom prst="rect">
+            <a:avLst/>
+          </a:prstGeom>
+          <a:solidFill>
+            <a:srgbClr val="D5D7DA"/>
+          </a:solidFill>
+          <a:ln w="12700">
+            <a:solidFill>
+              <a:srgbClr val="D5D7DA"/>
+            </a:solidFill>
+            <a:prstDash val="solid"/>
+          </a:ln>
+        </p:spPr>
+      </p:sp>
+      <p:sp>
+        <p:nvSpPr>
+          <p:cNvPr id="3" name="Text 1"/>
+          <p:cNvSpPr/>
+          <p:nvPr/>
+        </p:nvSpPr>
+        <p:spPr>
+          <a:xfrm>
+            <a:off x="411480" y="73152"/>
+            <a:ext cx="6858000" cy="201168"/>
+          </a:xfrm>
+          <a:prstGeom prst="rect">
+            <a:avLst/>
+          </a:prstGeom>
+          <a:noFill/>
+          <a:ln/>
+        </p:spPr>
+        <p:txBody>
+          <a:bodyPr wrap="square" lIns="0" tIns="0" rIns="0" bIns="0" rtlCol="0" anchor="ctr"/>
+          <a:lstStyle/>
+          <a:p>
+            <a:pPr marL="0" indent="0">
+              <a:buNone/>
+            </a:pPr>
+            <a:r>
+              <a:rPr lang="en-US" sz="1000" b="1" dirty="0">
+                <a:solidFill>
+                  <a:srgbClr val="143847"/>
+                </a:solidFill>
+                <a:latin typeface="Calibri" pitchFamily="34" charset="0"/>
+                <a:ea typeface="Calibri" pitchFamily="34" charset="-122"/>
+                <a:cs typeface="Calibri" pitchFamily="34" charset="-120"/>
+              </a:rPr>
+              <a:t>UNIVERSITÄT ZU LÜBECK</a:t>
+            </a:r>
+            <a:endParaRPr lang="en-US" sz="1000" dirty="0"/>
+          </a:p>
+        </p:txBody>
+      </p:sp>
+      <p:sp>
+        <p:nvSpPr>
+          <p:cNvPr id="4" name="Text 2"/>
+          <p:cNvSpPr/>
+          <p:nvPr/>
+        </p:nvSpPr>
+        <p:spPr>
+          <a:xfrm>
+            <a:off x="411480" y="274320"/>
+            <a:ext cx="6858000" cy="201168"/>
+          </a:xfrm>
+          <a:prstGeom prst="rect">
+            <a:avLst/>
+          </a:prstGeom>
+          <a:noFill/>
+          <a:ln/>
+        </p:spPr>
+        <p:txBody>
+          <a:bodyPr wrap="square" lIns="0" tIns="0" rIns="0" bIns="0" rtlCol="0" anchor="ctr"/>
+          <a:lstStyle/>
+          <a:p>
+            <a:pPr marL="0" indent="0">
+              <a:buNone/>
+            </a:pPr>
+            <a:r>
+              <a:rPr lang="en-US" sz="1000" dirty="0">
+                <a:solidFill>
+                  <a:srgbClr val="1A1A1A"/>
+                </a:solidFill>
+                <a:latin typeface="Calibri" pitchFamily="34" charset="0"/>
+                <a:ea typeface="Calibri" pitchFamily="34" charset="-122"/>
+                <a:cs typeface="Calibri" pitchFamily="34" charset="-120"/>
+              </a:rPr>
+              <a:t>Human-Centered Trustworthy AI (CS5076-KP12)</a:t>
+            </a:r>
+            <a:endParaRPr lang="en-US" sz="1000" dirty="0"/>
+          </a:p>
+        </p:txBody>
+      </p:sp>
+      <p:sp>
+        <p:nvSpPr>
+          <p:cNvPr id="5" name="Text 3"/>
+          <p:cNvSpPr/>
+          <p:nvPr/>
+        </p:nvSpPr>
+        <p:spPr>
+          <a:xfrm>
+            <a:off x="4572000" y="73152"/>
+            <a:ext cx="7223760" cy="201168"/>
+          </a:xfrm>
+          <a:prstGeom prst="rect">
+            <a:avLst/>
+          </a:prstGeom>
+          <a:noFill/>
+          <a:ln/>
+        </p:spPr>
+        <p:txBody>
+          <a:bodyPr wrap="square" lIns="0" tIns="0" rIns="0" bIns="0" rtlCol="0" anchor="ctr"/>
+          <a:lstStyle/>
+          <a:p>
+            <a:pPr marL="0" indent="0" algn="r">
+              <a:buNone/>
+            </a:pPr>
+            <a:r>
+              <a:rPr lang="en-US" sz="1000" dirty="0">
+                <a:solidFill>
+                  <a:srgbClr val="143847"/>
+                </a:solidFill>
+                <a:latin typeface="Calibri" pitchFamily="34" charset="0"/>
+                <a:ea typeface="Calibri" pitchFamily="34" charset="-122"/>
+                <a:cs typeface="Calibri" pitchFamily="34" charset="-120"/>
+              </a:rPr>
+              <a:t>Group Z  ·  Lilian Obidike · Sheethal Mohan Prabhu · Andrea Thelen</a:t>
+            </a:r>
+            <a:endParaRPr lang="en-US" sz="1000" dirty="0"/>
+          </a:p>
+        </p:txBody>
+      </p:sp>
+      <p:sp>
+        <p:nvSpPr>
+          <p:cNvPr id="6" name="Text 4"/>
+          <p:cNvSpPr/>
+          <p:nvPr/>
+        </p:nvSpPr>
+        <p:spPr>
+          <a:xfrm>
+            <a:off x="4572000" y="274320"/>
+            <a:ext cx="7223760" cy="201168"/>
+          </a:xfrm>
+          <a:prstGeom prst="rect">
+            <a:avLst/>
+          </a:prstGeom>
+          <a:noFill/>
+          <a:ln/>
+        </p:spPr>
+        <p:txBody>
+          <a:bodyPr wrap="square" lIns="0" tIns="0" rIns="0" bIns="0" rtlCol="0" anchor="ctr"/>
+          <a:lstStyle/>
+          <a:p>
+            <a:pPr marL="0" indent="0" algn="r">
+              <a:buNone/>
+            </a:pPr>
+            <a:r>
+              <a:rPr lang="en-US" sz="1000" dirty="0">
+                <a:solidFill>
+                  <a:srgbClr val="1A1A1A"/>
+                </a:solidFill>
+                <a:latin typeface="Calibri" pitchFamily="34" charset="0"/>
+                <a:ea typeface="Calibri" pitchFamily="34" charset="-122"/>
+                <a:cs typeface="Calibri" pitchFamily="34" charset="-120"/>
+              </a:rPr>
+              <a:t>May 2026</a:t>
+            </a:r>
+            <a:endParaRPr lang="en-US" sz="1000" dirty="0"/>
+          </a:p>
+        </p:txBody>
+      </p:sp>
+      <p:sp>
+        <p:nvSpPr>
+          <p:cNvPr id="7" name="Shape 5"/>
+          <p:cNvSpPr/>
+          <p:nvPr/>
+        </p:nvSpPr>
+        <p:spPr>
+          <a:xfrm>
+            <a:off x="411480" y="6492240"/>
+            <a:ext cx="11368735" cy="0"/>
+          </a:xfrm>
+          <a:prstGeom prst="line">
+            <a:avLst/>
+          </a:prstGeom>
+          <a:noFill/>
+          <a:ln w="6350">
+            <a:solidFill>
+              <a:srgbClr val="C9D2D9"/>
+            </a:solidFill>
+            <a:prstDash val="solid"/>
+          </a:ln>
+        </p:spPr>
+      </p:sp>
+      <p:sp>
+        <p:nvSpPr>
+          <p:cNvPr id="8" name="Text 6"/>
+          <p:cNvSpPr/>
+          <p:nvPr/>
+        </p:nvSpPr>
+        <p:spPr>
+          <a:xfrm>
+            <a:off x="411480" y="6537960"/>
+            <a:ext cx="8686800" cy="256032"/>
+          </a:xfrm>
+          <a:prstGeom prst="rect">
+            <a:avLst/>
+          </a:prstGeom>
+          <a:noFill/>
+          <a:ln/>
+        </p:spPr>
+        <p:txBody>
+          <a:bodyPr wrap="square" lIns="0" tIns="0" rIns="0" bIns="0" rtlCol="0" anchor="ctr"/>
+          <a:lstStyle/>
+          <a:p>
+            <a:pPr marL="0" indent="0">
+              <a:buNone/>
+            </a:pPr>
+            <a:r>
+              <a:rPr lang="en-US" sz="900" i="1" dirty="0">
+                <a:solidFill>
+                  <a:srgbClr val="5A6770"/>
+                </a:solidFill>
+                <a:latin typeface="Calibri" pitchFamily="34" charset="0"/>
+                <a:ea typeface="Calibri" pitchFamily="34" charset="-122"/>
+                <a:cs typeface="Calibri" pitchFamily="34" charset="-120"/>
+              </a:rPr>
+              <a:t>Form of Explanation — Explainability vs. Explicability under Multitasking Load</a:t>
+            </a:r>
+            <a:endParaRPr lang="en-US" sz="900" dirty="0"/>
+          </a:p>
+        </p:txBody>
+      </p:sp>
+      <p:sp>
+        <p:nvSpPr>
+          <p:cNvPr id="9" name="Text 7"/>
+          <p:cNvSpPr/>
+          <p:nvPr/>
+        </p:nvSpPr>
+        <p:spPr>
+          <a:xfrm>
+            <a:off x="10820095" y="6537960"/>
+            <a:ext cx="960120" cy="256032"/>
+          </a:xfrm>
+          <a:prstGeom prst="rect">
+            <a:avLst/>
+          </a:prstGeom>
+          <a:noFill/>
+          <a:ln/>
+        </p:spPr>
+        <p:txBody>
+          <a:bodyPr wrap="square" lIns="0" tIns="0" rIns="0" bIns="0" rtlCol="0" anchor="ctr"/>
+          <a:lstStyle/>
+          <a:p>
+            <a:pPr marL="0" indent="0" algn="r">
+              <a:buNone/>
+            </a:pPr>
+            <a:r>
+              <a:rPr lang="en-US" sz="900" dirty="0">
+                <a:solidFill>
+                  <a:srgbClr val="5A6770"/>
+                </a:solidFill>
+                <a:latin typeface="Calibri" pitchFamily="34" charset="0"/>
+                <a:ea typeface="Calibri" pitchFamily="34" charset="-122"/>
+                <a:cs typeface="Calibri" pitchFamily="34" charset="-120"/>
+              </a:rPr>
+              <a:t>Appendix</a:t>
+            </a:r>
+            <a:endParaRPr lang="en-US" sz="900" dirty="0"/>
+          </a:p>
+        </p:txBody>
+      </p:sp>
+      <p:sp>
+        <p:nvSpPr>
+          <p:cNvPr id="10" name="Text 8"/>
+          <p:cNvSpPr/>
+          <p:nvPr/>
+        </p:nvSpPr>
+        <p:spPr>
+          <a:xfrm>
+            <a:off x="411480" y="777240"/>
+            <a:ext cx="11368735" cy="502920"/>
+          </a:xfrm>
+          <a:prstGeom prst="rect">
+            <a:avLst/>
+          </a:prstGeom>
+          <a:noFill/>
+          <a:ln/>
+        </p:spPr>
+        <p:txBody>
+          <a:bodyPr wrap="square" lIns="0" tIns="0" rIns="0" bIns="0" rtlCol="0" anchor="ctr"/>
+          <a:lstStyle/>
+          <a:p>
+            <a:pPr marL="0" indent="0">
+              <a:buNone/>
+            </a:pPr>
+            <a:r>
+              <a:rPr lang="en-US" sz="2600" b="1" dirty="0">
+                <a:solidFill>
+                  <a:srgbClr val="143847"/>
+                </a:solidFill>
+                <a:latin typeface="Calibri" pitchFamily="34" charset="0"/>
+                <a:ea typeface="Calibri" pitchFamily="34" charset="-122"/>
+                <a:cs typeface="Calibri" pitchFamily="34" charset="-120"/>
+              </a:rPr>
+              <a:t>References</a:t>
+            </a:r>
+            <a:endParaRPr lang="en-US" sz="2600" dirty="0"/>
+          </a:p>
+        </p:txBody>
+      </p:sp>
+      <p:sp>
+        <p:nvSpPr>
+          <p:cNvPr id="11" name="Shape 9"/>
+          <p:cNvSpPr/>
+          <p:nvPr/>
+        </p:nvSpPr>
+        <p:spPr>
+          <a:xfrm>
+            <a:off x="411480" y="1298448"/>
+            <a:ext cx="1463040" cy="0"/>
+          </a:xfrm>
+          <a:prstGeom prst="line">
+            <a:avLst/>
+          </a:prstGeom>
+          <a:noFill/>
+          <a:ln w="19050">
+            <a:solidFill>
+              <a:srgbClr val="143847"/>
+            </a:solidFill>
+            <a:prstDash val="solid"/>
+          </a:ln>
+        </p:spPr>
+      </p:sp>
+      <p:sp>
+        <p:nvSpPr>
+          <p:cNvPr id="13" name="Shape 11"/>
+          <p:cNvSpPr/>
+          <p:nvPr/>
+        </p:nvSpPr>
+        <p:spPr>
+          <a:xfrm>
+            <a:off x="484632" y="1739022"/>
+            <a:ext cx="9527650" cy="2779970"/>
+          </a:xfrm>
+          <a:prstGeom prst="rect">
+            <a:avLst/>
+          </a:prstGeom>
+          <a:solidFill>
+            <a:srgbClr val="FFFFFF"/>
+          </a:solidFill>
+          <a:ln w="9525">
+            <a:solidFill>
+              <a:srgbClr val="C9D2D9"/>
+            </a:solidFill>
+            <a:prstDash val="solid"/>
+          </a:ln>
+        </p:spPr>
+        <p:txBody>
+          <a:bodyPr/>
+          <a:lstStyle/>
+          <a:p>
+            <a:r>
+              <a:rPr lang="de-DE" sz="1400" dirty="0"/>
+              <a:t>Mercado, J. E., Rupp, M. A., Chen, J. Y. C., Barnes, M. J., Barber, D., &amp; </a:t>
+            </a:r>
+            <a:r>
+              <a:rPr lang="de-DE" sz="1400" dirty="0" err="1"/>
+              <a:t>Procci</a:t>
+            </a:r>
+            <a:r>
+              <a:rPr lang="de-DE" sz="1400" dirty="0"/>
+              <a:t>, K. (2016). Intelligent Agent Transparency in Human–Agent Teaming </a:t>
+            </a:r>
+            <a:r>
+              <a:rPr lang="de-DE" sz="1400" dirty="0" err="1"/>
+              <a:t>for</a:t>
+            </a:r>
+            <a:r>
+              <a:rPr lang="de-DE" sz="1400" dirty="0"/>
+              <a:t> Multi-</a:t>
+            </a:r>
+            <a:r>
+              <a:rPr lang="de-DE" sz="1400" dirty="0" err="1"/>
+              <a:t>UxV</a:t>
+            </a:r>
+            <a:r>
+              <a:rPr lang="de-DE" sz="1400" dirty="0"/>
+              <a:t> Management. Human </a:t>
+            </a:r>
+            <a:r>
+              <a:rPr lang="de-DE" sz="1400" dirty="0" err="1"/>
+              <a:t>Factors</a:t>
+            </a:r>
+            <a:r>
+              <a:rPr lang="de-DE" sz="1400" dirty="0"/>
+              <a:t>, 58(3), 401–415. </a:t>
+            </a:r>
+          </a:p>
+          <a:p>
+            <a:endParaRPr lang="de-DE" sz="1400" dirty="0"/>
+          </a:p>
+          <a:p>
+            <a:r>
+              <a:rPr lang="de-DE" sz="1400" dirty="0" err="1"/>
+              <a:t>Stowers</a:t>
+            </a:r>
+            <a:r>
+              <a:rPr lang="de-DE" sz="1400" dirty="0"/>
+              <a:t>, K., </a:t>
+            </a:r>
+            <a:r>
+              <a:rPr lang="de-DE" sz="1400" dirty="0" err="1"/>
+              <a:t>Kasdaglis</a:t>
+            </a:r>
+            <a:r>
+              <a:rPr lang="de-DE" sz="1400" dirty="0"/>
+              <a:t>, N., Rupp, M., Chen, J., Barber, D., &amp; Barnes, M. (2017). </a:t>
+            </a:r>
+            <a:r>
+              <a:rPr lang="de-DE" sz="1400" dirty="0" err="1"/>
+              <a:t>Insights</a:t>
+            </a:r>
+            <a:r>
+              <a:rPr lang="de-DE" sz="1400" dirty="0"/>
+              <a:t> </a:t>
+            </a:r>
+            <a:r>
+              <a:rPr lang="de-DE" sz="1400" dirty="0" err="1"/>
+              <a:t>into</a:t>
+            </a:r>
+            <a:r>
+              <a:rPr lang="de-DE" sz="1400" dirty="0"/>
+              <a:t> Human-Agent Teaming: Intelligent Agent Transparency and </a:t>
+            </a:r>
+            <a:r>
+              <a:rPr lang="de-DE" sz="1400" dirty="0" err="1"/>
+              <a:t>Uncertainty</a:t>
+            </a:r>
+            <a:r>
+              <a:rPr lang="de-DE" sz="1400" dirty="0"/>
+              <a:t>. In P. Savage-</a:t>
+            </a:r>
+            <a:r>
+              <a:rPr lang="de-DE" sz="1400" dirty="0" err="1"/>
+              <a:t>Knepshield</a:t>
+            </a:r>
+            <a:r>
+              <a:rPr lang="de-DE" sz="1400" dirty="0"/>
+              <a:t> &amp; J. Chen (Eds.), </a:t>
+            </a:r>
+            <a:r>
+              <a:rPr lang="de-DE" sz="1400" dirty="0" err="1"/>
+              <a:t>Advances</a:t>
+            </a:r>
+            <a:r>
+              <a:rPr lang="de-DE" sz="1400" dirty="0"/>
+              <a:t> in Human </a:t>
+            </a:r>
+            <a:r>
+              <a:rPr lang="de-DE" sz="1400" dirty="0" err="1"/>
+              <a:t>Factors</a:t>
+            </a:r>
+            <a:r>
+              <a:rPr lang="de-DE" sz="1400" dirty="0"/>
+              <a:t> in Robots and </a:t>
+            </a:r>
+            <a:r>
+              <a:rPr lang="de-DE" sz="1400" dirty="0" err="1"/>
+              <a:t>Unmanned</a:t>
+            </a:r>
+            <a:r>
+              <a:rPr lang="de-DE" sz="1400" dirty="0"/>
+              <a:t> Systems (</a:t>
+            </a:r>
+            <a:r>
+              <a:rPr lang="de-DE" sz="1400" dirty="0" err="1"/>
+              <a:t>Advances</a:t>
+            </a:r>
+            <a:r>
+              <a:rPr lang="de-DE" sz="1400" dirty="0"/>
+              <a:t> in Intelligent Systems and Computing 499, pp. 149–160)</a:t>
+            </a:r>
+          </a:p>
+          <a:p>
+            <a:endParaRPr lang="de-DE" sz="1400" dirty="0"/>
+          </a:p>
+          <a:p>
+            <a:r>
+              <a:rPr lang="de-DE" sz="1400" dirty="0"/>
+              <a:t>Wang, X., &amp; Yin, M. (2021). Are </a:t>
+            </a:r>
+            <a:r>
+              <a:rPr lang="de-DE" sz="1400" dirty="0" err="1"/>
+              <a:t>Explanations</a:t>
+            </a:r>
+            <a:r>
+              <a:rPr lang="de-DE" sz="1400" dirty="0"/>
+              <a:t> </a:t>
+            </a:r>
+            <a:r>
+              <a:rPr lang="de-DE" sz="1400" dirty="0" err="1"/>
+              <a:t>Helpful</a:t>
+            </a:r>
+            <a:r>
+              <a:rPr lang="de-DE" sz="1400" dirty="0"/>
+              <a:t>? A </a:t>
+            </a:r>
+            <a:r>
+              <a:rPr lang="de-DE" sz="1400" dirty="0" err="1"/>
+              <a:t>Comparative</a:t>
+            </a:r>
+            <a:r>
+              <a:rPr lang="de-DE" sz="1400" dirty="0"/>
+              <a:t> Study </a:t>
+            </a:r>
+            <a:r>
+              <a:rPr lang="de-DE" sz="1400" dirty="0" err="1"/>
+              <a:t>of</a:t>
+            </a:r>
+            <a:r>
+              <a:rPr lang="de-DE" sz="1400" dirty="0"/>
+              <a:t> </a:t>
+            </a:r>
+            <a:r>
+              <a:rPr lang="de-DE" sz="1400" dirty="0" err="1"/>
+              <a:t>the</a:t>
+            </a:r>
+            <a:r>
+              <a:rPr lang="de-DE" sz="1400" dirty="0"/>
+              <a:t> </a:t>
+            </a:r>
+            <a:r>
+              <a:rPr lang="de-DE" sz="1400" dirty="0" err="1"/>
+              <a:t>Effects</a:t>
+            </a:r>
+            <a:r>
+              <a:rPr lang="de-DE" sz="1400" dirty="0"/>
+              <a:t> </a:t>
+            </a:r>
+            <a:r>
+              <a:rPr lang="de-DE" sz="1400" dirty="0" err="1"/>
+              <a:t>of</a:t>
+            </a:r>
+            <a:r>
+              <a:rPr lang="de-DE" sz="1400" dirty="0"/>
+              <a:t> </a:t>
+            </a:r>
+            <a:r>
+              <a:rPr lang="de-DE" sz="1400" dirty="0" err="1"/>
+              <a:t>Explanations</a:t>
+            </a:r>
+            <a:r>
+              <a:rPr lang="de-DE" sz="1400" dirty="0"/>
+              <a:t> in AI-</a:t>
+            </a:r>
+            <a:r>
+              <a:rPr lang="de-DE" sz="1400" dirty="0" err="1"/>
+              <a:t>Assisted</a:t>
+            </a:r>
+            <a:r>
+              <a:rPr lang="de-DE" sz="1400" dirty="0"/>
+              <a:t> </a:t>
+            </a:r>
+            <a:r>
+              <a:rPr lang="de-DE" sz="1400" dirty="0" err="1"/>
+              <a:t>Decision</a:t>
+            </a:r>
+            <a:r>
+              <a:rPr lang="de-DE" sz="1400" dirty="0"/>
+              <a:t>-Making. In 26th International Conference on Intelligent User Interfaces.</a:t>
+            </a:r>
+          </a:p>
+          <a:p>
+            <a:endParaRPr lang="de-DE" sz="1400" dirty="0"/>
+          </a:p>
+          <a:p>
+            <a:r>
+              <a:rPr lang="de-DE" sz="1400" dirty="0" err="1"/>
+              <a:t>Bansal</a:t>
+            </a:r>
+            <a:r>
+              <a:rPr lang="de-DE" sz="1400" dirty="0"/>
+              <a:t>, G., Wu, T., Zhou, J., </a:t>
+            </a:r>
+            <a:r>
+              <a:rPr lang="de-DE" sz="1400" dirty="0" err="1"/>
+              <a:t>Fok</a:t>
+            </a:r>
+            <a:r>
+              <a:rPr lang="de-DE" sz="1400" dirty="0"/>
+              <a:t>, R., </a:t>
+            </a:r>
+            <a:r>
+              <a:rPr lang="de-DE" sz="1400" dirty="0" err="1"/>
+              <a:t>Nushi</a:t>
+            </a:r>
+            <a:r>
+              <a:rPr lang="de-DE" sz="1400" dirty="0"/>
+              <a:t>, B., </a:t>
+            </a:r>
+            <a:r>
+              <a:rPr lang="de-DE" sz="1400" dirty="0" err="1"/>
+              <a:t>Kamar</a:t>
+            </a:r>
+            <a:r>
+              <a:rPr lang="de-DE" sz="1400" dirty="0"/>
+              <a:t>, E., Ribeiro, M. T., &amp; Weld, D. S. (2021). </a:t>
+            </a:r>
+            <a:r>
+              <a:rPr lang="de-DE" sz="1400" dirty="0" err="1"/>
+              <a:t>Does</a:t>
+            </a:r>
+            <a:r>
+              <a:rPr lang="de-DE" sz="1400" dirty="0"/>
+              <a:t> </a:t>
+            </a:r>
+            <a:r>
+              <a:rPr lang="de-DE" sz="1400" dirty="0" err="1"/>
+              <a:t>the</a:t>
+            </a:r>
+            <a:r>
+              <a:rPr lang="de-DE" sz="1400" dirty="0"/>
+              <a:t> Whole </a:t>
+            </a:r>
+            <a:r>
+              <a:rPr lang="de-DE" sz="1400" dirty="0" err="1"/>
+              <a:t>Exceed</a:t>
+            </a:r>
+            <a:r>
+              <a:rPr lang="de-DE" sz="1400" dirty="0"/>
+              <a:t> </a:t>
+            </a:r>
+            <a:r>
+              <a:rPr lang="de-DE" sz="1400" dirty="0" err="1"/>
+              <a:t>its</a:t>
+            </a:r>
+            <a:r>
+              <a:rPr lang="de-DE" sz="1400" dirty="0"/>
+              <a:t> Parts? The </a:t>
+            </a:r>
+            <a:r>
+              <a:rPr lang="de-DE" sz="1400" dirty="0" err="1"/>
+              <a:t>Effect</a:t>
+            </a:r>
+            <a:r>
+              <a:rPr lang="de-DE" sz="1400" dirty="0"/>
+              <a:t> </a:t>
+            </a:r>
+            <a:r>
+              <a:rPr lang="de-DE" sz="1400" dirty="0" err="1"/>
+              <a:t>of</a:t>
+            </a:r>
+            <a:r>
+              <a:rPr lang="de-DE" sz="1400" dirty="0"/>
+              <a:t> AI </a:t>
+            </a:r>
+            <a:r>
+              <a:rPr lang="de-DE" sz="1400" dirty="0" err="1"/>
+              <a:t>Explanations</a:t>
+            </a:r>
+            <a:r>
+              <a:rPr lang="de-DE" sz="1400" dirty="0"/>
+              <a:t> on </a:t>
+            </a:r>
+            <a:r>
+              <a:rPr lang="de-DE" sz="1400" dirty="0" err="1"/>
+              <a:t>Complementary</a:t>
+            </a:r>
+            <a:r>
+              <a:rPr lang="de-DE" sz="1400" dirty="0"/>
+              <a:t> Team Performance. In CHI Conference on Human </a:t>
+            </a:r>
+            <a:r>
+              <a:rPr lang="de-DE" sz="1400" dirty="0" err="1"/>
+              <a:t>Factors</a:t>
+            </a:r>
+            <a:r>
+              <a:rPr lang="de-DE" sz="1400" dirty="0"/>
+              <a:t> in Computing.</a:t>
+            </a:r>
+          </a:p>
+        </p:txBody>
+      </p:sp>
+      <p:sp>
+        <p:nvSpPr>
+          <p:cNvPr id="14" name="Shape 12"/>
+          <p:cNvSpPr/>
+          <p:nvPr/>
+        </p:nvSpPr>
+        <p:spPr>
+          <a:xfrm>
+            <a:off x="411480" y="1728747"/>
+            <a:ext cx="73152" cy="2790245"/>
+          </a:xfrm>
+          <a:prstGeom prst="rect">
+            <a:avLst/>
+          </a:prstGeom>
+          <a:solidFill>
+            <a:srgbClr val="143847"/>
+          </a:solidFill>
+          <a:ln w="12700">
+            <a:solidFill>
+              <a:srgbClr val="143847"/>
+            </a:solidFill>
+            <a:prstDash val="solid"/>
+          </a:ln>
+        </p:spPr>
+      </p:sp>
+      <p:sp>
+        <p:nvSpPr>
+          <p:cNvPr id="17" name="Text 15"/>
+          <p:cNvSpPr/>
+          <p:nvPr/>
+        </p:nvSpPr>
+        <p:spPr>
+          <a:xfrm>
+            <a:off x="4952848" y="1829332"/>
+            <a:ext cx="868680" cy="219456"/>
+          </a:xfrm>
+          <a:prstGeom prst="rect">
+            <a:avLst/>
+          </a:prstGeom>
+          <a:noFill/>
+          <a:ln/>
+        </p:spPr>
+        <p:txBody>
+          <a:bodyPr wrap="square" lIns="0" tIns="0" rIns="0" bIns="0" rtlCol="0" anchor="ctr"/>
+          <a:lstStyle/>
+          <a:p>
+            <a:pPr marL="0" indent="0" algn="ctr">
+              <a:buNone/>
+            </a:pPr>
+            <a:r>
+              <a:rPr lang="en-US" sz="1000" b="1" dirty="0">
+                <a:solidFill>
+                  <a:srgbClr val="FFFFFF"/>
+                </a:solidFill>
+                <a:latin typeface="Calibri" pitchFamily="34" charset="0"/>
+                <a:ea typeface="Calibri" pitchFamily="34" charset="-122"/>
+                <a:cs typeface="Calibri" pitchFamily="34" charset="-120"/>
+              </a:rPr>
+              <a:t>H1, </a:t>
+            </a:r>
+            <a:endParaRPr lang="en-US" sz="1000" dirty="0"/>
+          </a:p>
+        </p:txBody>
+      </p:sp>
+      <p:sp>
+        <p:nvSpPr>
+          <p:cNvPr id="19" name="Text 17"/>
+          <p:cNvSpPr/>
+          <p:nvPr/>
+        </p:nvSpPr>
+        <p:spPr>
+          <a:xfrm>
+            <a:off x="695341" y="1965169"/>
+            <a:ext cx="7547511" cy="2465300"/>
+          </a:xfrm>
+          <a:prstGeom prst="rect">
+            <a:avLst/>
+          </a:prstGeom>
+          <a:noFill/>
+          <a:ln/>
+        </p:spPr>
+        <p:txBody>
+          <a:bodyPr wrap="square" lIns="0" tIns="0" rIns="0" bIns="0" rtlCol="0" anchor="t"/>
+          <a:lstStyle/>
+          <a:p>
+            <a:pPr marL="0" indent="0">
+              <a:buNone/>
+            </a:pPr>
+            <a:endParaRPr lang="en-US" sz="1050" dirty="0"/>
+          </a:p>
+        </p:txBody>
+      </p:sp>
+    </p:spTree>
+    <p:extLst>
+      <p:ext uri="{BB962C8B-B14F-4D97-AF65-F5344CB8AC3E}">
+        <p14:creationId xmlns:p14="http://schemas.microsoft.com/office/powerpoint/2010/main" val="472062687"/>
+      </p:ext>
+    </p:extLst>
   </p:cSld>
   <p:clrMapOvr>
     <a:masterClrMapping/>
